--- a/納品レポート/PRIMECHANGE戦略レポート/PRIMECHANGE_分析2_スタッフパフォーマンス.pptx
+++ b/納品レポート/PRIMECHANGE戦略レポート/PRIMECHANGE_分析2_スタッフパフォーマンス.pptx
@@ -1342,7 +1342,7 @@
                 <a:ea typeface="Arial" pitchFamily="34" charset="-122"/>
                 <a:cs typeface="Arial" pitchFamily="34" charset="-120"/>
               </a:rPr>
-              <a:t>19ホテル・510名のスタッフパフォーマンスデータに基づく分析</a:t>
+              <a:t>19ホテル・312名のスタッフパフォーマンスデータに基づく分析</a:t>
             </a:r>
             <a:endParaRPr lang="en-US" sz="1200" dirty="0"/>
           </a:p>
@@ -1506,7 +1506,7 @@
                 <a:ea typeface="Arial" pitchFamily="34" charset="-122"/>
                 <a:cs typeface="Arial" pitchFamily="34" charset="-120"/>
               </a:rPr>
-              <a:t>510名</a:t>
+              <a:t>312名</a:t>
             </a:r>
             <a:endParaRPr lang="en-US" sz="2400" dirty="0"/>
           </a:p>
@@ -1645,7 +1645,7 @@
                 <a:ea typeface="Arial" pitchFamily="34" charset="-122"/>
                 <a:cs typeface="Arial" pitchFamily="34" charset="-120"/>
               </a:rPr>
-              <a:t>68名</a:t>
+              <a:t>111名</a:t>
             </a:r>
             <a:endParaRPr lang="en-US" sz="2400" dirty="0"/>
           </a:p>
@@ -1784,7 +1784,7 @@
                 <a:ea typeface="Arial" pitchFamily="34" charset="-122"/>
                 <a:cs typeface="Arial" pitchFamily="34" charset="-120"/>
               </a:rPr>
-              <a:t>10.2室</a:t>
+              <a:t>11.1室</a:t>
             </a:r>
             <a:endParaRPr lang="en-US" sz="2400" dirty="0"/>
           </a:p>
@@ -1823,7 +1823,7 @@
                 <a:ea typeface="Arial" pitchFamily="34" charset="-122"/>
                 <a:cs typeface="Arial" pitchFamily="34" charset="-120"/>
               </a:rPr>
-              <a:t>最高24.3室</a:t>
+              <a:t>最高26.0室</a:t>
             </a:r>
             <a:endParaRPr lang="en-US" sz="900" dirty="0"/>
           </a:p>
@@ -1923,7 +1923,7 @@
                 <a:ea typeface="Arial" pitchFamily="34" charset="-122"/>
                 <a:cs typeface="Arial" pitchFamily="34" charset="-120"/>
               </a:rPr>
-              <a:t>19.3日</a:t>
+              <a:t>31.0日</a:t>
             </a:r>
             <a:endParaRPr lang="en-US" sz="2400" dirty="0"/>
           </a:p>
@@ -1962,7 +1962,7 @@
                 <a:ea typeface="Arial" pitchFamily="34" charset="-122"/>
                 <a:cs typeface="Arial" pitchFamily="34" charset="-120"/>
               </a:rPr>
-              <a:t>高出勤243名</a:t>
+              <a:t>高出勤251名</a:t>
             </a:r>
             <a:endParaRPr lang="en-US" sz="900" dirty="0"/>
           </a:p>
@@ -2499,6 +2499,348 @@
                           <a:ea typeface="Arial" pitchFamily="34" charset="-122"/>
                           <a:cs typeface="Arial" pitchFamily="34" charset="-120"/>
                         </a:rPr>
+                        <a:t>コンフォートH.横浜関内</a:t>
+                      </a:r>
+                      <a:endParaRPr lang="en-US" sz="700" dirty="0">
+                        <a:latin typeface="Arial" charset="0"/>
+                        <a:ea typeface="Arial" charset="0"/>
+                        <a:cs typeface="Arial" charset="0"/>
+                      </a:endParaRPr>
+                    </a:p>
+                  </a:txBody>
+                  <a:tcPr marL="91440" marR="91440" marT="45720" marB="45720">
+                    <a:lnL w="6350" cap="flat" cmpd="sng" algn="ctr">
+                      <a:solidFill>
+                        <a:srgbClr val="CCCCCC"/>
+                      </a:solidFill>
+                      <a:prstDash val="solid"/>
+                      <a:round/>
+                      <a:headEnd type="none" w="med" len="med"/>
+                      <a:tailEnd type="none" w="med" len="med"/>
+                    </a:lnL>
+                    <a:lnR w="6350" cap="flat" cmpd="sng" algn="ctr">
+                      <a:solidFill>
+                        <a:srgbClr val="CCCCCC"/>
+                      </a:solidFill>
+                      <a:prstDash val="solid"/>
+                      <a:round/>
+                      <a:headEnd type="none" w="med" len="med"/>
+                      <a:tailEnd type="none" w="med" len="med"/>
+                    </a:lnR>
+                    <a:lnT w="6350" cap="flat" cmpd="sng" algn="ctr">
+                      <a:solidFill>
+                        <a:srgbClr val="CCCCCC"/>
+                      </a:solidFill>
+                      <a:prstDash val="solid"/>
+                      <a:round/>
+                      <a:headEnd type="none" w="med" len="med"/>
+                      <a:tailEnd type="none" w="med" len="med"/>
+                    </a:lnT>
+                    <a:lnB w="6350" cap="flat" cmpd="sng" algn="ctr">
+                      <a:solidFill>
+                        <a:srgbClr val="CCCCCC"/>
+                      </a:solidFill>
+                      <a:prstDash val="solid"/>
+                      <a:round/>
+                      <a:headEnd type="none" w="med" len="med"/>
+                      <a:tailEnd type="none" w="med" len="med"/>
+                    </a:lnB>
+                    <a:solidFill>
+                      <a:srgbClr val="F5F7FA"/>
+                    </a:solidFill>
+                  </a:tcPr>
+                </a:tc>
+                <a:tc>
+                  <a:txBody>
+                    <a:bodyPr/>
+                    <a:lstStyle/>
+                    <a:p>
+                      <a:pPr algn="ctr" indent="0" marL="0">
+                        <a:buNone/>
+                      </a:pPr>
+                      <a:r>
+                        <a:rPr lang="en-US" sz="800" dirty="0">
+                          <a:solidFill>
+                            <a:srgbClr val="000000"/>
+                          </a:solidFill>
+                          <a:latin typeface="Arial" pitchFamily="34" charset="0"/>
+                          <a:ea typeface="Arial" pitchFamily="34" charset="-122"/>
+                          <a:cs typeface="Arial" pitchFamily="34" charset="-120"/>
+                        </a:rPr>
+                        <a:t>1</a:t>
+                      </a:r>
+                      <a:endParaRPr lang="en-US" sz="800" dirty="0">
+                        <a:latin typeface="Arial" charset="0"/>
+                        <a:ea typeface="Arial" charset="0"/>
+                        <a:cs typeface="Arial" charset="0"/>
+                      </a:endParaRPr>
+                    </a:p>
+                  </a:txBody>
+                  <a:tcPr marL="91440" marR="91440" marT="45720" marB="45720">
+                    <a:lnL w="6350" cap="flat" cmpd="sng" algn="ctr">
+                      <a:solidFill>
+                        <a:srgbClr val="CCCCCC"/>
+                      </a:solidFill>
+                      <a:prstDash val="solid"/>
+                      <a:round/>
+                      <a:headEnd type="none" w="med" len="med"/>
+                      <a:tailEnd type="none" w="med" len="med"/>
+                    </a:lnL>
+                    <a:lnR w="6350" cap="flat" cmpd="sng" algn="ctr">
+                      <a:solidFill>
+                        <a:srgbClr val="CCCCCC"/>
+                      </a:solidFill>
+                      <a:prstDash val="solid"/>
+                      <a:round/>
+                      <a:headEnd type="none" w="med" len="med"/>
+                      <a:tailEnd type="none" w="med" len="med"/>
+                    </a:lnR>
+                    <a:lnT w="6350" cap="flat" cmpd="sng" algn="ctr">
+                      <a:solidFill>
+                        <a:srgbClr val="CCCCCC"/>
+                      </a:solidFill>
+                      <a:prstDash val="solid"/>
+                      <a:round/>
+                      <a:headEnd type="none" w="med" len="med"/>
+                      <a:tailEnd type="none" w="med" len="med"/>
+                    </a:lnT>
+                    <a:lnB w="6350" cap="flat" cmpd="sng" algn="ctr">
+                      <a:solidFill>
+                        <a:srgbClr val="CCCCCC"/>
+                      </a:solidFill>
+                      <a:prstDash val="solid"/>
+                      <a:round/>
+                      <a:headEnd type="none" w="med" len="med"/>
+                      <a:tailEnd type="none" w="med" len="med"/>
+                    </a:lnB>
+                    <a:solidFill>
+                      <a:srgbClr val="F5F7FA"/>
+                    </a:solidFill>
+                  </a:tcPr>
+                </a:tc>
+                <a:tc>
+                  <a:txBody>
+                    <a:bodyPr/>
+                    <a:lstStyle/>
+                    <a:p>
+                      <a:pPr algn="ctr" indent="0" marL="0">
+                        <a:buNone/>
+                      </a:pPr>
+                      <a:r>
+                        <a:rPr lang="en-US" sz="800" dirty="0">
+                          <a:solidFill>
+                            <a:srgbClr val="000000"/>
+                          </a:solidFill>
+                          <a:latin typeface="Arial" pitchFamily="34" charset="0"/>
+                          <a:ea typeface="Arial" pitchFamily="34" charset="-122"/>
+                          <a:cs typeface="Arial" pitchFamily="34" charset="-120"/>
+                        </a:rPr>
+                        <a:t>-</a:t>
+                      </a:r>
+                      <a:endParaRPr lang="en-US" sz="800" dirty="0">
+                        <a:latin typeface="Arial" charset="0"/>
+                        <a:ea typeface="Arial" charset="0"/>
+                        <a:cs typeface="Arial" charset="0"/>
+                      </a:endParaRPr>
+                    </a:p>
+                  </a:txBody>
+                  <a:tcPr marL="91440" marR="91440" marT="45720" marB="45720">
+                    <a:lnL w="6350" cap="flat" cmpd="sng" algn="ctr">
+                      <a:solidFill>
+                        <a:srgbClr val="CCCCCC"/>
+                      </a:solidFill>
+                      <a:prstDash val="solid"/>
+                      <a:round/>
+                      <a:headEnd type="none" w="med" len="med"/>
+                      <a:tailEnd type="none" w="med" len="med"/>
+                    </a:lnL>
+                    <a:lnR w="6350" cap="flat" cmpd="sng" algn="ctr">
+                      <a:solidFill>
+                        <a:srgbClr val="CCCCCC"/>
+                      </a:solidFill>
+                      <a:prstDash val="solid"/>
+                      <a:round/>
+                      <a:headEnd type="none" w="med" len="med"/>
+                      <a:tailEnd type="none" w="med" len="med"/>
+                    </a:lnR>
+                    <a:lnT w="6350" cap="flat" cmpd="sng" algn="ctr">
+                      <a:solidFill>
+                        <a:srgbClr val="CCCCCC"/>
+                      </a:solidFill>
+                      <a:prstDash val="solid"/>
+                      <a:round/>
+                      <a:headEnd type="none" w="med" len="med"/>
+                      <a:tailEnd type="none" w="med" len="med"/>
+                    </a:lnT>
+                    <a:lnB w="6350" cap="flat" cmpd="sng" algn="ctr">
+                      <a:solidFill>
+                        <a:srgbClr val="CCCCCC"/>
+                      </a:solidFill>
+                      <a:prstDash val="solid"/>
+                      <a:round/>
+                      <a:headEnd type="none" w="med" len="med"/>
+                      <a:tailEnd type="none" w="med" len="med"/>
+                    </a:lnB>
+                    <a:solidFill>
+                      <a:srgbClr val="F5F7FA"/>
+                    </a:solidFill>
+                  </a:tcPr>
+                </a:tc>
+                <a:tc>
+                  <a:txBody>
+                    <a:bodyPr/>
+                    <a:lstStyle/>
+                    <a:p>
+                      <a:pPr algn="ctr" indent="0" marL="0">
+                        <a:buNone/>
+                      </a:pPr>
+                      <a:r>
+                        <a:rPr lang="en-US" sz="800" b="1" dirty="0">
+                          <a:solidFill>
+                            <a:srgbClr val="000000"/>
+                          </a:solidFill>
+                          <a:latin typeface="Arial" pitchFamily="34" charset="0"/>
+                          <a:ea typeface="Arial" pitchFamily="34" charset="-122"/>
+                          <a:cs typeface="Arial" pitchFamily="34" charset="-120"/>
+                        </a:rPr>
+                        <a:t>42</a:t>
+                      </a:r>
+                      <a:endParaRPr lang="en-US" sz="800" dirty="0">
+                        <a:latin typeface="Arial" charset="0"/>
+                        <a:ea typeface="Arial" charset="0"/>
+                        <a:cs typeface="Arial" charset="0"/>
+                      </a:endParaRPr>
+                    </a:p>
+                  </a:txBody>
+                  <a:tcPr marL="91440" marR="91440" marT="45720" marB="45720">
+                    <a:lnL w="6350" cap="flat" cmpd="sng" algn="ctr">
+                      <a:solidFill>
+                        <a:srgbClr val="CCCCCC"/>
+                      </a:solidFill>
+                      <a:prstDash val="solid"/>
+                      <a:round/>
+                      <a:headEnd type="none" w="med" len="med"/>
+                      <a:tailEnd type="none" w="med" len="med"/>
+                    </a:lnL>
+                    <a:lnR w="6350" cap="flat" cmpd="sng" algn="ctr">
+                      <a:solidFill>
+                        <a:srgbClr val="CCCCCC"/>
+                      </a:solidFill>
+                      <a:prstDash val="solid"/>
+                      <a:round/>
+                      <a:headEnd type="none" w="med" len="med"/>
+                      <a:tailEnd type="none" w="med" len="med"/>
+                    </a:lnR>
+                    <a:lnT w="6350" cap="flat" cmpd="sng" algn="ctr">
+                      <a:solidFill>
+                        <a:srgbClr val="CCCCCC"/>
+                      </a:solidFill>
+                      <a:prstDash val="solid"/>
+                      <a:round/>
+                      <a:headEnd type="none" w="med" len="med"/>
+                      <a:tailEnd type="none" w="med" len="med"/>
+                    </a:lnT>
+                    <a:lnB w="6350" cap="flat" cmpd="sng" algn="ctr">
+                      <a:solidFill>
+                        <a:srgbClr val="CCCCCC"/>
+                      </a:solidFill>
+                      <a:prstDash val="solid"/>
+                      <a:round/>
+                      <a:headEnd type="none" w="med" len="med"/>
+                      <a:tailEnd type="none" w="med" len="med"/>
+                    </a:lnB>
+                    <a:solidFill>
+                      <a:srgbClr val="F5F7FA"/>
+                    </a:solidFill>
+                  </a:tcPr>
+                </a:tc>
+                <a:tc>
+                  <a:txBody>
+                    <a:bodyPr/>
+                    <a:lstStyle/>
+                    <a:p>
+                      <a:pPr algn="ctr" indent="0" marL="0">
+                        <a:buNone/>
+                      </a:pPr>
+                      <a:r>
+                        <a:rPr lang="en-US" sz="800" b="1" dirty="0">
+                          <a:solidFill>
+                            <a:srgbClr val="333333"/>
+                          </a:solidFill>
+                          <a:latin typeface="Arial" pitchFamily="34" charset="0"/>
+                          <a:ea typeface="Arial" pitchFamily="34" charset="-122"/>
+                          <a:cs typeface="Arial" pitchFamily="34" charset="-120"/>
+                        </a:rPr>
+                        <a:t>0.00</a:t>
+                      </a:r>
+                      <a:endParaRPr lang="en-US" sz="800" dirty="0">
+                        <a:latin typeface="Arial" charset="0"/>
+                        <a:ea typeface="Arial" charset="0"/>
+                        <a:cs typeface="Arial" charset="0"/>
+                      </a:endParaRPr>
+                    </a:p>
+                  </a:txBody>
+                  <a:tcPr marL="91440" marR="91440" marT="45720" marB="45720">
+                    <a:lnL w="6350" cap="flat" cmpd="sng" algn="ctr">
+                      <a:solidFill>
+                        <a:srgbClr val="CCCCCC"/>
+                      </a:solidFill>
+                      <a:prstDash val="solid"/>
+                      <a:round/>
+                      <a:headEnd type="none" w="med" len="med"/>
+                      <a:tailEnd type="none" w="med" len="med"/>
+                    </a:lnL>
+                    <a:lnR w="6350" cap="flat" cmpd="sng" algn="ctr">
+                      <a:solidFill>
+                        <a:srgbClr val="CCCCCC"/>
+                      </a:solidFill>
+                      <a:prstDash val="solid"/>
+                      <a:round/>
+                      <a:headEnd type="none" w="med" len="med"/>
+                      <a:tailEnd type="none" w="med" len="med"/>
+                    </a:lnR>
+                    <a:lnT w="6350" cap="flat" cmpd="sng" algn="ctr">
+                      <a:solidFill>
+                        <a:srgbClr val="CCCCCC"/>
+                      </a:solidFill>
+                      <a:prstDash val="solid"/>
+                      <a:round/>
+                      <a:headEnd type="none" w="med" len="med"/>
+                      <a:tailEnd type="none" w="med" len="med"/>
+                    </a:lnT>
+                    <a:lnB w="6350" cap="flat" cmpd="sng" algn="ctr">
+                      <a:solidFill>
+                        <a:srgbClr val="CCCCCC"/>
+                      </a:solidFill>
+                      <a:prstDash val="solid"/>
+                      <a:round/>
+                      <a:headEnd type="none" w="med" len="med"/>
+                      <a:tailEnd type="none" w="med" len="med"/>
+                    </a:lnB>
+                    <a:solidFill>
+                      <a:srgbClr val="F5F7FA"/>
+                    </a:solidFill>
+                  </a:tcPr>
+                </a:tc>
+              </a:tr>
+              <a:tr h="246185">
+                <a:tc>
+                  <a:txBody>
+                    <a:bodyPr/>
+                    <a:lstStyle/>
+                    <a:p>
+                      <a:pPr algn="ctr" indent="0" marL="0">
+                        <a:buNone/>
+                      </a:pPr>
+                      <a:r>
+                        <a:rPr lang="en-US" sz="700" dirty="0">
+                          <a:solidFill>
+                            <a:srgbClr val="000000"/>
+                          </a:solidFill>
+                          <a:latin typeface="Arial" pitchFamily="34" charset="0"/>
+                          <a:ea typeface="Arial" pitchFamily="34" charset="-122"/>
+                          <a:cs typeface="Arial" pitchFamily="34" charset="-120"/>
+                        </a:rPr>
                         <a:t>川崎日航H.</a:t>
                       </a:r>
                       <a:endParaRPr lang="en-US" sz="700" dirty="0">
@@ -2546,7 +2888,7 @@
                       <a:tailEnd type="none" w="med" len="med"/>
                     </a:lnB>
                     <a:solidFill>
-                      <a:srgbClr val="F5F7FA"/>
+                      <a:srgbClr val="FFFFFF"/>
                     </a:solidFill>
                   </a:tcPr>
                 </a:tc>
@@ -2614,6 +2956,280 @@
                       <a:tailEnd type="none" w="med" len="med"/>
                     </a:lnB>
                     <a:solidFill>
+                      <a:srgbClr val="FFFFFF"/>
+                    </a:solidFill>
+                  </a:tcPr>
+                </a:tc>
+                <a:tc>
+                  <a:txBody>
+                    <a:bodyPr/>
+                    <a:lstStyle/>
+                    <a:p>
+                      <a:pPr algn="ctr" indent="0" marL="0">
+                        <a:buNone/>
+                      </a:pPr>
+                      <a:r>
+                        <a:rPr lang="en-US" sz="800" dirty="0">
+                          <a:solidFill>
+                            <a:srgbClr val="000000"/>
+                          </a:solidFill>
+                          <a:latin typeface="Arial" pitchFamily="34" charset="0"/>
+                          <a:ea typeface="Arial" pitchFamily="34" charset="-122"/>
+                          <a:cs typeface="Arial" pitchFamily="34" charset="-120"/>
+                        </a:rPr>
+                        <a:t>16</a:t>
+                      </a:r>
+                      <a:endParaRPr lang="en-US" sz="800" dirty="0">
+                        <a:latin typeface="Arial" charset="0"/>
+                        <a:ea typeface="Arial" charset="0"/>
+                        <a:cs typeface="Arial" charset="0"/>
+                      </a:endParaRPr>
+                    </a:p>
+                  </a:txBody>
+                  <a:tcPr marL="91440" marR="91440" marT="45720" marB="45720">
+                    <a:lnL w="6350" cap="flat" cmpd="sng" algn="ctr">
+                      <a:solidFill>
+                        <a:srgbClr val="CCCCCC"/>
+                      </a:solidFill>
+                      <a:prstDash val="solid"/>
+                      <a:round/>
+                      <a:headEnd type="none" w="med" len="med"/>
+                      <a:tailEnd type="none" w="med" len="med"/>
+                    </a:lnL>
+                    <a:lnR w="6350" cap="flat" cmpd="sng" algn="ctr">
+                      <a:solidFill>
+                        <a:srgbClr val="CCCCCC"/>
+                      </a:solidFill>
+                      <a:prstDash val="solid"/>
+                      <a:round/>
+                      <a:headEnd type="none" w="med" len="med"/>
+                      <a:tailEnd type="none" w="med" len="med"/>
+                    </a:lnR>
+                    <a:lnT w="6350" cap="flat" cmpd="sng" algn="ctr">
+                      <a:solidFill>
+                        <a:srgbClr val="CCCCCC"/>
+                      </a:solidFill>
+                      <a:prstDash val="solid"/>
+                      <a:round/>
+                      <a:headEnd type="none" w="med" len="med"/>
+                      <a:tailEnd type="none" w="med" len="med"/>
+                    </a:lnT>
+                    <a:lnB w="6350" cap="flat" cmpd="sng" algn="ctr">
+                      <a:solidFill>
+                        <a:srgbClr val="CCCCCC"/>
+                      </a:solidFill>
+                      <a:prstDash val="solid"/>
+                      <a:round/>
+                      <a:headEnd type="none" w="med" len="med"/>
+                      <a:tailEnd type="none" w="med" len="med"/>
+                    </a:lnB>
+                    <a:solidFill>
+                      <a:srgbClr val="FFFFFF"/>
+                    </a:solidFill>
+                  </a:tcPr>
+                </a:tc>
+                <a:tc>
+                  <a:txBody>
+                    <a:bodyPr/>
+                    <a:lstStyle/>
+                    <a:p>
+                      <a:pPr algn="ctr" indent="0" marL="0">
+                        <a:buNone/>
+                      </a:pPr>
+                      <a:r>
+                        <a:rPr lang="en-US" sz="800" b="1" dirty="0">
+                          <a:solidFill>
+                            <a:srgbClr val="000000"/>
+                          </a:solidFill>
+                          <a:latin typeface="Arial" pitchFamily="34" charset="0"/>
+                          <a:ea typeface="Arial" pitchFamily="34" charset="-122"/>
+                          <a:cs typeface="Arial" pitchFamily="34" charset="-120"/>
+                        </a:rPr>
+                        <a:t>25</a:t>
+                      </a:r>
+                      <a:endParaRPr lang="en-US" sz="800" dirty="0">
+                        <a:latin typeface="Arial" charset="0"/>
+                        <a:ea typeface="Arial" charset="0"/>
+                        <a:cs typeface="Arial" charset="0"/>
+                      </a:endParaRPr>
+                    </a:p>
+                  </a:txBody>
+                  <a:tcPr marL="91440" marR="91440" marT="45720" marB="45720">
+                    <a:lnL w="6350" cap="flat" cmpd="sng" algn="ctr">
+                      <a:solidFill>
+                        <a:srgbClr val="CCCCCC"/>
+                      </a:solidFill>
+                      <a:prstDash val="solid"/>
+                      <a:round/>
+                      <a:headEnd type="none" w="med" len="med"/>
+                      <a:tailEnd type="none" w="med" len="med"/>
+                    </a:lnL>
+                    <a:lnR w="6350" cap="flat" cmpd="sng" algn="ctr">
+                      <a:solidFill>
+                        <a:srgbClr val="CCCCCC"/>
+                      </a:solidFill>
+                      <a:prstDash val="solid"/>
+                      <a:round/>
+                      <a:headEnd type="none" w="med" len="med"/>
+                      <a:tailEnd type="none" w="med" len="med"/>
+                    </a:lnR>
+                    <a:lnT w="6350" cap="flat" cmpd="sng" algn="ctr">
+                      <a:solidFill>
+                        <a:srgbClr val="CCCCCC"/>
+                      </a:solidFill>
+                      <a:prstDash val="solid"/>
+                      <a:round/>
+                      <a:headEnd type="none" w="med" len="med"/>
+                      <a:tailEnd type="none" w="med" len="med"/>
+                    </a:lnT>
+                    <a:lnB w="6350" cap="flat" cmpd="sng" algn="ctr">
+                      <a:solidFill>
+                        <a:srgbClr val="CCCCCC"/>
+                      </a:solidFill>
+                      <a:prstDash val="solid"/>
+                      <a:round/>
+                      <a:headEnd type="none" w="med" len="med"/>
+                      <a:tailEnd type="none" w="med" len="med"/>
+                    </a:lnB>
+                    <a:solidFill>
+                      <a:srgbClr val="FFFFFF"/>
+                    </a:solidFill>
+                  </a:tcPr>
+                </a:tc>
+                <a:tc>
+                  <a:txBody>
+                    <a:bodyPr/>
+                    <a:lstStyle/>
+                    <a:p>
+                      <a:pPr algn="ctr" indent="0" marL="0">
+                        <a:buNone/>
+                      </a:pPr>
+                      <a:r>
+                        <a:rPr lang="en-US" sz="800" b="1" dirty="0">
+                          <a:solidFill>
+                            <a:srgbClr val="E74C3C"/>
+                          </a:solidFill>
+                          <a:latin typeface="Arial" pitchFamily="34" charset="0"/>
+                          <a:ea typeface="Arial" pitchFamily="34" charset="-122"/>
+                          <a:cs typeface="Arial" pitchFamily="34" charset="-120"/>
+                        </a:rPr>
+                        <a:t>1.56</a:t>
+                      </a:r>
+                      <a:endParaRPr lang="en-US" sz="800" dirty="0">
+                        <a:latin typeface="Arial" charset="0"/>
+                        <a:ea typeface="Arial" charset="0"/>
+                        <a:cs typeface="Arial" charset="0"/>
+                      </a:endParaRPr>
+                    </a:p>
+                  </a:txBody>
+                  <a:tcPr marL="91440" marR="91440" marT="45720" marB="45720">
+                    <a:lnL w="6350" cap="flat" cmpd="sng" algn="ctr">
+                      <a:solidFill>
+                        <a:srgbClr val="CCCCCC"/>
+                      </a:solidFill>
+                      <a:prstDash val="solid"/>
+                      <a:round/>
+                      <a:headEnd type="none" w="med" len="med"/>
+                      <a:tailEnd type="none" w="med" len="med"/>
+                    </a:lnL>
+                    <a:lnR w="6350" cap="flat" cmpd="sng" algn="ctr">
+                      <a:solidFill>
+                        <a:srgbClr val="CCCCCC"/>
+                      </a:solidFill>
+                      <a:prstDash val="solid"/>
+                      <a:round/>
+                      <a:headEnd type="none" w="med" len="med"/>
+                      <a:tailEnd type="none" w="med" len="med"/>
+                    </a:lnR>
+                    <a:lnT w="6350" cap="flat" cmpd="sng" algn="ctr">
+                      <a:solidFill>
+                        <a:srgbClr val="CCCCCC"/>
+                      </a:solidFill>
+                      <a:prstDash val="solid"/>
+                      <a:round/>
+                      <a:headEnd type="none" w="med" len="med"/>
+                      <a:tailEnd type="none" w="med" len="med"/>
+                    </a:lnT>
+                    <a:lnB w="6350" cap="flat" cmpd="sng" algn="ctr">
+                      <a:solidFill>
+                        <a:srgbClr val="CCCCCC"/>
+                      </a:solidFill>
+                      <a:prstDash val="solid"/>
+                      <a:round/>
+                      <a:headEnd type="none" w="med" len="med"/>
+                      <a:tailEnd type="none" w="med" len="med"/>
+                    </a:lnB>
+                    <a:solidFill>
+                      <a:srgbClr val="FFFFFF"/>
+                    </a:solidFill>
+                  </a:tcPr>
+                </a:tc>
+              </a:tr>
+              <a:tr h="246185">
+                <a:tc>
+                  <a:txBody>
+                    <a:bodyPr/>
+                    <a:lstStyle/>
+                    <a:p>
+                      <a:pPr algn="ctr" indent="0" marL="0">
+                        <a:buNone/>
+                      </a:pPr>
+                      <a:r>
+                        <a:rPr lang="en-US" sz="700" dirty="0">
+                          <a:solidFill>
+                            <a:srgbClr val="000000"/>
+                          </a:solidFill>
+                          <a:latin typeface="Arial" pitchFamily="34" charset="0"/>
+                          <a:ea typeface="Arial" pitchFamily="34" charset="-122"/>
+                          <a:cs typeface="Arial" pitchFamily="34" charset="-120"/>
+                        </a:rPr>
+                        <a:t>アパH.蒲田駅東</a:t>
+                      </a:r>
+                      <a:endParaRPr lang="en-US" sz="700" dirty="0">
+                        <a:latin typeface="Arial" charset="0"/>
+                        <a:ea typeface="Arial" charset="0"/>
+                        <a:cs typeface="Arial" charset="0"/>
+                      </a:endParaRPr>
+                    </a:p>
+                  </a:txBody>
+                  <a:tcPr marL="91440" marR="91440" marT="45720" marB="45720">
+                    <a:lnL w="6350" cap="flat" cmpd="sng" algn="ctr">
+                      <a:solidFill>
+                        <a:srgbClr val="CCCCCC"/>
+                      </a:solidFill>
+                      <a:prstDash val="solid"/>
+                      <a:round/>
+                      <a:headEnd type="none" w="med" len="med"/>
+                      <a:tailEnd type="none" w="med" len="med"/>
+                    </a:lnL>
+                    <a:lnR w="6350" cap="flat" cmpd="sng" algn="ctr">
+                      <a:solidFill>
+                        <a:srgbClr val="CCCCCC"/>
+                      </a:solidFill>
+                      <a:prstDash val="solid"/>
+                      <a:round/>
+                      <a:headEnd type="none" w="med" len="med"/>
+                      <a:tailEnd type="none" w="med" len="med"/>
+                    </a:lnR>
+                    <a:lnT w="6350" cap="flat" cmpd="sng" algn="ctr">
+                      <a:solidFill>
+                        <a:srgbClr val="CCCCCC"/>
+                      </a:solidFill>
+                      <a:prstDash val="solid"/>
+                      <a:round/>
+                      <a:headEnd type="none" w="med" len="med"/>
+                      <a:tailEnd type="none" w="med" len="med"/>
+                    </a:lnT>
+                    <a:lnB w="6350" cap="flat" cmpd="sng" algn="ctr">
+                      <a:solidFill>
+                        <a:srgbClr val="CCCCCC"/>
+                      </a:solidFill>
+                      <a:prstDash val="solid"/>
+                      <a:round/>
+                      <a:headEnd type="none" w="med" len="med"/>
+                      <a:tailEnd type="none" w="med" len="med"/>
+                    </a:lnB>
+                    <a:solidFill>
                       <a:srgbClr val="F5F7FA"/>
                     </a:solidFill>
                   </a:tcPr>
@@ -2635,7 +3251,75 @@
                           <a:ea typeface="Arial" pitchFamily="34" charset="-122"/>
                           <a:cs typeface="Arial" pitchFamily="34" charset="-120"/>
                         </a:rPr>
-                        <a:t>13</a:t>
+                        <a:t>1</a:t>
+                      </a:r>
+                      <a:endParaRPr lang="en-US" sz="800" dirty="0">
+                        <a:latin typeface="Arial" charset="0"/>
+                        <a:ea typeface="Arial" charset="0"/>
+                        <a:cs typeface="Arial" charset="0"/>
+                      </a:endParaRPr>
+                    </a:p>
+                  </a:txBody>
+                  <a:tcPr marL="91440" marR="91440" marT="45720" marB="45720">
+                    <a:lnL w="6350" cap="flat" cmpd="sng" algn="ctr">
+                      <a:solidFill>
+                        <a:srgbClr val="CCCCCC"/>
+                      </a:solidFill>
+                      <a:prstDash val="solid"/>
+                      <a:round/>
+                      <a:headEnd type="none" w="med" len="med"/>
+                      <a:tailEnd type="none" w="med" len="med"/>
+                    </a:lnL>
+                    <a:lnR w="6350" cap="flat" cmpd="sng" algn="ctr">
+                      <a:solidFill>
+                        <a:srgbClr val="CCCCCC"/>
+                      </a:solidFill>
+                      <a:prstDash val="solid"/>
+                      <a:round/>
+                      <a:headEnd type="none" w="med" len="med"/>
+                      <a:tailEnd type="none" w="med" len="med"/>
+                    </a:lnR>
+                    <a:lnT w="6350" cap="flat" cmpd="sng" algn="ctr">
+                      <a:solidFill>
+                        <a:srgbClr val="CCCCCC"/>
+                      </a:solidFill>
+                      <a:prstDash val="solid"/>
+                      <a:round/>
+                      <a:headEnd type="none" w="med" len="med"/>
+                      <a:tailEnd type="none" w="med" len="med"/>
+                    </a:lnT>
+                    <a:lnB w="6350" cap="flat" cmpd="sng" algn="ctr">
+                      <a:solidFill>
+                        <a:srgbClr val="CCCCCC"/>
+                      </a:solidFill>
+                      <a:prstDash val="solid"/>
+                      <a:round/>
+                      <a:headEnd type="none" w="med" len="med"/>
+                      <a:tailEnd type="none" w="med" len="med"/>
+                    </a:lnB>
+                    <a:solidFill>
+                      <a:srgbClr val="F5F7FA"/>
+                    </a:solidFill>
+                  </a:tcPr>
+                </a:tc>
+                <a:tc>
+                  <a:txBody>
+                    <a:bodyPr/>
+                    <a:lstStyle/>
+                    <a:p>
+                      <a:pPr algn="ctr" indent="0" marL="0">
+                        <a:buNone/>
+                      </a:pPr>
+                      <a:r>
+                        <a:rPr lang="en-US" sz="800" dirty="0">
+                          <a:solidFill>
+                            <a:srgbClr val="000000"/>
+                          </a:solidFill>
+                          <a:latin typeface="Arial" pitchFamily="34" charset="0"/>
+                          <a:ea typeface="Arial" pitchFamily="34" charset="-122"/>
+                          <a:cs typeface="Arial" pitchFamily="34" charset="-120"/>
+                        </a:rPr>
+                        <a:t>-</a:t>
                       </a:r>
                       <a:endParaRPr lang="en-US" sz="800" dirty="0">
                         <a:latin typeface="Arial" charset="0"/>
@@ -2703,7 +3387,7 @@
                           <a:ea typeface="Arial" pitchFamily="34" charset="-122"/>
                           <a:cs typeface="Arial" pitchFamily="34" charset="-120"/>
                         </a:rPr>
-                        <a:t>13</a:t>
+                        <a:t>15</a:t>
                       </a:r>
                       <a:endParaRPr lang="en-US" sz="800" dirty="0">
                         <a:latin typeface="Arial" charset="0"/>
@@ -2765,13 +3449,13 @@
                       <a:r>
                         <a:rPr lang="en-US" sz="800" b="1" dirty="0">
                           <a:solidFill>
-                            <a:srgbClr val="E74C3C"/>
+                            <a:srgbClr val="333333"/>
                           </a:solidFill>
                           <a:latin typeface="Arial" pitchFamily="34" charset="0"/>
                           <a:ea typeface="Arial" pitchFamily="34" charset="-122"/>
                           <a:cs typeface="Arial" pitchFamily="34" charset="-120"/>
                         </a:rPr>
-                        <a:t>1.00</a:t>
+                        <a:t>0.00</a:t>
                       </a:r>
                       <a:endParaRPr lang="en-US" sz="800" dirty="0">
                         <a:latin typeface="Arial" charset="0"/>
@@ -2909,7 +3593,7 @@
                           <a:ea typeface="Arial" pitchFamily="34" charset="-122"/>
                           <a:cs typeface="Arial" pitchFamily="34" charset="-120"/>
                         </a:rPr>
-                        <a:t>18</a:t>
+                        <a:t>16</a:t>
                       </a:r>
                       <a:endParaRPr lang="en-US" sz="800" dirty="0">
                         <a:latin typeface="Arial" charset="0"/>
@@ -2977,7 +3661,7 @@
                           <a:ea typeface="Arial" pitchFamily="34" charset="-122"/>
                           <a:cs typeface="Arial" pitchFamily="34" charset="-120"/>
                         </a:rPr>
-                        <a:t>15</a:t>
+                        <a:t>13</a:t>
                       </a:r>
                       <a:endParaRPr lang="en-US" sz="800" dirty="0">
                         <a:latin typeface="Arial" charset="0"/>
@@ -3045,7 +3729,7 @@
                           <a:ea typeface="Arial" pitchFamily="34" charset="-122"/>
                           <a:cs typeface="Arial" pitchFamily="34" charset="-120"/>
                         </a:rPr>
-                        <a:t>11</a:t>
+                        <a:t>15</a:t>
                       </a:r>
                       <a:endParaRPr lang="en-US" sz="800" dirty="0">
                         <a:latin typeface="Arial" charset="0"/>
@@ -3113,7 +3797,691 @@
                           <a:ea typeface="Arial" pitchFamily="34" charset="-122"/>
                           <a:cs typeface="Arial" pitchFamily="34" charset="-120"/>
                         </a:rPr>
-                        <a:t>0.73</a:t>
+                        <a:t>1.15</a:t>
+                      </a:r>
+                      <a:endParaRPr lang="en-US" sz="800" dirty="0">
+                        <a:latin typeface="Arial" charset="0"/>
+                        <a:ea typeface="Arial" charset="0"/>
+                        <a:cs typeface="Arial" charset="0"/>
+                      </a:endParaRPr>
+                    </a:p>
+                  </a:txBody>
+                  <a:tcPr marL="91440" marR="91440" marT="45720" marB="45720">
+                    <a:lnL w="6350" cap="flat" cmpd="sng" algn="ctr">
+                      <a:solidFill>
+                        <a:srgbClr val="CCCCCC"/>
+                      </a:solidFill>
+                      <a:prstDash val="solid"/>
+                      <a:round/>
+                      <a:headEnd type="none" w="med" len="med"/>
+                      <a:tailEnd type="none" w="med" len="med"/>
+                    </a:lnL>
+                    <a:lnR w="6350" cap="flat" cmpd="sng" algn="ctr">
+                      <a:solidFill>
+                        <a:srgbClr val="CCCCCC"/>
+                      </a:solidFill>
+                      <a:prstDash val="solid"/>
+                      <a:round/>
+                      <a:headEnd type="none" w="med" len="med"/>
+                      <a:tailEnd type="none" w="med" len="med"/>
+                    </a:lnR>
+                    <a:lnT w="6350" cap="flat" cmpd="sng" algn="ctr">
+                      <a:solidFill>
+                        <a:srgbClr val="CCCCCC"/>
+                      </a:solidFill>
+                      <a:prstDash val="solid"/>
+                      <a:round/>
+                      <a:headEnd type="none" w="med" len="med"/>
+                      <a:tailEnd type="none" w="med" len="med"/>
+                    </a:lnT>
+                    <a:lnB w="6350" cap="flat" cmpd="sng" algn="ctr">
+                      <a:solidFill>
+                        <a:srgbClr val="CCCCCC"/>
+                      </a:solidFill>
+                      <a:prstDash val="solid"/>
+                      <a:round/>
+                      <a:headEnd type="none" w="med" len="med"/>
+                      <a:tailEnd type="none" w="med" len="med"/>
+                    </a:lnB>
+                    <a:solidFill>
+                      <a:srgbClr val="FFFFFF"/>
+                    </a:solidFill>
+                  </a:tcPr>
+                </a:tc>
+              </a:tr>
+              <a:tr h="246185">
+                <a:tc>
+                  <a:txBody>
+                    <a:bodyPr/>
+                    <a:lstStyle/>
+                    <a:p>
+                      <a:pPr algn="ctr" indent="0" marL="0">
+                        <a:buNone/>
+                      </a:pPr>
+                      <a:r>
+                        <a:rPr lang="en-US" sz="700" dirty="0">
+                          <a:solidFill>
+                            <a:srgbClr val="000000"/>
+                          </a:solidFill>
+                          <a:latin typeface="Arial" pitchFamily="34" charset="0"/>
+                          <a:ea typeface="Arial" pitchFamily="34" charset="-122"/>
+                          <a:cs typeface="Arial" pitchFamily="34" charset="-120"/>
+                        </a:rPr>
+                        <a:t>ハートンH.東品川</a:t>
+                      </a:r>
+                      <a:endParaRPr lang="en-US" sz="700" dirty="0">
+                        <a:latin typeface="Arial" charset="0"/>
+                        <a:ea typeface="Arial" charset="0"/>
+                        <a:cs typeface="Arial" charset="0"/>
+                      </a:endParaRPr>
+                    </a:p>
+                  </a:txBody>
+                  <a:tcPr marL="91440" marR="91440" marT="45720" marB="45720">
+                    <a:lnL w="6350" cap="flat" cmpd="sng" algn="ctr">
+                      <a:solidFill>
+                        <a:srgbClr val="CCCCCC"/>
+                      </a:solidFill>
+                      <a:prstDash val="solid"/>
+                      <a:round/>
+                      <a:headEnd type="none" w="med" len="med"/>
+                      <a:tailEnd type="none" w="med" len="med"/>
+                    </a:lnL>
+                    <a:lnR w="6350" cap="flat" cmpd="sng" algn="ctr">
+                      <a:solidFill>
+                        <a:srgbClr val="CCCCCC"/>
+                      </a:solidFill>
+                      <a:prstDash val="solid"/>
+                      <a:round/>
+                      <a:headEnd type="none" w="med" len="med"/>
+                      <a:tailEnd type="none" w="med" len="med"/>
+                    </a:lnR>
+                    <a:lnT w="6350" cap="flat" cmpd="sng" algn="ctr">
+                      <a:solidFill>
+                        <a:srgbClr val="CCCCCC"/>
+                      </a:solidFill>
+                      <a:prstDash val="solid"/>
+                      <a:round/>
+                      <a:headEnd type="none" w="med" len="med"/>
+                      <a:tailEnd type="none" w="med" len="med"/>
+                    </a:lnT>
+                    <a:lnB w="6350" cap="flat" cmpd="sng" algn="ctr">
+                      <a:solidFill>
+                        <a:srgbClr val="CCCCCC"/>
+                      </a:solidFill>
+                      <a:prstDash val="solid"/>
+                      <a:round/>
+                      <a:headEnd type="none" w="med" len="med"/>
+                      <a:tailEnd type="none" w="med" len="med"/>
+                    </a:lnB>
+                    <a:solidFill>
+                      <a:srgbClr val="F5F7FA"/>
+                    </a:solidFill>
+                  </a:tcPr>
+                </a:tc>
+                <a:tc>
+                  <a:txBody>
+                    <a:bodyPr/>
+                    <a:lstStyle/>
+                    <a:p>
+                      <a:pPr algn="ctr" indent="0" marL="0">
+                        <a:buNone/>
+                      </a:pPr>
+                      <a:r>
+                        <a:rPr lang="en-US" sz="800" dirty="0">
+                          <a:solidFill>
+                            <a:srgbClr val="000000"/>
+                          </a:solidFill>
+                          <a:latin typeface="Arial" pitchFamily="34" charset="0"/>
+                          <a:ea typeface="Arial" pitchFamily="34" charset="-122"/>
+                          <a:cs typeface="Arial" pitchFamily="34" charset="-120"/>
+                        </a:rPr>
+                        <a:t>28</a:t>
+                      </a:r>
+                      <a:endParaRPr lang="en-US" sz="800" dirty="0">
+                        <a:latin typeface="Arial" charset="0"/>
+                        <a:ea typeface="Arial" charset="0"/>
+                        <a:cs typeface="Arial" charset="0"/>
+                      </a:endParaRPr>
+                    </a:p>
+                  </a:txBody>
+                  <a:tcPr marL="91440" marR="91440" marT="45720" marB="45720">
+                    <a:lnL w="6350" cap="flat" cmpd="sng" algn="ctr">
+                      <a:solidFill>
+                        <a:srgbClr val="CCCCCC"/>
+                      </a:solidFill>
+                      <a:prstDash val="solid"/>
+                      <a:round/>
+                      <a:headEnd type="none" w="med" len="med"/>
+                      <a:tailEnd type="none" w="med" len="med"/>
+                    </a:lnL>
+                    <a:lnR w="6350" cap="flat" cmpd="sng" algn="ctr">
+                      <a:solidFill>
+                        <a:srgbClr val="CCCCCC"/>
+                      </a:solidFill>
+                      <a:prstDash val="solid"/>
+                      <a:round/>
+                      <a:headEnd type="none" w="med" len="med"/>
+                      <a:tailEnd type="none" w="med" len="med"/>
+                    </a:lnR>
+                    <a:lnT w="6350" cap="flat" cmpd="sng" algn="ctr">
+                      <a:solidFill>
+                        <a:srgbClr val="CCCCCC"/>
+                      </a:solidFill>
+                      <a:prstDash val="solid"/>
+                      <a:round/>
+                      <a:headEnd type="none" w="med" len="med"/>
+                      <a:tailEnd type="none" w="med" len="med"/>
+                    </a:lnT>
+                    <a:lnB w="6350" cap="flat" cmpd="sng" algn="ctr">
+                      <a:solidFill>
+                        <a:srgbClr val="CCCCCC"/>
+                      </a:solidFill>
+                      <a:prstDash val="solid"/>
+                      <a:round/>
+                      <a:headEnd type="none" w="med" len="med"/>
+                      <a:tailEnd type="none" w="med" len="med"/>
+                    </a:lnB>
+                    <a:solidFill>
+                      <a:srgbClr val="F5F7FA"/>
+                    </a:solidFill>
+                  </a:tcPr>
+                </a:tc>
+                <a:tc>
+                  <a:txBody>
+                    <a:bodyPr/>
+                    <a:lstStyle/>
+                    <a:p>
+                      <a:pPr algn="ctr" indent="0" marL="0">
+                        <a:buNone/>
+                      </a:pPr>
+                      <a:r>
+                        <a:rPr lang="en-US" sz="800" dirty="0">
+                          <a:solidFill>
+                            <a:srgbClr val="000000"/>
+                          </a:solidFill>
+                          <a:latin typeface="Arial" pitchFamily="34" charset="0"/>
+                          <a:ea typeface="Arial" pitchFamily="34" charset="-122"/>
+                          <a:cs typeface="Arial" pitchFamily="34" charset="-120"/>
+                        </a:rPr>
+                        <a:t>26</a:t>
+                      </a:r>
+                      <a:endParaRPr lang="en-US" sz="800" dirty="0">
+                        <a:latin typeface="Arial" charset="0"/>
+                        <a:ea typeface="Arial" charset="0"/>
+                        <a:cs typeface="Arial" charset="0"/>
+                      </a:endParaRPr>
+                    </a:p>
+                  </a:txBody>
+                  <a:tcPr marL="91440" marR="91440" marT="45720" marB="45720">
+                    <a:lnL w="6350" cap="flat" cmpd="sng" algn="ctr">
+                      <a:solidFill>
+                        <a:srgbClr val="CCCCCC"/>
+                      </a:solidFill>
+                      <a:prstDash val="solid"/>
+                      <a:round/>
+                      <a:headEnd type="none" w="med" len="med"/>
+                      <a:tailEnd type="none" w="med" len="med"/>
+                    </a:lnL>
+                    <a:lnR w="6350" cap="flat" cmpd="sng" algn="ctr">
+                      <a:solidFill>
+                        <a:srgbClr val="CCCCCC"/>
+                      </a:solidFill>
+                      <a:prstDash val="solid"/>
+                      <a:round/>
+                      <a:headEnd type="none" w="med" len="med"/>
+                      <a:tailEnd type="none" w="med" len="med"/>
+                    </a:lnR>
+                    <a:lnT w="6350" cap="flat" cmpd="sng" algn="ctr">
+                      <a:solidFill>
+                        <a:srgbClr val="CCCCCC"/>
+                      </a:solidFill>
+                      <a:prstDash val="solid"/>
+                      <a:round/>
+                      <a:headEnd type="none" w="med" len="med"/>
+                      <a:tailEnd type="none" w="med" len="med"/>
+                    </a:lnT>
+                    <a:lnB w="6350" cap="flat" cmpd="sng" algn="ctr">
+                      <a:solidFill>
+                        <a:srgbClr val="CCCCCC"/>
+                      </a:solidFill>
+                      <a:prstDash val="solid"/>
+                      <a:round/>
+                      <a:headEnd type="none" w="med" len="med"/>
+                      <a:tailEnd type="none" w="med" len="med"/>
+                    </a:lnB>
+                    <a:solidFill>
+                      <a:srgbClr val="F5F7FA"/>
+                    </a:solidFill>
+                  </a:tcPr>
+                </a:tc>
+                <a:tc>
+                  <a:txBody>
+                    <a:bodyPr/>
+                    <a:lstStyle/>
+                    <a:p>
+                      <a:pPr algn="ctr" indent="0" marL="0">
+                        <a:buNone/>
+                      </a:pPr>
+                      <a:r>
+                        <a:rPr lang="en-US" sz="800" b="1" dirty="0">
+                          <a:solidFill>
+                            <a:srgbClr val="000000"/>
+                          </a:solidFill>
+                          <a:latin typeface="Arial" pitchFamily="34" charset="0"/>
+                          <a:ea typeface="Arial" pitchFamily="34" charset="-122"/>
+                          <a:cs typeface="Arial" pitchFamily="34" charset="-120"/>
+                        </a:rPr>
+                        <a:t>14</a:t>
+                      </a:r>
+                      <a:endParaRPr lang="en-US" sz="800" dirty="0">
+                        <a:latin typeface="Arial" charset="0"/>
+                        <a:ea typeface="Arial" charset="0"/>
+                        <a:cs typeface="Arial" charset="0"/>
+                      </a:endParaRPr>
+                    </a:p>
+                  </a:txBody>
+                  <a:tcPr marL="91440" marR="91440" marT="45720" marB="45720">
+                    <a:lnL w="6350" cap="flat" cmpd="sng" algn="ctr">
+                      <a:solidFill>
+                        <a:srgbClr val="CCCCCC"/>
+                      </a:solidFill>
+                      <a:prstDash val="solid"/>
+                      <a:round/>
+                      <a:headEnd type="none" w="med" len="med"/>
+                      <a:tailEnd type="none" w="med" len="med"/>
+                    </a:lnL>
+                    <a:lnR w="6350" cap="flat" cmpd="sng" algn="ctr">
+                      <a:solidFill>
+                        <a:srgbClr val="CCCCCC"/>
+                      </a:solidFill>
+                      <a:prstDash val="solid"/>
+                      <a:round/>
+                      <a:headEnd type="none" w="med" len="med"/>
+                      <a:tailEnd type="none" w="med" len="med"/>
+                    </a:lnR>
+                    <a:lnT w="6350" cap="flat" cmpd="sng" algn="ctr">
+                      <a:solidFill>
+                        <a:srgbClr val="CCCCCC"/>
+                      </a:solidFill>
+                      <a:prstDash val="solid"/>
+                      <a:round/>
+                      <a:headEnd type="none" w="med" len="med"/>
+                      <a:tailEnd type="none" w="med" len="med"/>
+                    </a:lnT>
+                    <a:lnB w="6350" cap="flat" cmpd="sng" algn="ctr">
+                      <a:solidFill>
+                        <a:srgbClr val="CCCCCC"/>
+                      </a:solidFill>
+                      <a:prstDash val="solid"/>
+                      <a:round/>
+                      <a:headEnd type="none" w="med" len="med"/>
+                      <a:tailEnd type="none" w="med" len="med"/>
+                    </a:lnB>
+                    <a:solidFill>
+                      <a:srgbClr val="F5F7FA"/>
+                    </a:solidFill>
+                  </a:tcPr>
+                </a:tc>
+                <a:tc>
+                  <a:txBody>
+                    <a:bodyPr/>
+                    <a:lstStyle/>
+                    <a:p>
+                      <a:pPr algn="ctr" indent="0" marL="0">
+                        <a:buNone/>
+                      </a:pPr>
+                      <a:r>
+                        <a:rPr lang="en-US" sz="800" b="1" dirty="0">
+                          <a:solidFill>
+                            <a:srgbClr val="E74C3C"/>
+                          </a:solidFill>
+                          <a:latin typeface="Arial" pitchFamily="34" charset="0"/>
+                          <a:ea typeface="Arial" pitchFamily="34" charset="-122"/>
+                          <a:cs typeface="Arial" pitchFamily="34" charset="-120"/>
+                        </a:rPr>
+                        <a:t>0.54</a:t>
+                      </a:r>
+                      <a:endParaRPr lang="en-US" sz="800" dirty="0">
+                        <a:latin typeface="Arial" charset="0"/>
+                        <a:ea typeface="Arial" charset="0"/>
+                        <a:cs typeface="Arial" charset="0"/>
+                      </a:endParaRPr>
+                    </a:p>
+                  </a:txBody>
+                  <a:tcPr marL="91440" marR="91440" marT="45720" marB="45720">
+                    <a:lnL w="6350" cap="flat" cmpd="sng" algn="ctr">
+                      <a:solidFill>
+                        <a:srgbClr val="CCCCCC"/>
+                      </a:solidFill>
+                      <a:prstDash val="solid"/>
+                      <a:round/>
+                      <a:headEnd type="none" w="med" len="med"/>
+                      <a:tailEnd type="none" w="med" len="med"/>
+                    </a:lnL>
+                    <a:lnR w="6350" cap="flat" cmpd="sng" algn="ctr">
+                      <a:solidFill>
+                        <a:srgbClr val="CCCCCC"/>
+                      </a:solidFill>
+                      <a:prstDash val="solid"/>
+                      <a:round/>
+                      <a:headEnd type="none" w="med" len="med"/>
+                      <a:tailEnd type="none" w="med" len="med"/>
+                    </a:lnR>
+                    <a:lnT w="6350" cap="flat" cmpd="sng" algn="ctr">
+                      <a:solidFill>
+                        <a:srgbClr val="CCCCCC"/>
+                      </a:solidFill>
+                      <a:prstDash val="solid"/>
+                      <a:round/>
+                      <a:headEnd type="none" w="med" len="med"/>
+                      <a:tailEnd type="none" w="med" len="med"/>
+                    </a:lnT>
+                    <a:lnB w="6350" cap="flat" cmpd="sng" algn="ctr">
+                      <a:solidFill>
+                        <a:srgbClr val="CCCCCC"/>
+                      </a:solidFill>
+                      <a:prstDash val="solid"/>
+                      <a:round/>
+                      <a:headEnd type="none" w="med" len="med"/>
+                      <a:tailEnd type="none" w="med" len="med"/>
+                    </a:lnB>
+                    <a:solidFill>
+                      <a:srgbClr val="F5F7FA"/>
+                    </a:solidFill>
+                  </a:tcPr>
+                </a:tc>
+              </a:tr>
+              <a:tr h="246185">
+                <a:tc>
+                  <a:txBody>
+                    <a:bodyPr/>
+                    <a:lstStyle/>
+                    <a:p>
+                      <a:pPr algn="ctr" indent="0" marL="0">
+                        <a:buNone/>
+                      </a:pPr>
+                      <a:r>
+                        <a:rPr lang="en-US" sz="700" dirty="0">
+                          <a:solidFill>
+                            <a:srgbClr val="000000"/>
+                          </a:solidFill>
+                          <a:latin typeface="Arial" pitchFamily="34" charset="0"/>
+                          <a:ea typeface="Arial" pitchFamily="34" charset="-122"/>
+                          <a:cs typeface="Arial" pitchFamily="34" charset="-120"/>
+                        </a:rPr>
+                        <a:t>コンフォートスイーツ東京ベイ</a:t>
+                      </a:r>
+                      <a:endParaRPr lang="en-US" sz="700" dirty="0">
+                        <a:latin typeface="Arial" charset="0"/>
+                        <a:ea typeface="Arial" charset="0"/>
+                        <a:cs typeface="Arial" charset="0"/>
+                      </a:endParaRPr>
+                    </a:p>
+                  </a:txBody>
+                  <a:tcPr marL="91440" marR="91440" marT="45720" marB="45720">
+                    <a:lnL w="6350" cap="flat" cmpd="sng" algn="ctr">
+                      <a:solidFill>
+                        <a:srgbClr val="CCCCCC"/>
+                      </a:solidFill>
+                      <a:prstDash val="solid"/>
+                      <a:round/>
+                      <a:headEnd type="none" w="med" len="med"/>
+                      <a:tailEnd type="none" w="med" len="med"/>
+                    </a:lnL>
+                    <a:lnR w="6350" cap="flat" cmpd="sng" algn="ctr">
+                      <a:solidFill>
+                        <a:srgbClr val="CCCCCC"/>
+                      </a:solidFill>
+                      <a:prstDash val="solid"/>
+                      <a:round/>
+                      <a:headEnd type="none" w="med" len="med"/>
+                      <a:tailEnd type="none" w="med" len="med"/>
+                    </a:lnR>
+                    <a:lnT w="6350" cap="flat" cmpd="sng" algn="ctr">
+                      <a:solidFill>
+                        <a:srgbClr val="CCCCCC"/>
+                      </a:solidFill>
+                      <a:prstDash val="solid"/>
+                      <a:round/>
+                      <a:headEnd type="none" w="med" len="med"/>
+                      <a:tailEnd type="none" w="med" len="med"/>
+                    </a:lnT>
+                    <a:lnB w="6350" cap="flat" cmpd="sng" algn="ctr">
+                      <a:solidFill>
+                        <a:srgbClr val="CCCCCC"/>
+                      </a:solidFill>
+                      <a:prstDash val="solid"/>
+                      <a:round/>
+                      <a:headEnd type="none" w="med" len="med"/>
+                      <a:tailEnd type="none" w="med" len="med"/>
+                    </a:lnB>
+                    <a:solidFill>
+                      <a:srgbClr val="FFFFFF"/>
+                    </a:solidFill>
+                  </a:tcPr>
+                </a:tc>
+                <a:tc>
+                  <a:txBody>
+                    <a:bodyPr/>
+                    <a:lstStyle/>
+                    <a:p>
+                      <a:pPr algn="ctr" indent="0" marL="0">
+                        <a:buNone/>
+                      </a:pPr>
+                      <a:r>
+                        <a:rPr lang="en-US" sz="800" dirty="0">
+                          <a:solidFill>
+                            <a:srgbClr val="000000"/>
+                          </a:solidFill>
+                          <a:latin typeface="Arial" pitchFamily="34" charset="0"/>
+                          <a:ea typeface="Arial" pitchFamily="34" charset="-122"/>
+                          <a:cs typeface="Arial" pitchFamily="34" charset="-120"/>
+                        </a:rPr>
+                        <a:t>1</a:t>
+                      </a:r>
+                      <a:endParaRPr lang="en-US" sz="800" dirty="0">
+                        <a:latin typeface="Arial" charset="0"/>
+                        <a:ea typeface="Arial" charset="0"/>
+                        <a:cs typeface="Arial" charset="0"/>
+                      </a:endParaRPr>
+                    </a:p>
+                  </a:txBody>
+                  <a:tcPr marL="91440" marR="91440" marT="45720" marB="45720">
+                    <a:lnL w="6350" cap="flat" cmpd="sng" algn="ctr">
+                      <a:solidFill>
+                        <a:srgbClr val="CCCCCC"/>
+                      </a:solidFill>
+                      <a:prstDash val="solid"/>
+                      <a:round/>
+                      <a:headEnd type="none" w="med" len="med"/>
+                      <a:tailEnd type="none" w="med" len="med"/>
+                    </a:lnL>
+                    <a:lnR w="6350" cap="flat" cmpd="sng" algn="ctr">
+                      <a:solidFill>
+                        <a:srgbClr val="CCCCCC"/>
+                      </a:solidFill>
+                      <a:prstDash val="solid"/>
+                      <a:round/>
+                      <a:headEnd type="none" w="med" len="med"/>
+                      <a:tailEnd type="none" w="med" len="med"/>
+                    </a:lnR>
+                    <a:lnT w="6350" cap="flat" cmpd="sng" algn="ctr">
+                      <a:solidFill>
+                        <a:srgbClr val="CCCCCC"/>
+                      </a:solidFill>
+                      <a:prstDash val="solid"/>
+                      <a:round/>
+                      <a:headEnd type="none" w="med" len="med"/>
+                      <a:tailEnd type="none" w="med" len="med"/>
+                    </a:lnT>
+                    <a:lnB w="6350" cap="flat" cmpd="sng" algn="ctr">
+                      <a:solidFill>
+                        <a:srgbClr val="CCCCCC"/>
+                      </a:solidFill>
+                      <a:prstDash val="solid"/>
+                      <a:round/>
+                      <a:headEnd type="none" w="med" len="med"/>
+                      <a:tailEnd type="none" w="med" len="med"/>
+                    </a:lnB>
+                    <a:solidFill>
+                      <a:srgbClr val="FFFFFF"/>
+                    </a:solidFill>
+                  </a:tcPr>
+                </a:tc>
+                <a:tc>
+                  <a:txBody>
+                    <a:bodyPr/>
+                    <a:lstStyle/>
+                    <a:p>
+                      <a:pPr algn="ctr" indent="0" marL="0">
+                        <a:buNone/>
+                      </a:pPr>
+                      <a:r>
+                        <a:rPr lang="en-US" sz="800" dirty="0">
+                          <a:solidFill>
+                            <a:srgbClr val="000000"/>
+                          </a:solidFill>
+                          <a:latin typeface="Arial" pitchFamily="34" charset="0"/>
+                          <a:ea typeface="Arial" pitchFamily="34" charset="-122"/>
+                          <a:cs typeface="Arial" pitchFamily="34" charset="-120"/>
+                        </a:rPr>
+                        <a:t>-</a:t>
+                      </a:r>
+                      <a:endParaRPr lang="en-US" sz="800" dirty="0">
+                        <a:latin typeface="Arial" charset="0"/>
+                        <a:ea typeface="Arial" charset="0"/>
+                        <a:cs typeface="Arial" charset="0"/>
+                      </a:endParaRPr>
+                    </a:p>
+                  </a:txBody>
+                  <a:tcPr marL="91440" marR="91440" marT="45720" marB="45720">
+                    <a:lnL w="6350" cap="flat" cmpd="sng" algn="ctr">
+                      <a:solidFill>
+                        <a:srgbClr val="CCCCCC"/>
+                      </a:solidFill>
+                      <a:prstDash val="solid"/>
+                      <a:round/>
+                      <a:headEnd type="none" w="med" len="med"/>
+                      <a:tailEnd type="none" w="med" len="med"/>
+                    </a:lnL>
+                    <a:lnR w="6350" cap="flat" cmpd="sng" algn="ctr">
+                      <a:solidFill>
+                        <a:srgbClr val="CCCCCC"/>
+                      </a:solidFill>
+                      <a:prstDash val="solid"/>
+                      <a:round/>
+                      <a:headEnd type="none" w="med" len="med"/>
+                      <a:tailEnd type="none" w="med" len="med"/>
+                    </a:lnR>
+                    <a:lnT w="6350" cap="flat" cmpd="sng" algn="ctr">
+                      <a:solidFill>
+                        <a:srgbClr val="CCCCCC"/>
+                      </a:solidFill>
+                      <a:prstDash val="solid"/>
+                      <a:round/>
+                      <a:headEnd type="none" w="med" len="med"/>
+                      <a:tailEnd type="none" w="med" len="med"/>
+                    </a:lnT>
+                    <a:lnB w="6350" cap="flat" cmpd="sng" algn="ctr">
+                      <a:solidFill>
+                        <a:srgbClr val="CCCCCC"/>
+                      </a:solidFill>
+                      <a:prstDash val="solid"/>
+                      <a:round/>
+                      <a:headEnd type="none" w="med" len="med"/>
+                      <a:tailEnd type="none" w="med" len="med"/>
+                    </a:lnB>
+                    <a:solidFill>
+                      <a:srgbClr val="FFFFFF"/>
+                    </a:solidFill>
+                  </a:tcPr>
+                </a:tc>
+                <a:tc>
+                  <a:txBody>
+                    <a:bodyPr/>
+                    <a:lstStyle/>
+                    <a:p>
+                      <a:pPr algn="ctr" indent="0" marL="0">
+                        <a:buNone/>
+                      </a:pPr>
+                      <a:r>
+                        <a:rPr lang="en-US" sz="800" b="1" dirty="0">
+                          <a:solidFill>
+                            <a:srgbClr val="000000"/>
+                          </a:solidFill>
+                          <a:latin typeface="Arial" pitchFamily="34" charset="0"/>
+                          <a:ea typeface="Arial" pitchFamily="34" charset="-122"/>
+                          <a:cs typeface="Arial" pitchFamily="34" charset="-120"/>
+                        </a:rPr>
+                        <a:t>12</a:t>
+                      </a:r>
+                      <a:endParaRPr lang="en-US" sz="800" dirty="0">
+                        <a:latin typeface="Arial" charset="0"/>
+                        <a:ea typeface="Arial" charset="0"/>
+                        <a:cs typeface="Arial" charset="0"/>
+                      </a:endParaRPr>
+                    </a:p>
+                  </a:txBody>
+                  <a:tcPr marL="91440" marR="91440" marT="45720" marB="45720">
+                    <a:lnL w="6350" cap="flat" cmpd="sng" algn="ctr">
+                      <a:solidFill>
+                        <a:srgbClr val="CCCCCC"/>
+                      </a:solidFill>
+                      <a:prstDash val="solid"/>
+                      <a:round/>
+                      <a:headEnd type="none" w="med" len="med"/>
+                      <a:tailEnd type="none" w="med" len="med"/>
+                    </a:lnL>
+                    <a:lnR w="6350" cap="flat" cmpd="sng" algn="ctr">
+                      <a:solidFill>
+                        <a:srgbClr val="CCCCCC"/>
+                      </a:solidFill>
+                      <a:prstDash val="solid"/>
+                      <a:round/>
+                      <a:headEnd type="none" w="med" len="med"/>
+                      <a:tailEnd type="none" w="med" len="med"/>
+                    </a:lnR>
+                    <a:lnT w="6350" cap="flat" cmpd="sng" algn="ctr">
+                      <a:solidFill>
+                        <a:srgbClr val="CCCCCC"/>
+                      </a:solidFill>
+                      <a:prstDash val="solid"/>
+                      <a:round/>
+                      <a:headEnd type="none" w="med" len="med"/>
+                      <a:tailEnd type="none" w="med" len="med"/>
+                    </a:lnT>
+                    <a:lnB w="6350" cap="flat" cmpd="sng" algn="ctr">
+                      <a:solidFill>
+                        <a:srgbClr val="CCCCCC"/>
+                      </a:solidFill>
+                      <a:prstDash val="solid"/>
+                      <a:round/>
+                      <a:headEnd type="none" w="med" len="med"/>
+                      <a:tailEnd type="none" w="med" len="med"/>
+                    </a:lnB>
+                    <a:solidFill>
+                      <a:srgbClr val="FFFFFF"/>
+                    </a:solidFill>
+                  </a:tcPr>
+                </a:tc>
+                <a:tc>
+                  <a:txBody>
+                    <a:bodyPr/>
+                    <a:lstStyle/>
+                    <a:p>
+                      <a:pPr algn="ctr" indent="0" marL="0">
+                        <a:buNone/>
+                      </a:pPr>
+                      <a:r>
+                        <a:rPr lang="en-US" sz="800" b="1" dirty="0">
+                          <a:solidFill>
+                            <a:srgbClr val="333333"/>
+                          </a:solidFill>
+                          <a:latin typeface="Arial" pitchFamily="34" charset="0"/>
+                          <a:ea typeface="Arial" pitchFamily="34" charset="-122"/>
+                          <a:cs typeface="Arial" pitchFamily="34" charset="-120"/>
+                        </a:rPr>
+                        <a:t>0.00</a:t>
                       </a:r>
                       <a:endParaRPr lang="en-US" sz="800" dirty="0">
                         <a:latin typeface="Arial" charset="0"/>
@@ -3251,7 +4619,7 @@
                           <a:ea typeface="Arial" pitchFamily="34" charset="-122"/>
                           <a:cs typeface="Arial" pitchFamily="34" charset="-120"/>
                         </a:rPr>
-                        <a:t>41</a:t>
+                        <a:t>48</a:t>
                       </a:r>
                       <a:endParaRPr lang="en-US" sz="800" dirty="0">
                         <a:latin typeface="Arial" charset="0"/>
@@ -3319,7 +4687,7 @@
                           <a:ea typeface="Arial" pitchFamily="34" charset="-122"/>
                           <a:cs typeface="Arial" pitchFamily="34" charset="-120"/>
                         </a:rPr>
-                        <a:t>36</a:t>
+                        <a:t>39</a:t>
                       </a:r>
                       <a:endParaRPr lang="en-US" sz="800" dirty="0">
                         <a:latin typeface="Arial" charset="0"/>
@@ -3387,7 +4755,7 @@
                           <a:ea typeface="Arial" pitchFamily="34" charset="-122"/>
                           <a:cs typeface="Arial" pitchFamily="34" charset="-120"/>
                         </a:rPr>
-                        <a:t>10</a:t>
+                        <a:t>11</a:t>
                       </a:r>
                       <a:endParaRPr lang="en-US" sz="800" dirty="0">
                         <a:latin typeface="Arial" charset="0"/>
@@ -3456,690 +4824,6 @@
                           <a:cs typeface="Arial" pitchFamily="34" charset="-120"/>
                         </a:rPr>
                         <a:t>0.28</a:t>
-                      </a:r>
-                      <a:endParaRPr lang="en-US" sz="800" dirty="0">
-                        <a:latin typeface="Arial" charset="0"/>
-                        <a:ea typeface="Arial" charset="0"/>
-                        <a:cs typeface="Arial" charset="0"/>
-                      </a:endParaRPr>
-                    </a:p>
-                  </a:txBody>
-                  <a:tcPr marL="91440" marR="91440" marT="45720" marB="45720">
-                    <a:lnL w="6350" cap="flat" cmpd="sng" algn="ctr">
-                      <a:solidFill>
-                        <a:srgbClr val="CCCCCC"/>
-                      </a:solidFill>
-                      <a:prstDash val="solid"/>
-                      <a:round/>
-                      <a:headEnd type="none" w="med" len="med"/>
-                      <a:tailEnd type="none" w="med" len="med"/>
-                    </a:lnL>
-                    <a:lnR w="6350" cap="flat" cmpd="sng" algn="ctr">
-                      <a:solidFill>
-                        <a:srgbClr val="CCCCCC"/>
-                      </a:solidFill>
-                      <a:prstDash val="solid"/>
-                      <a:round/>
-                      <a:headEnd type="none" w="med" len="med"/>
-                      <a:tailEnd type="none" w="med" len="med"/>
-                    </a:lnR>
-                    <a:lnT w="6350" cap="flat" cmpd="sng" algn="ctr">
-                      <a:solidFill>
-                        <a:srgbClr val="CCCCCC"/>
-                      </a:solidFill>
-                      <a:prstDash val="solid"/>
-                      <a:round/>
-                      <a:headEnd type="none" w="med" len="med"/>
-                      <a:tailEnd type="none" w="med" len="med"/>
-                    </a:lnT>
-                    <a:lnB w="6350" cap="flat" cmpd="sng" algn="ctr">
-                      <a:solidFill>
-                        <a:srgbClr val="CCCCCC"/>
-                      </a:solidFill>
-                      <a:prstDash val="solid"/>
-                      <a:round/>
-                      <a:headEnd type="none" w="med" len="med"/>
-                      <a:tailEnd type="none" w="med" len="med"/>
-                    </a:lnB>
-                    <a:solidFill>
-                      <a:srgbClr val="F5F7FA"/>
-                    </a:solidFill>
-                  </a:tcPr>
-                </a:tc>
-              </a:tr>
-              <a:tr h="246185">
-                <a:tc>
-                  <a:txBody>
-                    <a:bodyPr/>
-                    <a:lstStyle/>
-                    <a:p>
-                      <a:pPr algn="ctr" indent="0" marL="0">
-                        <a:buNone/>
-                      </a:pPr>
-                      <a:r>
-                        <a:rPr lang="en-US" sz="700" dirty="0">
-                          <a:solidFill>
-                            <a:srgbClr val="000000"/>
-                          </a:solidFill>
-                          <a:latin typeface="Arial" pitchFamily="34" charset="0"/>
-                          <a:ea typeface="Arial" pitchFamily="34" charset="-122"/>
-                          <a:cs typeface="Arial" pitchFamily="34" charset="-120"/>
-                        </a:rPr>
-                        <a:t>ハートンH.東品川</a:t>
-                      </a:r>
-                      <a:endParaRPr lang="en-US" sz="700" dirty="0">
-                        <a:latin typeface="Arial" charset="0"/>
-                        <a:ea typeface="Arial" charset="0"/>
-                        <a:cs typeface="Arial" charset="0"/>
-                      </a:endParaRPr>
-                    </a:p>
-                  </a:txBody>
-                  <a:tcPr marL="91440" marR="91440" marT="45720" marB="45720">
-                    <a:lnL w="6350" cap="flat" cmpd="sng" algn="ctr">
-                      <a:solidFill>
-                        <a:srgbClr val="CCCCCC"/>
-                      </a:solidFill>
-                      <a:prstDash val="solid"/>
-                      <a:round/>
-                      <a:headEnd type="none" w="med" len="med"/>
-                      <a:tailEnd type="none" w="med" len="med"/>
-                    </a:lnL>
-                    <a:lnR w="6350" cap="flat" cmpd="sng" algn="ctr">
-                      <a:solidFill>
-                        <a:srgbClr val="CCCCCC"/>
-                      </a:solidFill>
-                      <a:prstDash val="solid"/>
-                      <a:round/>
-                      <a:headEnd type="none" w="med" len="med"/>
-                      <a:tailEnd type="none" w="med" len="med"/>
-                    </a:lnR>
-                    <a:lnT w="6350" cap="flat" cmpd="sng" algn="ctr">
-                      <a:solidFill>
-                        <a:srgbClr val="CCCCCC"/>
-                      </a:solidFill>
-                      <a:prstDash val="solid"/>
-                      <a:round/>
-                      <a:headEnd type="none" w="med" len="med"/>
-                      <a:tailEnd type="none" w="med" len="med"/>
-                    </a:lnT>
-                    <a:lnB w="6350" cap="flat" cmpd="sng" algn="ctr">
-                      <a:solidFill>
-                        <a:srgbClr val="CCCCCC"/>
-                      </a:solidFill>
-                      <a:prstDash val="solid"/>
-                      <a:round/>
-                      <a:headEnd type="none" w="med" len="med"/>
-                      <a:tailEnd type="none" w="med" len="med"/>
-                    </a:lnB>
-                    <a:solidFill>
-                      <a:srgbClr val="FFFFFF"/>
-                    </a:solidFill>
-                  </a:tcPr>
-                </a:tc>
-                <a:tc>
-                  <a:txBody>
-                    <a:bodyPr/>
-                    <a:lstStyle/>
-                    <a:p>
-                      <a:pPr algn="ctr" indent="0" marL="0">
-                        <a:buNone/>
-                      </a:pPr>
-                      <a:r>
-                        <a:rPr lang="en-US" sz="800" dirty="0">
-                          <a:solidFill>
-                            <a:srgbClr val="000000"/>
-                          </a:solidFill>
-                          <a:latin typeface="Arial" pitchFamily="34" charset="0"/>
-                          <a:ea typeface="Arial" pitchFamily="34" charset="-122"/>
-                          <a:cs typeface="Arial" pitchFamily="34" charset="-120"/>
-                        </a:rPr>
-                        <a:t>34</a:t>
-                      </a:r>
-                      <a:endParaRPr lang="en-US" sz="800" dirty="0">
-                        <a:latin typeface="Arial" charset="0"/>
-                        <a:ea typeface="Arial" charset="0"/>
-                        <a:cs typeface="Arial" charset="0"/>
-                      </a:endParaRPr>
-                    </a:p>
-                  </a:txBody>
-                  <a:tcPr marL="91440" marR="91440" marT="45720" marB="45720">
-                    <a:lnL w="6350" cap="flat" cmpd="sng" algn="ctr">
-                      <a:solidFill>
-                        <a:srgbClr val="CCCCCC"/>
-                      </a:solidFill>
-                      <a:prstDash val="solid"/>
-                      <a:round/>
-                      <a:headEnd type="none" w="med" len="med"/>
-                      <a:tailEnd type="none" w="med" len="med"/>
-                    </a:lnL>
-                    <a:lnR w="6350" cap="flat" cmpd="sng" algn="ctr">
-                      <a:solidFill>
-                        <a:srgbClr val="CCCCCC"/>
-                      </a:solidFill>
-                      <a:prstDash val="solid"/>
-                      <a:round/>
-                      <a:headEnd type="none" w="med" len="med"/>
-                      <a:tailEnd type="none" w="med" len="med"/>
-                    </a:lnR>
-                    <a:lnT w="6350" cap="flat" cmpd="sng" algn="ctr">
-                      <a:solidFill>
-                        <a:srgbClr val="CCCCCC"/>
-                      </a:solidFill>
-                      <a:prstDash val="solid"/>
-                      <a:round/>
-                      <a:headEnd type="none" w="med" len="med"/>
-                      <a:tailEnd type="none" w="med" len="med"/>
-                    </a:lnT>
-                    <a:lnB w="6350" cap="flat" cmpd="sng" algn="ctr">
-                      <a:solidFill>
-                        <a:srgbClr val="CCCCCC"/>
-                      </a:solidFill>
-                      <a:prstDash val="solid"/>
-                      <a:round/>
-                      <a:headEnd type="none" w="med" len="med"/>
-                      <a:tailEnd type="none" w="med" len="med"/>
-                    </a:lnB>
-                    <a:solidFill>
-                      <a:srgbClr val="FFFFFF"/>
-                    </a:solidFill>
-                  </a:tcPr>
-                </a:tc>
-                <a:tc>
-                  <a:txBody>
-                    <a:bodyPr/>
-                    <a:lstStyle/>
-                    <a:p>
-                      <a:pPr algn="ctr" indent="0" marL="0">
-                        <a:buNone/>
-                      </a:pPr>
-                      <a:r>
-                        <a:rPr lang="en-US" sz="800" dirty="0">
-                          <a:solidFill>
-                            <a:srgbClr val="000000"/>
-                          </a:solidFill>
-                          <a:latin typeface="Arial" pitchFamily="34" charset="0"/>
-                          <a:ea typeface="Arial" pitchFamily="34" charset="-122"/>
-                          <a:cs typeface="Arial" pitchFamily="34" charset="-120"/>
-                        </a:rPr>
-                        <a:t>29</a:t>
-                      </a:r>
-                      <a:endParaRPr lang="en-US" sz="800" dirty="0">
-                        <a:latin typeface="Arial" charset="0"/>
-                        <a:ea typeface="Arial" charset="0"/>
-                        <a:cs typeface="Arial" charset="0"/>
-                      </a:endParaRPr>
-                    </a:p>
-                  </a:txBody>
-                  <a:tcPr marL="91440" marR="91440" marT="45720" marB="45720">
-                    <a:lnL w="6350" cap="flat" cmpd="sng" algn="ctr">
-                      <a:solidFill>
-                        <a:srgbClr val="CCCCCC"/>
-                      </a:solidFill>
-                      <a:prstDash val="solid"/>
-                      <a:round/>
-                      <a:headEnd type="none" w="med" len="med"/>
-                      <a:tailEnd type="none" w="med" len="med"/>
-                    </a:lnL>
-                    <a:lnR w="6350" cap="flat" cmpd="sng" algn="ctr">
-                      <a:solidFill>
-                        <a:srgbClr val="CCCCCC"/>
-                      </a:solidFill>
-                      <a:prstDash val="solid"/>
-                      <a:round/>
-                      <a:headEnd type="none" w="med" len="med"/>
-                      <a:tailEnd type="none" w="med" len="med"/>
-                    </a:lnR>
-                    <a:lnT w="6350" cap="flat" cmpd="sng" algn="ctr">
-                      <a:solidFill>
-                        <a:srgbClr val="CCCCCC"/>
-                      </a:solidFill>
-                      <a:prstDash val="solid"/>
-                      <a:round/>
-                      <a:headEnd type="none" w="med" len="med"/>
-                      <a:tailEnd type="none" w="med" len="med"/>
-                    </a:lnT>
-                    <a:lnB w="6350" cap="flat" cmpd="sng" algn="ctr">
-                      <a:solidFill>
-                        <a:srgbClr val="CCCCCC"/>
-                      </a:solidFill>
-                      <a:prstDash val="solid"/>
-                      <a:round/>
-                      <a:headEnd type="none" w="med" len="med"/>
-                      <a:tailEnd type="none" w="med" len="med"/>
-                    </a:lnB>
-                    <a:solidFill>
-                      <a:srgbClr val="FFFFFF"/>
-                    </a:solidFill>
-                  </a:tcPr>
-                </a:tc>
-                <a:tc>
-                  <a:txBody>
-                    <a:bodyPr/>
-                    <a:lstStyle/>
-                    <a:p>
-                      <a:pPr algn="ctr" indent="0" marL="0">
-                        <a:buNone/>
-                      </a:pPr>
-                      <a:r>
-                        <a:rPr lang="en-US" sz="800" b="1" dirty="0">
-                          <a:solidFill>
-                            <a:srgbClr val="000000"/>
-                          </a:solidFill>
-                          <a:latin typeface="Arial" pitchFamily="34" charset="0"/>
-                          <a:ea typeface="Arial" pitchFamily="34" charset="-122"/>
-                          <a:cs typeface="Arial" pitchFamily="34" charset="-120"/>
-                        </a:rPr>
-                        <a:t>10</a:t>
-                      </a:r>
-                      <a:endParaRPr lang="en-US" sz="800" dirty="0">
-                        <a:latin typeface="Arial" charset="0"/>
-                        <a:ea typeface="Arial" charset="0"/>
-                        <a:cs typeface="Arial" charset="0"/>
-                      </a:endParaRPr>
-                    </a:p>
-                  </a:txBody>
-                  <a:tcPr marL="91440" marR="91440" marT="45720" marB="45720">
-                    <a:lnL w="6350" cap="flat" cmpd="sng" algn="ctr">
-                      <a:solidFill>
-                        <a:srgbClr val="CCCCCC"/>
-                      </a:solidFill>
-                      <a:prstDash val="solid"/>
-                      <a:round/>
-                      <a:headEnd type="none" w="med" len="med"/>
-                      <a:tailEnd type="none" w="med" len="med"/>
-                    </a:lnL>
-                    <a:lnR w="6350" cap="flat" cmpd="sng" algn="ctr">
-                      <a:solidFill>
-                        <a:srgbClr val="CCCCCC"/>
-                      </a:solidFill>
-                      <a:prstDash val="solid"/>
-                      <a:round/>
-                      <a:headEnd type="none" w="med" len="med"/>
-                      <a:tailEnd type="none" w="med" len="med"/>
-                    </a:lnR>
-                    <a:lnT w="6350" cap="flat" cmpd="sng" algn="ctr">
-                      <a:solidFill>
-                        <a:srgbClr val="CCCCCC"/>
-                      </a:solidFill>
-                      <a:prstDash val="solid"/>
-                      <a:round/>
-                      <a:headEnd type="none" w="med" len="med"/>
-                      <a:tailEnd type="none" w="med" len="med"/>
-                    </a:lnT>
-                    <a:lnB w="6350" cap="flat" cmpd="sng" algn="ctr">
-                      <a:solidFill>
-                        <a:srgbClr val="CCCCCC"/>
-                      </a:solidFill>
-                      <a:prstDash val="solid"/>
-                      <a:round/>
-                      <a:headEnd type="none" w="med" len="med"/>
-                      <a:tailEnd type="none" w="med" len="med"/>
-                    </a:lnB>
-                    <a:solidFill>
-                      <a:srgbClr val="FFFFFF"/>
-                    </a:solidFill>
-                  </a:tcPr>
-                </a:tc>
-                <a:tc>
-                  <a:txBody>
-                    <a:bodyPr/>
-                    <a:lstStyle/>
-                    <a:p>
-                      <a:pPr algn="ctr" indent="0" marL="0">
-                        <a:buNone/>
-                      </a:pPr>
-                      <a:r>
-                        <a:rPr lang="en-US" sz="800" b="1" dirty="0">
-                          <a:solidFill>
-                            <a:srgbClr val="333333"/>
-                          </a:solidFill>
-                          <a:latin typeface="Arial" pitchFamily="34" charset="0"/>
-                          <a:ea typeface="Arial" pitchFamily="34" charset="-122"/>
-                          <a:cs typeface="Arial" pitchFamily="34" charset="-120"/>
-                        </a:rPr>
-                        <a:t>0.34</a:t>
-                      </a:r>
-                      <a:endParaRPr lang="en-US" sz="800" dirty="0">
-                        <a:latin typeface="Arial" charset="0"/>
-                        <a:ea typeface="Arial" charset="0"/>
-                        <a:cs typeface="Arial" charset="0"/>
-                      </a:endParaRPr>
-                    </a:p>
-                  </a:txBody>
-                  <a:tcPr marL="91440" marR="91440" marT="45720" marB="45720">
-                    <a:lnL w="6350" cap="flat" cmpd="sng" algn="ctr">
-                      <a:solidFill>
-                        <a:srgbClr val="CCCCCC"/>
-                      </a:solidFill>
-                      <a:prstDash val="solid"/>
-                      <a:round/>
-                      <a:headEnd type="none" w="med" len="med"/>
-                      <a:tailEnd type="none" w="med" len="med"/>
-                    </a:lnL>
-                    <a:lnR w="6350" cap="flat" cmpd="sng" algn="ctr">
-                      <a:solidFill>
-                        <a:srgbClr val="CCCCCC"/>
-                      </a:solidFill>
-                      <a:prstDash val="solid"/>
-                      <a:round/>
-                      <a:headEnd type="none" w="med" len="med"/>
-                      <a:tailEnd type="none" w="med" len="med"/>
-                    </a:lnR>
-                    <a:lnT w="6350" cap="flat" cmpd="sng" algn="ctr">
-                      <a:solidFill>
-                        <a:srgbClr val="CCCCCC"/>
-                      </a:solidFill>
-                      <a:prstDash val="solid"/>
-                      <a:round/>
-                      <a:headEnd type="none" w="med" len="med"/>
-                      <a:tailEnd type="none" w="med" len="med"/>
-                    </a:lnT>
-                    <a:lnB w="6350" cap="flat" cmpd="sng" algn="ctr">
-                      <a:solidFill>
-                        <a:srgbClr val="CCCCCC"/>
-                      </a:solidFill>
-                      <a:prstDash val="solid"/>
-                      <a:round/>
-                      <a:headEnd type="none" w="med" len="med"/>
-                      <a:tailEnd type="none" w="med" len="med"/>
-                    </a:lnB>
-                    <a:solidFill>
-                      <a:srgbClr val="FFFFFF"/>
-                    </a:solidFill>
-                  </a:tcPr>
-                </a:tc>
-              </a:tr>
-              <a:tr h="246185">
-                <a:tc>
-                  <a:txBody>
-                    <a:bodyPr/>
-                    <a:lstStyle/>
-                    <a:p>
-                      <a:pPr algn="ctr" indent="0" marL="0">
-                        <a:buNone/>
-                      </a:pPr>
-                      <a:r>
-                        <a:rPr lang="en-US" sz="700" dirty="0">
-                          <a:solidFill>
-                            <a:srgbClr val="000000"/>
-                          </a:solidFill>
-                          <a:latin typeface="Arial" pitchFamily="34" charset="0"/>
-                          <a:ea typeface="Arial" pitchFamily="34" charset="-122"/>
-                          <a:cs typeface="Arial" pitchFamily="34" charset="-120"/>
-                        </a:rPr>
-                        <a:t>アパH.蒲田駅東</a:t>
-                      </a:r>
-                      <a:endParaRPr lang="en-US" sz="700" dirty="0">
-                        <a:latin typeface="Arial" charset="0"/>
-                        <a:ea typeface="Arial" charset="0"/>
-                        <a:cs typeface="Arial" charset="0"/>
-                      </a:endParaRPr>
-                    </a:p>
-                  </a:txBody>
-                  <a:tcPr marL="91440" marR="91440" marT="45720" marB="45720">
-                    <a:lnL w="6350" cap="flat" cmpd="sng" algn="ctr">
-                      <a:solidFill>
-                        <a:srgbClr val="CCCCCC"/>
-                      </a:solidFill>
-                      <a:prstDash val="solid"/>
-                      <a:round/>
-                      <a:headEnd type="none" w="med" len="med"/>
-                      <a:tailEnd type="none" w="med" len="med"/>
-                    </a:lnL>
-                    <a:lnR w="6350" cap="flat" cmpd="sng" algn="ctr">
-                      <a:solidFill>
-                        <a:srgbClr val="CCCCCC"/>
-                      </a:solidFill>
-                      <a:prstDash val="solid"/>
-                      <a:round/>
-                      <a:headEnd type="none" w="med" len="med"/>
-                      <a:tailEnd type="none" w="med" len="med"/>
-                    </a:lnR>
-                    <a:lnT w="6350" cap="flat" cmpd="sng" algn="ctr">
-                      <a:solidFill>
-                        <a:srgbClr val="CCCCCC"/>
-                      </a:solidFill>
-                      <a:prstDash val="solid"/>
-                      <a:round/>
-                      <a:headEnd type="none" w="med" len="med"/>
-                      <a:tailEnd type="none" w="med" len="med"/>
-                    </a:lnT>
-                    <a:lnB w="6350" cap="flat" cmpd="sng" algn="ctr">
-                      <a:solidFill>
-                        <a:srgbClr val="CCCCCC"/>
-                      </a:solidFill>
-                      <a:prstDash val="solid"/>
-                      <a:round/>
-                      <a:headEnd type="none" w="med" len="med"/>
-                      <a:tailEnd type="none" w="med" len="med"/>
-                    </a:lnB>
-                    <a:solidFill>
-                      <a:srgbClr val="F5F7FA"/>
-                    </a:solidFill>
-                  </a:tcPr>
-                </a:tc>
-                <a:tc>
-                  <a:txBody>
-                    <a:bodyPr/>
-                    <a:lstStyle/>
-                    <a:p>
-                      <a:pPr algn="ctr" indent="0" marL="0">
-                        <a:buNone/>
-                      </a:pPr>
-                      <a:r>
-                        <a:rPr lang="en-US" sz="800" dirty="0">
-                          <a:solidFill>
-                            <a:srgbClr val="000000"/>
-                          </a:solidFill>
-                          <a:latin typeface="Arial" pitchFamily="34" charset="0"/>
-                          <a:ea typeface="Arial" pitchFamily="34" charset="-122"/>
-                          <a:cs typeface="Arial" pitchFamily="34" charset="-120"/>
-                        </a:rPr>
-                        <a:t>37</a:t>
-                      </a:r>
-                      <a:endParaRPr lang="en-US" sz="800" dirty="0">
-                        <a:latin typeface="Arial" charset="0"/>
-                        <a:ea typeface="Arial" charset="0"/>
-                        <a:cs typeface="Arial" charset="0"/>
-                      </a:endParaRPr>
-                    </a:p>
-                  </a:txBody>
-                  <a:tcPr marL="91440" marR="91440" marT="45720" marB="45720">
-                    <a:lnL w="6350" cap="flat" cmpd="sng" algn="ctr">
-                      <a:solidFill>
-                        <a:srgbClr val="CCCCCC"/>
-                      </a:solidFill>
-                      <a:prstDash val="solid"/>
-                      <a:round/>
-                      <a:headEnd type="none" w="med" len="med"/>
-                      <a:tailEnd type="none" w="med" len="med"/>
-                    </a:lnL>
-                    <a:lnR w="6350" cap="flat" cmpd="sng" algn="ctr">
-                      <a:solidFill>
-                        <a:srgbClr val="CCCCCC"/>
-                      </a:solidFill>
-                      <a:prstDash val="solid"/>
-                      <a:round/>
-                      <a:headEnd type="none" w="med" len="med"/>
-                      <a:tailEnd type="none" w="med" len="med"/>
-                    </a:lnR>
-                    <a:lnT w="6350" cap="flat" cmpd="sng" algn="ctr">
-                      <a:solidFill>
-                        <a:srgbClr val="CCCCCC"/>
-                      </a:solidFill>
-                      <a:prstDash val="solid"/>
-                      <a:round/>
-                      <a:headEnd type="none" w="med" len="med"/>
-                      <a:tailEnd type="none" w="med" len="med"/>
-                    </a:lnT>
-                    <a:lnB w="6350" cap="flat" cmpd="sng" algn="ctr">
-                      <a:solidFill>
-                        <a:srgbClr val="CCCCCC"/>
-                      </a:solidFill>
-                      <a:prstDash val="solid"/>
-                      <a:round/>
-                      <a:headEnd type="none" w="med" len="med"/>
-                      <a:tailEnd type="none" w="med" len="med"/>
-                    </a:lnB>
-                    <a:solidFill>
-                      <a:srgbClr val="F5F7FA"/>
-                    </a:solidFill>
-                  </a:tcPr>
-                </a:tc>
-                <a:tc>
-                  <a:txBody>
-                    <a:bodyPr/>
-                    <a:lstStyle/>
-                    <a:p>
-                      <a:pPr algn="ctr" indent="0" marL="0">
-                        <a:buNone/>
-                      </a:pPr>
-                      <a:r>
-                        <a:rPr lang="en-US" sz="800" dirty="0">
-                          <a:solidFill>
-                            <a:srgbClr val="000000"/>
-                          </a:solidFill>
-                          <a:latin typeface="Arial" pitchFamily="34" charset="0"/>
-                          <a:ea typeface="Arial" pitchFamily="34" charset="-122"/>
-                          <a:cs typeface="Arial" pitchFamily="34" charset="-120"/>
-                        </a:rPr>
-                        <a:t>26</a:t>
-                      </a:r>
-                      <a:endParaRPr lang="en-US" sz="800" dirty="0">
-                        <a:latin typeface="Arial" charset="0"/>
-                        <a:ea typeface="Arial" charset="0"/>
-                        <a:cs typeface="Arial" charset="0"/>
-                      </a:endParaRPr>
-                    </a:p>
-                  </a:txBody>
-                  <a:tcPr marL="91440" marR="91440" marT="45720" marB="45720">
-                    <a:lnL w="6350" cap="flat" cmpd="sng" algn="ctr">
-                      <a:solidFill>
-                        <a:srgbClr val="CCCCCC"/>
-                      </a:solidFill>
-                      <a:prstDash val="solid"/>
-                      <a:round/>
-                      <a:headEnd type="none" w="med" len="med"/>
-                      <a:tailEnd type="none" w="med" len="med"/>
-                    </a:lnL>
-                    <a:lnR w="6350" cap="flat" cmpd="sng" algn="ctr">
-                      <a:solidFill>
-                        <a:srgbClr val="CCCCCC"/>
-                      </a:solidFill>
-                      <a:prstDash val="solid"/>
-                      <a:round/>
-                      <a:headEnd type="none" w="med" len="med"/>
-                      <a:tailEnd type="none" w="med" len="med"/>
-                    </a:lnR>
-                    <a:lnT w="6350" cap="flat" cmpd="sng" algn="ctr">
-                      <a:solidFill>
-                        <a:srgbClr val="CCCCCC"/>
-                      </a:solidFill>
-                      <a:prstDash val="solid"/>
-                      <a:round/>
-                      <a:headEnd type="none" w="med" len="med"/>
-                      <a:tailEnd type="none" w="med" len="med"/>
-                    </a:lnT>
-                    <a:lnB w="6350" cap="flat" cmpd="sng" algn="ctr">
-                      <a:solidFill>
-                        <a:srgbClr val="CCCCCC"/>
-                      </a:solidFill>
-                      <a:prstDash val="solid"/>
-                      <a:round/>
-                      <a:headEnd type="none" w="med" len="med"/>
-                      <a:tailEnd type="none" w="med" len="med"/>
-                    </a:lnB>
-                    <a:solidFill>
-                      <a:srgbClr val="F5F7FA"/>
-                    </a:solidFill>
-                  </a:tcPr>
-                </a:tc>
-                <a:tc>
-                  <a:txBody>
-                    <a:bodyPr/>
-                    <a:lstStyle/>
-                    <a:p>
-                      <a:pPr algn="ctr" indent="0" marL="0">
-                        <a:buNone/>
-                      </a:pPr>
-                      <a:r>
-                        <a:rPr lang="en-US" sz="800" b="1" dirty="0">
-                          <a:solidFill>
-                            <a:srgbClr val="000000"/>
-                          </a:solidFill>
-                          <a:latin typeface="Arial" pitchFamily="34" charset="0"/>
-                          <a:ea typeface="Arial" pitchFamily="34" charset="-122"/>
-                          <a:cs typeface="Arial" pitchFamily="34" charset="-120"/>
-                        </a:rPr>
-                        <a:t>10</a:t>
-                      </a:r>
-                      <a:endParaRPr lang="en-US" sz="800" dirty="0">
-                        <a:latin typeface="Arial" charset="0"/>
-                        <a:ea typeface="Arial" charset="0"/>
-                        <a:cs typeface="Arial" charset="0"/>
-                      </a:endParaRPr>
-                    </a:p>
-                  </a:txBody>
-                  <a:tcPr marL="91440" marR="91440" marT="45720" marB="45720">
-                    <a:lnL w="6350" cap="flat" cmpd="sng" algn="ctr">
-                      <a:solidFill>
-                        <a:srgbClr val="CCCCCC"/>
-                      </a:solidFill>
-                      <a:prstDash val="solid"/>
-                      <a:round/>
-                      <a:headEnd type="none" w="med" len="med"/>
-                      <a:tailEnd type="none" w="med" len="med"/>
-                    </a:lnL>
-                    <a:lnR w="6350" cap="flat" cmpd="sng" algn="ctr">
-                      <a:solidFill>
-                        <a:srgbClr val="CCCCCC"/>
-                      </a:solidFill>
-                      <a:prstDash val="solid"/>
-                      <a:round/>
-                      <a:headEnd type="none" w="med" len="med"/>
-                      <a:tailEnd type="none" w="med" len="med"/>
-                    </a:lnR>
-                    <a:lnT w="6350" cap="flat" cmpd="sng" algn="ctr">
-                      <a:solidFill>
-                        <a:srgbClr val="CCCCCC"/>
-                      </a:solidFill>
-                      <a:prstDash val="solid"/>
-                      <a:round/>
-                      <a:headEnd type="none" w="med" len="med"/>
-                      <a:tailEnd type="none" w="med" len="med"/>
-                    </a:lnT>
-                    <a:lnB w="6350" cap="flat" cmpd="sng" algn="ctr">
-                      <a:solidFill>
-                        <a:srgbClr val="CCCCCC"/>
-                      </a:solidFill>
-                      <a:prstDash val="solid"/>
-                      <a:round/>
-                      <a:headEnd type="none" w="med" len="med"/>
-                      <a:tailEnd type="none" w="med" len="med"/>
-                    </a:lnB>
-                    <a:solidFill>
-                      <a:srgbClr val="F5F7FA"/>
-                    </a:solidFill>
-                  </a:tcPr>
-                </a:tc>
-                <a:tc>
-                  <a:txBody>
-                    <a:bodyPr/>
-                    <a:lstStyle/>
-                    <a:p>
-                      <a:pPr algn="ctr" indent="0" marL="0">
-                        <a:buNone/>
-                      </a:pPr>
-                      <a:r>
-                        <a:rPr lang="en-US" sz="800" b="1" dirty="0">
-                          <a:solidFill>
-                            <a:srgbClr val="333333"/>
-                          </a:solidFill>
-                          <a:latin typeface="Arial" pitchFamily="34" charset="0"/>
-                          <a:ea typeface="Arial" pitchFamily="34" charset="-122"/>
-                          <a:cs typeface="Arial" pitchFamily="34" charset="-120"/>
-                        </a:rPr>
-                        <a:t>0.38</a:t>
                       </a:r>
                       <a:endParaRPr lang="en-US" sz="800" dirty="0">
                         <a:latin typeface="Arial" charset="0"/>
@@ -4277,7 +4961,7 @@
                           <a:ea typeface="Arial" pitchFamily="34" charset="-122"/>
                           <a:cs typeface="Arial" pitchFamily="34" charset="-120"/>
                         </a:rPr>
-                        <a:t>29</a:t>
+                        <a:t>30</a:t>
                       </a:r>
                       <a:endParaRPr lang="en-US" sz="800" dirty="0">
                         <a:latin typeface="Arial" charset="0"/>
@@ -4345,7 +5029,7 @@
                           <a:ea typeface="Arial" pitchFamily="34" charset="-122"/>
                           <a:cs typeface="Arial" pitchFamily="34" charset="-120"/>
                         </a:rPr>
-                        <a:t>19</a:t>
+                        <a:t>22</a:t>
                       </a:r>
                       <a:endParaRPr lang="en-US" sz="800" dirty="0">
                         <a:latin typeface="Arial" charset="0"/>
@@ -4413,7 +5097,7 @@
                           <a:ea typeface="Arial" pitchFamily="34" charset="-122"/>
                           <a:cs typeface="Arial" pitchFamily="34" charset="-120"/>
                         </a:rPr>
-                        <a:t>8</a:t>
+                        <a:t>11</a:t>
                       </a:r>
                       <a:endParaRPr lang="en-US" sz="800" dirty="0">
                         <a:latin typeface="Arial" charset="0"/>
@@ -4475,13 +5159,13 @@
                       <a:r>
                         <a:rPr lang="en-US" sz="800" b="1" dirty="0">
                           <a:solidFill>
-                            <a:srgbClr val="333333"/>
+                            <a:srgbClr val="E74C3C"/>
                           </a:solidFill>
                           <a:latin typeface="Arial" pitchFamily="34" charset="0"/>
                           <a:ea typeface="Arial" pitchFamily="34" charset="-122"/>
                           <a:cs typeface="Arial" pitchFamily="34" charset="-120"/>
                         </a:rPr>
-                        <a:t>0.42</a:t>
+                        <a:t>0.50</a:t>
                       </a:r>
                       <a:endParaRPr lang="en-US" sz="800" dirty="0">
                         <a:latin typeface="Arial" charset="0"/>
@@ -4755,6 +5439,690 @@
                           <a:ea typeface="Arial" pitchFamily="34" charset="-122"/>
                           <a:cs typeface="Arial" pitchFamily="34" charset="-120"/>
                         </a:rPr>
+                        <a:t>7</a:t>
+                      </a:r>
+                      <a:endParaRPr lang="en-US" sz="800" dirty="0">
+                        <a:latin typeface="Arial" charset="0"/>
+                        <a:ea typeface="Arial" charset="0"/>
+                        <a:cs typeface="Arial" charset="0"/>
+                      </a:endParaRPr>
+                    </a:p>
+                  </a:txBody>
+                  <a:tcPr marL="91440" marR="91440" marT="45720" marB="45720">
+                    <a:lnL w="6350" cap="flat" cmpd="sng" algn="ctr">
+                      <a:solidFill>
+                        <a:srgbClr val="CCCCCC"/>
+                      </a:solidFill>
+                      <a:prstDash val="solid"/>
+                      <a:round/>
+                      <a:headEnd type="none" w="med" len="med"/>
+                      <a:tailEnd type="none" w="med" len="med"/>
+                    </a:lnL>
+                    <a:lnR w="6350" cap="flat" cmpd="sng" algn="ctr">
+                      <a:solidFill>
+                        <a:srgbClr val="CCCCCC"/>
+                      </a:solidFill>
+                      <a:prstDash val="solid"/>
+                      <a:round/>
+                      <a:headEnd type="none" w="med" len="med"/>
+                      <a:tailEnd type="none" w="med" len="med"/>
+                    </a:lnR>
+                    <a:lnT w="6350" cap="flat" cmpd="sng" algn="ctr">
+                      <a:solidFill>
+                        <a:srgbClr val="CCCCCC"/>
+                      </a:solidFill>
+                      <a:prstDash val="solid"/>
+                      <a:round/>
+                      <a:headEnd type="none" w="med" len="med"/>
+                      <a:tailEnd type="none" w="med" len="med"/>
+                    </a:lnT>
+                    <a:lnB w="6350" cap="flat" cmpd="sng" algn="ctr">
+                      <a:solidFill>
+                        <a:srgbClr val="CCCCCC"/>
+                      </a:solidFill>
+                      <a:prstDash val="solid"/>
+                      <a:round/>
+                      <a:headEnd type="none" w="med" len="med"/>
+                      <a:tailEnd type="none" w="med" len="med"/>
+                    </a:lnB>
+                    <a:solidFill>
+                      <a:srgbClr val="F5F7FA"/>
+                    </a:solidFill>
+                  </a:tcPr>
+                </a:tc>
+                <a:tc>
+                  <a:txBody>
+                    <a:bodyPr/>
+                    <a:lstStyle/>
+                    <a:p>
+                      <a:pPr algn="ctr" indent="0" marL="0">
+                        <a:buNone/>
+                      </a:pPr>
+                      <a:r>
+                        <a:rPr lang="en-US" sz="800" b="1" dirty="0">
+                          <a:solidFill>
+                            <a:srgbClr val="E74C3C"/>
+                          </a:solidFill>
+                          <a:latin typeface="Arial" pitchFamily="34" charset="0"/>
+                          <a:ea typeface="Arial" pitchFamily="34" charset="-122"/>
+                          <a:cs typeface="Arial" pitchFamily="34" charset="-120"/>
+                        </a:rPr>
+                        <a:t>0.58</a:t>
+                      </a:r>
+                      <a:endParaRPr lang="en-US" sz="800" dirty="0">
+                        <a:latin typeface="Arial" charset="0"/>
+                        <a:ea typeface="Arial" charset="0"/>
+                        <a:cs typeface="Arial" charset="0"/>
+                      </a:endParaRPr>
+                    </a:p>
+                  </a:txBody>
+                  <a:tcPr marL="91440" marR="91440" marT="45720" marB="45720">
+                    <a:lnL w="6350" cap="flat" cmpd="sng" algn="ctr">
+                      <a:solidFill>
+                        <a:srgbClr val="CCCCCC"/>
+                      </a:solidFill>
+                      <a:prstDash val="solid"/>
+                      <a:round/>
+                      <a:headEnd type="none" w="med" len="med"/>
+                      <a:tailEnd type="none" w="med" len="med"/>
+                    </a:lnL>
+                    <a:lnR w="6350" cap="flat" cmpd="sng" algn="ctr">
+                      <a:solidFill>
+                        <a:srgbClr val="CCCCCC"/>
+                      </a:solidFill>
+                      <a:prstDash val="solid"/>
+                      <a:round/>
+                      <a:headEnd type="none" w="med" len="med"/>
+                      <a:tailEnd type="none" w="med" len="med"/>
+                    </a:lnR>
+                    <a:lnT w="6350" cap="flat" cmpd="sng" algn="ctr">
+                      <a:solidFill>
+                        <a:srgbClr val="CCCCCC"/>
+                      </a:solidFill>
+                      <a:prstDash val="solid"/>
+                      <a:round/>
+                      <a:headEnd type="none" w="med" len="med"/>
+                      <a:tailEnd type="none" w="med" len="med"/>
+                    </a:lnT>
+                    <a:lnB w="6350" cap="flat" cmpd="sng" algn="ctr">
+                      <a:solidFill>
+                        <a:srgbClr val="CCCCCC"/>
+                      </a:solidFill>
+                      <a:prstDash val="solid"/>
+                      <a:round/>
+                      <a:headEnd type="none" w="med" len="med"/>
+                      <a:tailEnd type="none" w="med" len="med"/>
+                    </a:lnB>
+                    <a:solidFill>
+                      <a:srgbClr val="F5F7FA"/>
+                    </a:solidFill>
+                  </a:tcPr>
+                </a:tc>
+              </a:tr>
+              <a:tr h="246185">
+                <a:tc>
+                  <a:txBody>
+                    <a:bodyPr/>
+                    <a:lstStyle/>
+                    <a:p>
+                      <a:pPr algn="ctr" indent="0" marL="0">
+                        <a:buNone/>
+                      </a:pPr>
+                      <a:r>
+                        <a:rPr lang="en-US" sz="700" dirty="0">
+                          <a:solidFill>
+                            <a:srgbClr val="000000"/>
+                          </a:solidFill>
+                          <a:latin typeface="Arial" pitchFamily="34" charset="0"/>
+                          <a:ea typeface="Arial" pitchFamily="34" charset="-122"/>
+                          <a:cs typeface="Arial" pitchFamily="34" charset="-120"/>
+                        </a:rPr>
+                        <a:t>H.コメント横浜関内</a:t>
+                      </a:r>
+                      <a:endParaRPr lang="en-US" sz="700" dirty="0">
+                        <a:latin typeface="Arial" charset="0"/>
+                        <a:ea typeface="Arial" charset="0"/>
+                        <a:cs typeface="Arial" charset="0"/>
+                      </a:endParaRPr>
+                    </a:p>
+                  </a:txBody>
+                  <a:tcPr marL="91440" marR="91440" marT="45720" marB="45720">
+                    <a:lnL w="6350" cap="flat" cmpd="sng" algn="ctr">
+                      <a:solidFill>
+                        <a:srgbClr val="CCCCCC"/>
+                      </a:solidFill>
+                      <a:prstDash val="solid"/>
+                      <a:round/>
+                      <a:headEnd type="none" w="med" len="med"/>
+                      <a:tailEnd type="none" w="med" len="med"/>
+                    </a:lnL>
+                    <a:lnR w="6350" cap="flat" cmpd="sng" algn="ctr">
+                      <a:solidFill>
+                        <a:srgbClr val="CCCCCC"/>
+                      </a:solidFill>
+                      <a:prstDash val="solid"/>
+                      <a:round/>
+                      <a:headEnd type="none" w="med" len="med"/>
+                      <a:tailEnd type="none" w="med" len="med"/>
+                    </a:lnR>
+                    <a:lnT w="6350" cap="flat" cmpd="sng" algn="ctr">
+                      <a:solidFill>
+                        <a:srgbClr val="CCCCCC"/>
+                      </a:solidFill>
+                      <a:prstDash val="solid"/>
+                      <a:round/>
+                      <a:headEnd type="none" w="med" len="med"/>
+                      <a:tailEnd type="none" w="med" len="med"/>
+                    </a:lnT>
+                    <a:lnB w="6350" cap="flat" cmpd="sng" algn="ctr">
+                      <a:solidFill>
+                        <a:srgbClr val="CCCCCC"/>
+                      </a:solidFill>
+                      <a:prstDash val="solid"/>
+                      <a:round/>
+                      <a:headEnd type="none" w="med" len="med"/>
+                      <a:tailEnd type="none" w="med" len="med"/>
+                    </a:lnB>
+                    <a:solidFill>
+                      <a:srgbClr val="FFFFFF"/>
+                    </a:solidFill>
+                  </a:tcPr>
+                </a:tc>
+                <a:tc>
+                  <a:txBody>
+                    <a:bodyPr/>
+                    <a:lstStyle/>
+                    <a:p>
+                      <a:pPr algn="ctr" indent="0" marL="0">
+                        <a:buNone/>
+                      </a:pPr>
+                      <a:r>
+                        <a:rPr lang="en-US" sz="800" dirty="0">
+                          <a:solidFill>
+                            <a:srgbClr val="000000"/>
+                          </a:solidFill>
+                          <a:latin typeface="Arial" pitchFamily="34" charset="0"/>
+                          <a:ea typeface="Arial" pitchFamily="34" charset="-122"/>
+                          <a:cs typeface="Arial" pitchFamily="34" charset="-120"/>
+                        </a:rPr>
+                        <a:t>1</a:t>
+                      </a:r>
+                      <a:endParaRPr lang="en-US" sz="800" dirty="0">
+                        <a:latin typeface="Arial" charset="0"/>
+                        <a:ea typeface="Arial" charset="0"/>
+                        <a:cs typeface="Arial" charset="0"/>
+                      </a:endParaRPr>
+                    </a:p>
+                  </a:txBody>
+                  <a:tcPr marL="91440" marR="91440" marT="45720" marB="45720">
+                    <a:lnL w="6350" cap="flat" cmpd="sng" algn="ctr">
+                      <a:solidFill>
+                        <a:srgbClr val="CCCCCC"/>
+                      </a:solidFill>
+                      <a:prstDash val="solid"/>
+                      <a:round/>
+                      <a:headEnd type="none" w="med" len="med"/>
+                      <a:tailEnd type="none" w="med" len="med"/>
+                    </a:lnL>
+                    <a:lnR w="6350" cap="flat" cmpd="sng" algn="ctr">
+                      <a:solidFill>
+                        <a:srgbClr val="CCCCCC"/>
+                      </a:solidFill>
+                      <a:prstDash val="solid"/>
+                      <a:round/>
+                      <a:headEnd type="none" w="med" len="med"/>
+                      <a:tailEnd type="none" w="med" len="med"/>
+                    </a:lnR>
+                    <a:lnT w="6350" cap="flat" cmpd="sng" algn="ctr">
+                      <a:solidFill>
+                        <a:srgbClr val="CCCCCC"/>
+                      </a:solidFill>
+                      <a:prstDash val="solid"/>
+                      <a:round/>
+                      <a:headEnd type="none" w="med" len="med"/>
+                      <a:tailEnd type="none" w="med" len="med"/>
+                    </a:lnT>
+                    <a:lnB w="6350" cap="flat" cmpd="sng" algn="ctr">
+                      <a:solidFill>
+                        <a:srgbClr val="CCCCCC"/>
+                      </a:solidFill>
+                      <a:prstDash val="solid"/>
+                      <a:round/>
+                      <a:headEnd type="none" w="med" len="med"/>
+                      <a:tailEnd type="none" w="med" len="med"/>
+                    </a:lnB>
+                    <a:solidFill>
+                      <a:srgbClr val="FFFFFF"/>
+                    </a:solidFill>
+                  </a:tcPr>
+                </a:tc>
+                <a:tc>
+                  <a:txBody>
+                    <a:bodyPr/>
+                    <a:lstStyle/>
+                    <a:p>
+                      <a:pPr algn="ctr" indent="0" marL="0">
+                        <a:buNone/>
+                      </a:pPr>
+                      <a:r>
+                        <a:rPr lang="en-US" sz="800" dirty="0">
+                          <a:solidFill>
+                            <a:srgbClr val="000000"/>
+                          </a:solidFill>
+                          <a:latin typeface="Arial" pitchFamily="34" charset="0"/>
+                          <a:ea typeface="Arial" pitchFamily="34" charset="-122"/>
+                          <a:cs typeface="Arial" pitchFamily="34" charset="-120"/>
+                        </a:rPr>
+                        <a:t>-</a:t>
+                      </a:r>
+                      <a:endParaRPr lang="en-US" sz="800" dirty="0">
+                        <a:latin typeface="Arial" charset="0"/>
+                        <a:ea typeface="Arial" charset="0"/>
+                        <a:cs typeface="Arial" charset="0"/>
+                      </a:endParaRPr>
+                    </a:p>
+                  </a:txBody>
+                  <a:tcPr marL="91440" marR="91440" marT="45720" marB="45720">
+                    <a:lnL w="6350" cap="flat" cmpd="sng" algn="ctr">
+                      <a:solidFill>
+                        <a:srgbClr val="CCCCCC"/>
+                      </a:solidFill>
+                      <a:prstDash val="solid"/>
+                      <a:round/>
+                      <a:headEnd type="none" w="med" len="med"/>
+                      <a:tailEnd type="none" w="med" len="med"/>
+                    </a:lnL>
+                    <a:lnR w="6350" cap="flat" cmpd="sng" algn="ctr">
+                      <a:solidFill>
+                        <a:srgbClr val="CCCCCC"/>
+                      </a:solidFill>
+                      <a:prstDash val="solid"/>
+                      <a:round/>
+                      <a:headEnd type="none" w="med" len="med"/>
+                      <a:tailEnd type="none" w="med" len="med"/>
+                    </a:lnR>
+                    <a:lnT w="6350" cap="flat" cmpd="sng" algn="ctr">
+                      <a:solidFill>
+                        <a:srgbClr val="CCCCCC"/>
+                      </a:solidFill>
+                      <a:prstDash val="solid"/>
+                      <a:round/>
+                      <a:headEnd type="none" w="med" len="med"/>
+                      <a:tailEnd type="none" w="med" len="med"/>
+                    </a:lnT>
+                    <a:lnB w="6350" cap="flat" cmpd="sng" algn="ctr">
+                      <a:solidFill>
+                        <a:srgbClr val="CCCCCC"/>
+                      </a:solidFill>
+                      <a:prstDash val="solid"/>
+                      <a:round/>
+                      <a:headEnd type="none" w="med" len="med"/>
+                      <a:tailEnd type="none" w="med" len="med"/>
+                    </a:lnB>
+                    <a:solidFill>
+                      <a:srgbClr val="FFFFFF"/>
+                    </a:solidFill>
+                  </a:tcPr>
+                </a:tc>
+                <a:tc>
+                  <a:txBody>
+                    <a:bodyPr/>
+                    <a:lstStyle/>
+                    <a:p>
+                      <a:pPr algn="ctr" indent="0" marL="0">
+                        <a:buNone/>
+                      </a:pPr>
+                      <a:r>
+                        <a:rPr lang="en-US" sz="800" b="1" dirty="0">
+                          <a:solidFill>
+                            <a:srgbClr val="000000"/>
+                          </a:solidFill>
+                          <a:latin typeface="Arial" pitchFamily="34" charset="0"/>
+                          <a:ea typeface="Arial" pitchFamily="34" charset="-122"/>
+                          <a:cs typeface="Arial" pitchFamily="34" charset="-120"/>
+                        </a:rPr>
+                        <a:t>5</a:t>
+                      </a:r>
+                      <a:endParaRPr lang="en-US" sz="800" dirty="0">
+                        <a:latin typeface="Arial" charset="0"/>
+                        <a:ea typeface="Arial" charset="0"/>
+                        <a:cs typeface="Arial" charset="0"/>
+                      </a:endParaRPr>
+                    </a:p>
+                  </a:txBody>
+                  <a:tcPr marL="91440" marR="91440" marT="45720" marB="45720">
+                    <a:lnL w="6350" cap="flat" cmpd="sng" algn="ctr">
+                      <a:solidFill>
+                        <a:srgbClr val="CCCCCC"/>
+                      </a:solidFill>
+                      <a:prstDash val="solid"/>
+                      <a:round/>
+                      <a:headEnd type="none" w="med" len="med"/>
+                      <a:tailEnd type="none" w="med" len="med"/>
+                    </a:lnL>
+                    <a:lnR w="6350" cap="flat" cmpd="sng" algn="ctr">
+                      <a:solidFill>
+                        <a:srgbClr val="CCCCCC"/>
+                      </a:solidFill>
+                      <a:prstDash val="solid"/>
+                      <a:round/>
+                      <a:headEnd type="none" w="med" len="med"/>
+                      <a:tailEnd type="none" w="med" len="med"/>
+                    </a:lnR>
+                    <a:lnT w="6350" cap="flat" cmpd="sng" algn="ctr">
+                      <a:solidFill>
+                        <a:srgbClr val="CCCCCC"/>
+                      </a:solidFill>
+                      <a:prstDash val="solid"/>
+                      <a:round/>
+                      <a:headEnd type="none" w="med" len="med"/>
+                      <a:tailEnd type="none" w="med" len="med"/>
+                    </a:lnT>
+                    <a:lnB w="6350" cap="flat" cmpd="sng" algn="ctr">
+                      <a:solidFill>
+                        <a:srgbClr val="CCCCCC"/>
+                      </a:solidFill>
+                      <a:prstDash val="solid"/>
+                      <a:round/>
+                      <a:headEnd type="none" w="med" len="med"/>
+                      <a:tailEnd type="none" w="med" len="med"/>
+                    </a:lnB>
+                    <a:solidFill>
+                      <a:srgbClr val="FFFFFF"/>
+                    </a:solidFill>
+                  </a:tcPr>
+                </a:tc>
+                <a:tc>
+                  <a:txBody>
+                    <a:bodyPr/>
+                    <a:lstStyle/>
+                    <a:p>
+                      <a:pPr algn="ctr" indent="0" marL="0">
+                        <a:buNone/>
+                      </a:pPr>
+                      <a:r>
+                        <a:rPr lang="en-US" sz="800" b="1" dirty="0">
+                          <a:solidFill>
+                            <a:srgbClr val="333333"/>
+                          </a:solidFill>
+                          <a:latin typeface="Arial" pitchFamily="34" charset="0"/>
+                          <a:ea typeface="Arial" pitchFamily="34" charset="-122"/>
+                          <a:cs typeface="Arial" pitchFamily="34" charset="-120"/>
+                        </a:rPr>
+                        <a:t>0.00</a:t>
+                      </a:r>
+                      <a:endParaRPr lang="en-US" sz="800" dirty="0">
+                        <a:latin typeface="Arial" charset="0"/>
+                        <a:ea typeface="Arial" charset="0"/>
+                        <a:cs typeface="Arial" charset="0"/>
+                      </a:endParaRPr>
+                    </a:p>
+                  </a:txBody>
+                  <a:tcPr marL="91440" marR="91440" marT="45720" marB="45720">
+                    <a:lnL w="6350" cap="flat" cmpd="sng" algn="ctr">
+                      <a:solidFill>
+                        <a:srgbClr val="CCCCCC"/>
+                      </a:solidFill>
+                      <a:prstDash val="solid"/>
+                      <a:round/>
+                      <a:headEnd type="none" w="med" len="med"/>
+                      <a:tailEnd type="none" w="med" len="med"/>
+                    </a:lnL>
+                    <a:lnR w="6350" cap="flat" cmpd="sng" algn="ctr">
+                      <a:solidFill>
+                        <a:srgbClr val="CCCCCC"/>
+                      </a:solidFill>
+                      <a:prstDash val="solid"/>
+                      <a:round/>
+                      <a:headEnd type="none" w="med" len="med"/>
+                      <a:tailEnd type="none" w="med" len="med"/>
+                    </a:lnR>
+                    <a:lnT w="6350" cap="flat" cmpd="sng" algn="ctr">
+                      <a:solidFill>
+                        <a:srgbClr val="CCCCCC"/>
+                      </a:solidFill>
+                      <a:prstDash val="solid"/>
+                      <a:round/>
+                      <a:headEnd type="none" w="med" len="med"/>
+                      <a:tailEnd type="none" w="med" len="med"/>
+                    </a:lnT>
+                    <a:lnB w="6350" cap="flat" cmpd="sng" algn="ctr">
+                      <a:solidFill>
+                        <a:srgbClr val="CCCCCC"/>
+                      </a:solidFill>
+                      <a:prstDash val="solid"/>
+                      <a:round/>
+                      <a:headEnd type="none" w="med" len="med"/>
+                      <a:tailEnd type="none" w="med" len="med"/>
+                    </a:lnB>
+                    <a:solidFill>
+                      <a:srgbClr val="FFFFFF"/>
+                    </a:solidFill>
+                  </a:tcPr>
+                </a:tc>
+              </a:tr>
+              <a:tr h="246185">
+                <a:tc>
+                  <a:txBody>
+                    <a:bodyPr/>
+                    <a:lstStyle/>
+                    <a:p>
+                      <a:pPr algn="ctr" indent="0" marL="0">
+                        <a:buNone/>
+                      </a:pPr>
+                      <a:r>
+                        <a:rPr lang="en-US" sz="700" dirty="0">
+                          <a:solidFill>
+                            <a:srgbClr val="000000"/>
+                          </a:solidFill>
+                          <a:latin typeface="Arial" pitchFamily="34" charset="0"/>
+                          <a:ea typeface="Arial" pitchFamily="34" charset="-122"/>
+                          <a:cs typeface="Arial" pitchFamily="34" charset="-120"/>
+                        </a:rPr>
+                        <a:t>変なH.東京羽田</a:t>
+                      </a:r>
+                      <a:endParaRPr lang="en-US" sz="700" dirty="0">
+                        <a:latin typeface="Arial" charset="0"/>
+                        <a:ea typeface="Arial" charset="0"/>
+                        <a:cs typeface="Arial" charset="0"/>
+                      </a:endParaRPr>
+                    </a:p>
+                  </a:txBody>
+                  <a:tcPr marL="91440" marR="91440" marT="45720" marB="45720">
+                    <a:lnL w="6350" cap="flat" cmpd="sng" algn="ctr">
+                      <a:solidFill>
+                        <a:srgbClr val="CCCCCC"/>
+                      </a:solidFill>
+                      <a:prstDash val="solid"/>
+                      <a:round/>
+                      <a:headEnd type="none" w="med" len="med"/>
+                      <a:tailEnd type="none" w="med" len="med"/>
+                    </a:lnL>
+                    <a:lnR w="6350" cap="flat" cmpd="sng" algn="ctr">
+                      <a:solidFill>
+                        <a:srgbClr val="CCCCCC"/>
+                      </a:solidFill>
+                      <a:prstDash val="solid"/>
+                      <a:round/>
+                      <a:headEnd type="none" w="med" len="med"/>
+                      <a:tailEnd type="none" w="med" len="med"/>
+                    </a:lnR>
+                    <a:lnT w="6350" cap="flat" cmpd="sng" algn="ctr">
+                      <a:solidFill>
+                        <a:srgbClr val="CCCCCC"/>
+                      </a:solidFill>
+                      <a:prstDash val="solid"/>
+                      <a:round/>
+                      <a:headEnd type="none" w="med" len="med"/>
+                      <a:tailEnd type="none" w="med" len="med"/>
+                    </a:lnT>
+                    <a:lnB w="6350" cap="flat" cmpd="sng" algn="ctr">
+                      <a:solidFill>
+                        <a:srgbClr val="CCCCCC"/>
+                      </a:solidFill>
+                      <a:prstDash val="solid"/>
+                      <a:round/>
+                      <a:headEnd type="none" w="med" len="med"/>
+                      <a:tailEnd type="none" w="med" len="med"/>
+                    </a:lnB>
+                    <a:solidFill>
+                      <a:srgbClr val="F5F7FA"/>
+                    </a:solidFill>
+                  </a:tcPr>
+                </a:tc>
+                <a:tc>
+                  <a:txBody>
+                    <a:bodyPr/>
+                    <a:lstStyle/>
+                    <a:p>
+                      <a:pPr algn="ctr" indent="0" marL="0">
+                        <a:buNone/>
+                      </a:pPr>
+                      <a:r>
+                        <a:rPr lang="en-US" sz="800" dirty="0">
+                          <a:solidFill>
+                            <a:srgbClr val="000000"/>
+                          </a:solidFill>
+                          <a:latin typeface="Arial" pitchFamily="34" charset="0"/>
+                          <a:ea typeface="Arial" pitchFamily="34" charset="-122"/>
+                          <a:cs typeface="Arial" pitchFamily="34" charset="-120"/>
+                        </a:rPr>
+                        <a:t>32</a:t>
+                      </a:r>
+                      <a:endParaRPr lang="en-US" sz="800" dirty="0">
+                        <a:latin typeface="Arial" charset="0"/>
+                        <a:ea typeface="Arial" charset="0"/>
+                        <a:cs typeface="Arial" charset="0"/>
+                      </a:endParaRPr>
+                    </a:p>
+                  </a:txBody>
+                  <a:tcPr marL="91440" marR="91440" marT="45720" marB="45720">
+                    <a:lnL w="6350" cap="flat" cmpd="sng" algn="ctr">
+                      <a:solidFill>
+                        <a:srgbClr val="CCCCCC"/>
+                      </a:solidFill>
+                      <a:prstDash val="solid"/>
+                      <a:round/>
+                      <a:headEnd type="none" w="med" len="med"/>
+                      <a:tailEnd type="none" w="med" len="med"/>
+                    </a:lnL>
+                    <a:lnR w="6350" cap="flat" cmpd="sng" algn="ctr">
+                      <a:solidFill>
+                        <a:srgbClr val="CCCCCC"/>
+                      </a:solidFill>
+                      <a:prstDash val="solid"/>
+                      <a:round/>
+                      <a:headEnd type="none" w="med" len="med"/>
+                      <a:tailEnd type="none" w="med" len="med"/>
+                    </a:lnR>
+                    <a:lnT w="6350" cap="flat" cmpd="sng" algn="ctr">
+                      <a:solidFill>
+                        <a:srgbClr val="CCCCCC"/>
+                      </a:solidFill>
+                      <a:prstDash val="solid"/>
+                      <a:round/>
+                      <a:headEnd type="none" w="med" len="med"/>
+                      <a:tailEnd type="none" w="med" len="med"/>
+                    </a:lnT>
+                    <a:lnB w="6350" cap="flat" cmpd="sng" algn="ctr">
+                      <a:solidFill>
+                        <a:srgbClr val="CCCCCC"/>
+                      </a:solidFill>
+                      <a:prstDash val="solid"/>
+                      <a:round/>
+                      <a:headEnd type="none" w="med" len="med"/>
+                      <a:tailEnd type="none" w="med" len="med"/>
+                    </a:lnB>
+                    <a:solidFill>
+                      <a:srgbClr val="F5F7FA"/>
+                    </a:solidFill>
+                  </a:tcPr>
+                </a:tc>
+                <a:tc>
+                  <a:txBody>
+                    <a:bodyPr/>
+                    <a:lstStyle/>
+                    <a:p>
+                      <a:pPr algn="ctr" indent="0" marL="0">
+                        <a:buNone/>
+                      </a:pPr>
+                      <a:r>
+                        <a:rPr lang="en-US" sz="800" dirty="0">
+                          <a:solidFill>
+                            <a:srgbClr val="000000"/>
+                          </a:solidFill>
+                          <a:latin typeface="Arial" pitchFamily="34" charset="0"/>
+                          <a:ea typeface="Arial" pitchFamily="34" charset="-122"/>
+                          <a:cs typeface="Arial" pitchFamily="34" charset="-120"/>
+                        </a:rPr>
+                        <a:t>26</a:t>
+                      </a:r>
+                      <a:endParaRPr lang="en-US" sz="800" dirty="0">
+                        <a:latin typeface="Arial" charset="0"/>
+                        <a:ea typeface="Arial" charset="0"/>
+                        <a:cs typeface="Arial" charset="0"/>
+                      </a:endParaRPr>
+                    </a:p>
+                  </a:txBody>
+                  <a:tcPr marL="91440" marR="91440" marT="45720" marB="45720">
+                    <a:lnL w="6350" cap="flat" cmpd="sng" algn="ctr">
+                      <a:solidFill>
+                        <a:srgbClr val="CCCCCC"/>
+                      </a:solidFill>
+                      <a:prstDash val="solid"/>
+                      <a:round/>
+                      <a:headEnd type="none" w="med" len="med"/>
+                      <a:tailEnd type="none" w="med" len="med"/>
+                    </a:lnL>
+                    <a:lnR w="6350" cap="flat" cmpd="sng" algn="ctr">
+                      <a:solidFill>
+                        <a:srgbClr val="CCCCCC"/>
+                      </a:solidFill>
+                      <a:prstDash val="solid"/>
+                      <a:round/>
+                      <a:headEnd type="none" w="med" len="med"/>
+                      <a:tailEnd type="none" w="med" len="med"/>
+                    </a:lnR>
+                    <a:lnT w="6350" cap="flat" cmpd="sng" algn="ctr">
+                      <a:solidFill>
+                        <a:srgbClr val="CCCCCC"/>
+                      </a:solidFill>
+                      <a:prstDash val="solid"/>
+                      <a:round/>
+                      <a:headEnd type="none" w="med" len="med"/>
+                      <a:tailEnd type="none" w="med" len="med"/>
+                    </a:lnT>
+                    <a:lnB w="6350" cap="flat" cmpd="sng" algn="ctr">
+                      <a:solidFill>
+                        <a:srgbClr val="CCCCCC"/>
+                      </a:solidFill>
+                      <a:prstDash val="solid"/>
+                      <a:round/>
+                      <a:headEnd type="none" w="med" len="med"/>
+                      <a:tailEnd type="none" w="med" len="med"/>
+                    </a:lnB>
+                    <a:solidFill>
+                      <a:srgbClr val="F5F7FA"/>
+                    </a:solidFill>
+                  </a:tcPr>
+                </a:tc>
+                <a:tc>
+                  <a:txBody>
+                    <a:bodyPr/>
+                    <a:lstStyle/>
+                    <a:p>
+                      <a:pPr algn="ctr" indent="0" marL="0">
+                        <a:buNone/>
+                      </a:pPr>
+                      <a:r>
+                        <a:rPr lang="en-US" sz="800" b="1" dirty="0">
+                          <a:solidFill>
+                            <a:srgbClr val="000000"/>
+                          </a:solidFill>
+                          <a:latin typeface="Arial" pitchFamily="34" charset="0"/>
+                          <a:ea typeface="Arial" pitchFamily="34" charset="-122"/>
+                          <a:cs typeface="Arial" pitchFamily="34" charset="-120"/>
+                        </a:rPr>
                         <a:t>5</a:t>
                       </a:r>
                       <a:endParaRPr lang="en-US" sz="800" dirty="0">
@@ -4823,7 +6191,7 @@
                           <a:ea typeface="Arial" pitchFamily="34" charset="-122"/>
                           <a:cs typeface="Arial" pitchFamily="34" charset="-120"/>
                         </a:rPr>
-                        <a:t>0.42</a:t>
+                        <a:t>0.19</a:t>
                       </a:r>
                       <a:endParaRPr lang="en-US" sz="800" dirty="0">
                         <a:latin typeface="Arial" charset="0"/>
@@ -4961,7 +6329,7 @@
                           <a:ea typeface="Arial" pitchFamily="34" charset="-122"/>
                           <a:cs typeface="Arial" pitchFamily="34" charset="-120"/>
                         </a:rPr>
-                        <a:t>28</a:t>
+                        <a:t>25</a:t>
                       </a:r>
                       <a:endParaRPr lang="en-US" sz="800" dirty="0">
                         <a:latin typeface="Arial" charset="0"/>
@@ -5029,7 +6397,7 @@
                           <a:ea typeface="Arial" pitchFamily="34" charset="-122"/>
                           <a:cs typeface="Arial" pitchFamily="34" charset="-120"/>
                         </a:rPr>
-                        <a:t>19</a:t>
+                        <a:t>18</a:t>
                       </a:r>
                       <a:endParaRPr lang="en-US" sz="800" dirty="0">
                         <a:latin typeface="Arial" charset="0"/>
@@ -5097,7 +6465,7 @@
                           <a:ea typeface="Arial" pitchFamily="34" charset="-122"/>
                           <a:cs typeface="Arial" pitchFamily="34" charset="-120"/>
                         </a:rPr>
-                        <a:t>4</a:t>
+                        <a:t>5</a:t>
                       </a:r>
                       <a:endParaRPr lang="en-US" sz="800" dirty="0">
                         <a:latin typeface="Arial" charset="0"/>
@@ -5165,1375 +6533,7 @@
                           <a:ea typeface="Arial" pitchFamily="34" charset="-122"/>
                           <a:cs typeface="Arial" pitchFamily="34" charset="-120"/>
                         </a:rPr>
-                        <a:t>0.21</a:t>
-                      </a:r>
-                      <a:endParaRPr lang="en-US" sz="800" dirty="0">
-                        <a:latin typeface="Arial" charset="0"/>
-                        <a:ea typeface="Arial" charset="0"/>
-                        <a:cs typeface="Arial" charset="0"/>
-                      </a:endParaRPr>
-                    </a:p>
-                  </a:txBody>
-                  <a:tcPr marL="91440" marR="91440" marT="45720" marB="45720">
-                    <a:lnL w="6350" cap="flat" cmpd="sng" algn="ctr">
-                      <a:solidFill>
-                        <a:srgbClr val="CCCCCC"/>
-                      </a:solidFill>
-                      <a:prstDash val="solid"/>
-                      <a:round/>
-                      <a:headEnd type="none" w="med" len="med"/>
-                      <a:tailEnd type="none" w="med" len="med"/>
-                    </a:lnL>
-                    <a:lnR w="6350" cap="flat" cmpd="sng" algn="ctr">
-                      <a:solidFill>
-                        <a:srgbClr val="CCCCCC"/>
-                      </a:solidFill>
-                      <a:prstDash val="solid"/>
-                      <a:round/>
-                      <a:headEnd type="none" w="med" len="med"/>
-                      <a:tailEnd type="none" w="med" len="med"/>
-                    </a:lnR>
-                    <a:lnT w="6350" cap="flat" cmpd="sng" algn="ctr">
-                      <a:solidFill>
-                        <a:srgbClr val="CCCCCC"/>
-                      </a:solidFill>
-                      <a:prstDash val="solid"/>
-                      <a:round/>
-                      <a:headEnd type="none" w="med" len="med"/>
-                      <a:tailEnd type="none" w="med" len="med"/>
-                    </a:lnT>
-                    <a:lnB w="6350" cap="flat" cmpd="sng" algn="ctr">
-                      <a:solidFill>
-                        <a:srgbClr val="CCCCCC"/>
-                      </a:solidFill>
-                      <a:prstDash val="solid"/>
-                      <a:round/>
-                      <a:headEnd type="none" w="med" len="med"/>
-                      <a:tailEnd type="none" w="med" len="med"/>
-                    </a:lnB>
-                    <a:solidFill>
-                      <a:srgbClr val="FFFFFF"/>
-                    </a:solidFill>
-                  </a:tcPr>
-                </a:tc>
-              </a:tr>
-              <a:tr h="246185">
-                <a:tc>
-                  <a:txBody>
-                    <a:bodyPr/>
-                    <a:lstStyle/>
-                    <a:p>
-                      <a:pPr algn="ctr" indent="0" marL="0">
-                        <a:buNone/>
-                      </a:pPr>
-                      <a:r>
-                        <a:rPr lang="en-US" sz="700" dirty="0">
-                          <a:solidFill>
-                            <a:srgbClr val="000000"/>
-                          </a:solidFill>
-                          <a:latin typeface="Arial" pitchFamily="34" charset="0"/>
-                          <a:ea typeface="Arial" pitchFamily="34" charset="-122"/>
-                          <a:cs typeface="Arial" pitchFamily="34" charset="-120"/>
-                        </a:rPr>
-                        <a:t>コンフォートH.ERA東神田</a:t>
-                      </a:r>
-                      <a:endParaRPr lang="en-US" sz="700" dirty="0">
-                        <a:latin typeface="Arial" charset="0"/>
-                        <a:ea typeface="Arial" charset="0"/>
-                        <a:cs typeface="Arial" charset="0"/>
-                      </a:endParaRPr>
-                    </a:p>
-                  </a:txBody>
-                  <a:tcPr marL="91440" marR="91440" marT="45720" marB="45720">
-                    <a:lnL w="6350" cap="flat" cmpd="sng" algn="ctr">
-                      <a:solidFill>
-                        <a:srgbClr val="CCCCCC"/>
-                      </a:solidFill>
-                      <a:prstDash val="solid"/>
-                      <a:round/>
-                      <a:headEnd type="none" w="med" len="med"/>
-                      <a:tailEnd type="none" w="med" len="med"/>
-                    </a:lnL>
-                    <a:lnR w="6350" cap="flat" cmpd="sng" algn="ctr">
-                      <a:solidFill>
-                        <a:srgbClr val="CCCCCC"/>
-                      </a:solidFill>
-                      <a:prstDash val="solid"/>
-                      <a:round/>
-                      <a:headEnd type="none" w="med" len="med"/>
-                      <a:tailEnd type="none" w="med" len="med"/>
-                    </a:lnR>
-                    <a:lnT w="6350" cap="flat" cmpd="sng" algn="ctr">
-                      <a:solidFill>
-                        <a:srgbClr val="CCCCCC"/>
-                      </a:solidFill>
-                      <a:prstDash val="solid"/>
-                      <a:round/>
-                      <a:headEnd type="none" w="med" len="med"/>
-                      <a:tailEnd type="none" w="med" len="med"/>
-                    </a:lnT>
-                    <a:lnB w="6350" cap="flat" cmpd="sng" algn="ctr">
-                      <a:solidFill>
-                        <a:srgbClr val="CCCCCC"/>
-                      </a:solidFill>
-                      <a:prstDash val="solid"/>
-                      <a:round/>
-                      <a:headEnd type="none" w="med" len="med"/>
-                      <a:tailEnd type="none" w="med" len="med"/>
-                    </a:lnB>
-                    <a:solidFill>
-                      <a:srgbClr val="F5F7FA"/>
-                    </a:solidFill>
-                  </a:tcPr>
-                </a:tc>
-                <a:tc>
-                  <a:txBody>
-                    <a:bodyPr/>
-                    <a:lstStyle/>
-                    <a:p>
-                      <a:pPr algn="ctr" indent="0" marL="0">
-                        <a:buNone/>
-                      </a:pPr>
-                      <a:r>
-                        <a:rPr lang="en-US" sz="800" dirty="0">
-                          <a:solidFill>
-                            <a:srgbClr val="000000"/>
-                          </a:solidFill>
-                          <a:latin typeface="Arial" pitchFamily="34" charset="0"/>
-                          <a:ea typeface="Arial" pitchFamily="34" charset="-122"/>
-                          <a:cs typeface="Arial" pitchFamily="34" charset="-120"/>
-                        </a:rPr>
-                        <a:t>21</a:t>
-                      </a:r>
-                      <a:endParaRPr lang="en-US" sz="800" dirty="0">
-                        <a:latin typeface="Arial" charset="0"/>
-                        <a:ea typeface="Arial" charset="0"/>
-                        <a:cs typeface="Arial" charset="0"/>
-                      </a:endParaRPr>
-                    </a:p>
-                  </a:txBody>
-                  <a:tcPr marL="91440" marR="91440" marT="45720" marB="45720">
-                    <a:lnL w="6350" cap="flat" cmpd="sng" algn="ctr">
-                      <a:solidFill>
-                        <a:srgbClr val="CCCCCC"/>
-                      </a:solidFill>
-                      <a:prstDash val="solid"/>
-                      <a:round/>
-                      <a:headEnd type="none" w="med" len="med"/>
-                      <a:tailEnd type="none" w="med" len="med"/>
-                    </a:lnL>
-                    <a:lnR w="6350" cap="flat" cmpd="sng" algn="ctr">
-                      <a:solidFill>
-                        <a:srgbClr val="CCCCCC"/>
-                      </a:solidFill>
-                      <a:prstDash val="solid"/>
-                      <a:round/>
-                      <a:headEnd type="none" w="med" len="med"/>
-                      <a:tailEnd type="none" w="med" len="med"/>
-                    </a:lnR>
-                    <a:lnT w="6350" cap="flat" cmpd="sng" algn="ctr">
-                      <a:solidFill>
-                        <a:srgbClr val="CCCCCC"/>
-                      </a:solidFill>
-                      <a:prstDash val="solid"/>
-                      <a:round/>
-                      <a:headEnd type="none" w="med" len="med"/>
-                      <a:tailEnd type="none" w="med" len="med"/>
-                    </a:lnT>
-                    <a:lnB w="6350" cap="flat" cmpd="sng" algn="ctr">
-                      <a:solidFill>
-                        <a:srgbClr val="CCCCCC"/>
-                      </a:solidFill>
-                      <a:prstDash val="solid"/>
-                      <a:round/>
-                      <a:headEnd type="none" w="med" len="med"/>
-                      <a:tailEnd type="none" w="med" len="med"/>
-                    </a:lnB>
-                    <a:solidFill>
-                      <a:srgbClr val="F5F7FA"/>
-                    </a:solidFill>
-                  </a:tcPr>
-                </a:tc>
-                <a:tc>
-                  <a:txBody>
-                    <a:bodyPr/>
-                    <a:lstStyle/>
-                    <a:p>
-                      <a:pPr algn="ctr" indent="0" marL="0">
-                        <a:buNone/>
-                      </a:pPr>
-                      <a:r>
-                        <a:rPr lang="en-US" sz="800" dirty="0">
-                          <a:solidFill>
-                            <a:srgbClr val="000000"/>
-                          </a:solidFill>
-                          <a:latin typeface="Arial" pitchFamily="34" charset="0"/>
-                          <a:ea typeface="Arial" pitchFamily="34" charset="-122"/>
-                          <a:cs typeface="Arial" pitchFamily="34" charset="-120"/>
-                        </a:rPr>
-                        <a:t>19</a:t>
-                      </a:r>
-                      <a:endParaRPr lang="en-US" sz="800" dirty="0">
-                        <a:latin typeface="Arial" charset="0"/>
-                        <a:ea typeface="Arial" charset="0"/>
-                        <a:cs typeface="Arial" charset="0"/>
-                      </a:endParaRPr>
-                    </a:p>
-                  </a:txBody>
-                  <a:tcPr marL="91440" marR="91440" marT="45720" marB="45720">
-                    <a:lnL w="6350" cap="flat" cmpd="sng" algn="ctr">
-                      <a:solidFill>
-                        <a:srgbClr val="CCCCCC"/>
-                      </a:solidFill>
-                      <a:prstDash val="solid"/>
-                      <a:round/>
-                      <a:headEnd type="none" w="med" len="med"/>
-                      <a:tailEnd type="none" w="med" len="med"/>
-                    </a:lnL>
-                    <a:lnR w="6350" cap="flat" cmpd="sng" algn="ctr">
-                      <a:solidFill>
-                        <a:srgbClr val="CCCCCC"/>
-                      </a:solidFill>
-                      <a:prstDash val="solid"/>
-                      <a:round/>
-                      <a:headEnd type="none" w="med" len="med"/>
-                      <a:tailEnd type="none" w="med" len="med"/>
-                    </a:lnR>
-                    <a:lnT w="6350" cap="flat" cmpd="sng" algn="ctr">
-                      <a:solidFill>
-                        <a:srgbClr val="CCCCCC"/>
-                      </a:solidFill>
-                      <a:prstDash val="solid"/>
-                      <a:round/>
-                      <a:headEnd type="none" w="med" len="med"/>
-                      <a:tailEnd type="none" w="med" len="med"/>
-                    </a:lnT>
-                    <a:lnB w="6350" cap="flat" cmpd="sng" algn="ctr">
-                      <a:solidFill>
-                        <a:srgbClr val="CCCCCC"/>
-                      </a:solidFill>
-                      <a:prstDash val="solid"/>
-                      <a:round/>
-                      <a:headEnd type="none" w="med" len="med"/>
-                      <a:tailEnd type="none" w="med" len="med"/>
-                    </a:lnB>
-                    <a:solidFill>
-                      <a:srgbClr val="F5F7FA"/>
-                    </a:solidFill>
-                  </a:tcPr>
-                </a:tc>
-                <a:tc>
-                  <a:txBody>
-                    <a:bodyPr/>
-                    <a:lstStyle/>
-                    <a:p>
-                      <a:pPr algn="ctr" indent="0" marL="0">
-                        <a:buNone/>
-                      </a:pPr>
-                      <a:r>
-                        <a:rPr lang="en-US" sz="800" b="1" dirty="0">
-                          <a:solidFill>
-                            <a:srgbClr val="000000"/>
-                          </a:solidFill>
-                          <a:latin typeface="Arial" pitchFamily="34" charset="0"/>
-                          <a:ea typeface="Arial" pitchFamily="34" charset="-122"/>
-                          <a:cs typeface="Arial" pitchFamily="34" charset="-120"/>
-                        </a:rPr>
-                        <a:t>4</a:t>
-                      </a:r>
-                      <a:endParaRPr lang="en-US" sz="800" dirty="0">
-                        <a:latin typeface="Arial" charset="0"/>
-                        <a:ea typeface="Arial" charset="0"/>
-                        <a:cs typeface="Arial" charset="0"/>
-                      </a:endParaRPr>
-                    </a:p>
-                  </a:txBody>
-                  <a:tcPr marL="91440" marR="91440" marT="45720" marB="45720">
-                    <a:lnL w="6350" cap="flat" cmpd="sng" algn="ctr">
-                      <a:solidFill>
-                        <a:srgbClr val="CCCCCC"/>
-                      </a:solidFill>
-                      <a:prstDash val="solid"/>
-                      <a:round/>
-                      <a:headEnd type="none" w="med" len="med"/>
-                      <a:tailEnd type="none" w="med" len="med"/>
-                    </a:lnL>
-                    <a:lnR w="6350" cap="flat" cmpd="sng" algn="ctr">
-                      <a:solidFill>
-                        <a:srgbClr val="CCCCCC"/>
-                      </a:solidFill>
-                      <a:prstDash val="solid"/>
-                      <a:round/>
-                      <a:headEnd type="none" w="med" len="med"/>
-                      <a:tailEnd type="none" w="med" len="med"/>
-                    </a:lnR>
-                    <a:lnT w="6350" cap="flat" cmpd="sng" algn="ctr">
-                      <a:solidFill>
-                        <a:srgbClr val="CCCCCC"/>
-                      </a:solidFill>
-                      <a:prstDash val="solid"/>
-                      <a:round/>
-                      <a:headEnd type="none" w="med" len="med"/>
-                      <a:tailEnd type="none" w="med" len="med"/>
-                    </a:lnT>
-                    <a:lnB w="6350" cap="flat" cmpd="sng" algn="ctr">
-                      <a:solidFill>
-                        <a:srgbClr val="CCCCCC"/>
-                      </a:solidFill>
-                      <a:prstDash val="solid"/>
-                      <a:round/>
-                      <a:headEnd type="none" w="med" len="med"/>
-                      <a:tailEnd type="none" w="med" len="med"/>
-                    </a:lnB>
-                    <a:solidFill>
-                      <a:srgbClr val="F5F7FA"/>
-                    </a:solidFill>
-                  </a:tcPr>
-                </a:tc>
-                <a:tc>
-                  <a:txBody>
-                    <a:bodyPr/>
-                    <a:lstStyle/>
-                    <a:p>
-                      <a:pPr algn="ctr" indent="0" marL="0">
-                        <a:buNone/>
-                      </a:pPr>
-                      <a:r>
-                        <a:rPr lang="en-US" sz="800" b="1" dirty="0">
-                          <a:solidFill>
-                            <a:srgbClr val="333333"/>
-                          </a:solidFill>
-                          <a:latin typeface="Arial" pitchFamily="34" charset="0"/>
-                          <a:ea typeface="Arial" pitchFamily="34" charset="-122"/>
-                          <a:cs typeface="Arial" pitchFamily="34" charset="-120"/>
-                        </a:rPr>
-                        <a:t>0.21</a:t>
-                      </a:r>
-                      <a:endParaRPr lang="en-US" sz="800" dirty="0">
-                        <a:latin typeface="Arial" charset="0"/>
-                        <a:ea typeface="Arial" charset="0"/>
-                        <a:cs typeface="Arial" charset="0"/>
-                      </a:endParaRPr>
-                    </a:p>
-                  </a:txBody>
-                  <a:tcPr marL="91440" marR="91440" marT="45720" marB="45720">
-                    <a:lnL w="6350" cap="flat" cmpd="sng" algn="ctr">
-                      <a:solidFill>
-                        <a:srgbClr val="CCCCCC"/>
-                      </a:solidFill>
-                      <a:prstDash val="solid"/>
-                      <a:round/>
-                      <a:headEnd type="none" w="med" len="med"/>
-                      <a:tailEnd type="none" w="med" len="med"/>
-                    </a:lnL>
-                    <a:lnR w="6350" cap="flat" cmpd="sng" algn="ctr">
-                      <a:solidFill>
-                        <a:srgbClr val="CCCCCC"/>
-                      </a:solidFill>
-                      <a:prstDash val="solid"/>
-                      <a:round/>
-                      <a:headEnd type="none" w="med" len="med"/>
-                      <a:tailEnd type="none" w="med" len="med"/>
-                    </a:lnR>
-                    <a:lnT w="6350" cap="flat" cmpd="sng" algn="ctr">
-                      <a:solidFill>
-                        <a:srgbClr val="CCCCCC"/>
-                      </a:solidFill>
-                      <a:prstDash val="solid"/>
-                      <a:round/>
-                      <a:headEnd type="none" w="med" len="med"/>
-                      <a:tailEnd type="none" w="med" len="med"/>
-                    </a:lnT>
-                    <a:lnB w="6350" cap="flat" cmpd="sng" algn="ctr">
-                      <a:solidFill>
-                        <a:srgbClr val="CCCCCC"/>
-                      </a:solidFill>
-                      <a:prstDash val="solid"/>
-                      <a:round/>
-                      <a:headEnd type="none" w="med" len="med"/>
-                      <a:tailEnd type="none" w="med" len="med"/>
-                    </a:lnB>
-                    <a:solidFill>
-                      <a:srgbClr val="F5F7FA"/>
-                    </a:solidFill>
-                  </a:tcPr>
-                </a:tc>
-              </a:tr>
-              <a:tr h="246185">
-                <a:tc>
-                  <a:txBody>
-                    <a:bodyPr/>
-                    <a:lstStyle/>
-                    <a:p>
-                      <a:pPr algn="ctr" indent="0" marL="0">
-                        <a:buNone/>
-                      </a:pPr>
-                      <a:r>
-                        <a:rPr lang="en-US" sz="700" dirty="0">
-                          <a:solidFill>
-                            <a:srgbClr val="000000"/>
-                          </a:solidFill>
-                          <a:latin typeface="Arial" pitchFamily="34" charset="0"/>
-                          <a:ea typeface="Arial" pitchFamily="34" charset="-122"/>
-                          <a:cs typeface="Arial" pitchFamily="34" charset="-120"/>
-                        </a:rPr>
-                        <a:t>第一イン池袋</a:t>
-                      </a:r>
-                      <a:endParaRPr lang="en-US" sz="700" dirty="0">
-                        <a:latin typeface="Arial" charset="0"/>
-                        <a:ea typeface="Arial" charset="0"/>
-                        <a:cs typeface="Arial" charset="0"/>
-                      </a:endParaRPr>
-                    </a:p>
-                  </a:txBody>
-                  <a:tcPr marL="91440" marR="91440" marT="45720" marB="45720">
-                    <a:lnL w="6350" cap="flat" cmpd="sng" algn="ctr">
-                      <a:solidFill>
-                        <a:srgbClr val="CCCCCC"/>
-                      </a:solidFill>
-                      <a:prstDash val="solid"/>
-                      <a:round/>
-                      <a:headEnd type="none" w="med" len="med"/>
-                      <a:tailEnd type="none" w="med" len="med"/>
-                    </a:lnL>
-                    <a:lnR w="6350" cap="flat" cmpd="sng" algn="ctr">
-                      <a:solidFill>
-                        <a:srgbClr val="CCCCCC"/>
-                      </a:solidFill>
-                      <a:prstDash val="solid"/>
-                      <a:round/>
-                      <a:headEnd type="none" w="med" len="med"/>
-                      <a:tailEnd type="none" w="med" len="med"/>
-                    </a:lnR>
-                    <a:lnT w="6350" cap="flat" cmpd="sng" algn="ctr">
-                      <a:solidFill>
-                        <a:srgbClr val="CCCCCC"/>
-                      </a:solidFill>
-                      <a:prstDash val="solid"/>
-                      <a:round/>
-                      <a:headEnd type="none" w="med" len="med"/>
-                      <a:tailEnd type="none" w="med" len="med"/>
-                    </a:lnT>
-                    <a:lnB w="6350" cap="flat" cmpd="sng" algn="ctr">
-                      <a:solidFill>
-                        <a:srgbClr val="CCCCCC"/>
-                      </a:solidFill>
-                      <a:prstDash val="solid"/>
-                      <a:round/>
-                      <a:headEnd type="none" w="med" len="med"/>
-                      <a:tailEnd type="none" w="med" len="med"/>
-                    </a:lnB>
-                    <a:solidFill>
-                      <a:srgbClr val="FFFFFF"/>
-                    </a:solidFill>
-                  </a:tcPr>
-                </a:tc>
-                <a:tc>
-                  <a:txBody>
-                    <a:bodyPr/>
-                    <a:lstStyle/>
-                    <a:p>
-                      <a:pPr algn="ctr" indent="0" marL="0">
-                        <a:buNone/>
-                      </a:pPr>
-                      <a:r>
-                        <a:rPr lang="en-US" sz="800" dirty="0">
-                          <a:solidFill>
-                            <a:srgbClr val="000000"/>
-                          </a:solidFill>
-                          <a:latin typeface="Arial" pitchFamily="34" charset="0"/>
-                          <a:ea typeface="Arial" pitchFamily="34" charset="-122"/>
-                          <a:cs typeface="Arial" pitchFamily="34" charset="-120"/>
-                        </a:rPr>
-                        <a:t>16</a:t>
-                      </a:r>
-                      <a:endParaRPr lang="en-US" sz="800" dirty="0">
-                        <a:latin typeface="Arial" charset="0"/>
-                        <a:ea typeface="Arial" charset="0"/>
-                        <a:cs typeface="Arial" charset="0"/>
-                      </a:endParaRPr>
-                    </a:p>
-                  </a:txBody>
-                  <a:tcPr marL="91440" marR="91440" marT="45720" marB="45720">
-                    <a:lnL w="6350" cap="flat" cmpd="sng" algn="ctr">
-                      <a:solidFill>
-                        <a:srgbClr val="CCCCCC"/>
-                      </a:solidFill>
-                      <a:prstDash val="solid"/>
-                      <a:round/>
-                      <a:headEnd type="none" w="med" len="med"/>
-                      <a:tailEnd type="none" w="med" len="med"/>
-                    </a:lnL>
-                    <a:lnR w="6350" cap="flat" cmpd="sng" algn="ctr">
-                      <a:solidFill>
-                        <a:srgbClr val="CCCCCC"/>
-                      </a:solidFill>
-                      <a:prstDash val="solid"/>
-                      <a:round/>
-                      <a:headEnd type="none" w="med" len="med"/>
-                      <a:tailEnd type="none" w="med" len="med"/>
-                    </a:lnR>
-                    <a:lnT w="6350" cap="flat" cmpd="sng" algn="ctr">
-                      <a:solidFill>
-                        <a:srgbClr val="CCCCCC"/>
-                      </a:solidFill>
-                      <a:prstDash val="solid"/>
-                      <a:round/>
-                      <a:headEnd type="none" w="med" len="med"/>
-                      <a:tailEnd type="none" w="med" len="med"/>
-                    </a:lnT>
-                    <a:lnB w="6350" cap="flat" cmpd="sng" algn="ctr">
-                      <a:solidFill>
-                        <a:srgbClr val="CCCCCC"/>
-                      </a:solidFill>
-                      <a:prstDash val="solid"/>
-                      <a:round/>
-                      <a:headEnd type="none" w="med" len="med"/>
-                      <a:tailEnd type="none" w="med" len="med"/>
-                    </a:lnB>
-                    <a:solidFill>
-                      <a:srgbClr val="FFFFFF"/>
-                    </a:solidFill>
-                  </a:tcPr>
-                </a:tc>
-                <a:tc>
-                  <a:txBody>
-                    <a:bodyPr/>
-                    <a:lstStyle/>
-                    <a:p>
-                      <a:pPr algn="ctr" indent="0" marL="0">
-                        <a:buNone/>
-                      </a:pPr>
-                      <a:r>
-                        <a:rPr lang="en-US" sz="800" dirty="0">
-                          <a:solidFill>
-                            <a:srgbClr val="000000"/>
-                          </a:solidFill>
-                          <a:latin typeface="Arial" pitchFamily="34" charset="0"/>
-                          <a:ea typeface="Arial" pitchFamily="34" charset="-122"/>
-                          <a:cs typeface="Arial" pitchFamily="34" charset="-120"/>
-                        </a:rPr>
-                        <a:t>7</a:t>
-                      </a:r>
-                      <a:endParaRPr lang="en-US" sz="800" dirty="0">
-                        <a:latin typeface="Arial" charset="0"/>
-                        <a:ea typeface="Arial" charset="0"/>
-                        <a:cs typeface="Arial" charset="0"/>
-                      </a:endParaRPr>
-                    </a:p>
-                  </a:txBody>
-                  <a:tcPr marL="91440" marR="91440" marT="45720" marB="45720">
-                    <a:lnL w="6350" cap="flat" cmpd="sng" algn="ctr">
-                      <a:solidFill>
-                        <a:srgbClr val="CCCCCC"/>
-                      </a:solidFill>
-                      <a:prstDash val="solid"/>
-                      <a:round/>
-                      <a:headEnd type="none" w="med" len="med"/>
-                      <a:tailEnd type="none" w="med" len="med"/>
-                    </a:lnL>
-                    <a:lnR w="6350" cap="flat" cmpd="sng" algn="ctr">
-                      <a:solidFill>
-                        <a:srgbClr val="CCCCCC"/>
-                      </a:solidFill>
-                      <a:prstDash val="solid"/>
-                      <a:round/>
-                      <a:headEnd type="none" w="med" len="med"/>
-                      <a:tailEnd type="none" w="med" len="med"/>
-                    </a:lnR>
-                    <a:lnT w="6350" cap="flat" cmpd="sng" algn="ctr">
-                      <a:solidFill>
-                        <a:srgbClr val="CCCCCC"/>
-                      </a:solidFill>
-                      <a:prstDash val="solid"/>
-                      <a:round/>
-                      <a:headEnd type="none" w="med" len="med"/>
-                      <a:tailEnd type="none" w="med" len="med"/>
-                    </a:lnT>
-                    <a:lnB w="6350" cap="flat" cmpd="sng" algn="ctr">
-                      <a:solidFill>
-                        <a:srgbClr val="CCCCCC"/>
-                      </a:solidFill>
-                      <a:prstDash val="solid"/>
-                      <a:round/>
-                      <a:headEnd type="none" w="med" len="med"/>
-                      <a:tailEnd type="none" w="med" len="med"/>
-                    </a:lnB>
-                    <a:solidFill>
-                      <a:srgbClr val="FFFFFF"/>
-                    </a:solidFill>
-                  </a:tcPr>
-                </a:tc>
-                <a:tc>
-                  <a:txBody>
-                    <a:bodyPr/>
-                    <a:lstStyle/>
-                    <a:p>
-                      <a:pPr algn="ctr" indent="0" marL="0">
-                        <a:buNone/>
-                      </a:pPr>
-                      <a:r>
-                        <a:rPr lang="en-US" sz="800" b="1" dirty="0">
-                          <a:solidFill>
-                            <a:srgbClr val="000000"/>
-                          </a:solidFill>
-                          <a:latin typeface="Arial" pitchFamily="34" charset="0"/>
-                          <a:ea typeface="Arial" pitchFamily="34" charset="-122"/>
-                          <a:cs typeface="Arial" pitchFamily="34" charset="-120"/>
-                        </a:rPr>
-                        <a:t>3</a:t>
-                      </a:r>
-                      <a:endParaRPr lang="en-US" sz="800" dirty="0">
-                        <a:latin typeface="Arial" charset="0"/>
-                        <a:ea typeface="Arial" charset="0"/>
-                        <a:cs typeface="Arial" charset="0"/>
-                      </a:endParaRPr>
-                    </a:p>
-                  </a:txBody>
-                  <a:tcPr marL="91440" marR="91440" marT="45720" marB="45720">
-                    <a:lnL w="6350" cap="flat" cmpd="sng" algn="ctr">
-                      <a:solidFill>
-                        <a:srgbClr val="CCCCCC"/>
-                      </a:solidFill>
-                      <a:prstDash val="solid"/>
-                      <a:round/>
-                      <a:headEnd type="none" w="med" len="med"/>
-                      <a:tailEnd type="none" w="med" len="med"/>
-                    </a:lnL>
-                    <a:lnR w="6350" cap="flat" cmpd="sng" algn="ctr">
-                      <a:solidFill>
-                        <a:srgbClr val="CCCCCC"/>
-                      </a:solidFill>
-                      <a:prstDash val="solid"/>
-                      <a:round/>
-                      <a:headEnd type="none" w="med" len="med"/>
-                      <a:tailEnd type="none" w="med" len="med"/>
-                    </a:lnR>
-                    <a:lnT w="6350" cap="flat" cmpd="sng" algn="ctr">
-                      <a:solidFill>
-                        <a:srgbClr val="CCCCCC"/>
-                      </a:solidFill>
-                      <a:prstDash val="solid"/>
-                      <a:round/>
-                      <a:headEnd type="none" w="med" len="med"/>
-                      <a:tailEnd type="none" w="med" len="med"/>
-                    </a:lnT>
-                    <a:lnB w="6350" cap="flat" cmpd="sng" algn="ctr">
-                      <a:solidFill>
-                        <a:srgbClr val="CCCCCC"/>
-                      </a:solidFill>
-                      <a:prstDash val="solid"/>
-                      <a:round/>
-                      <a:headEnd type="none" w="med" len="med"/>
-                      <a:tailEnd type="none" w="med" len="med"/>
-                    </a:lnB>
-                    <a:solidFill>
-                      <a:srgbClr val="FFFFFF"/>
-                    </a:solidFill>
-                  </a:tcPr>
-                </a:tc>
-                <a:tc>
-                  <a:txBody>
-                    <a:bodyPr/>
-                    <a:lstStyle/>
-                    <a:p>
-                      <a:pPr algn="ctr" indent="0" marL="0">
-                        <a:buNone/>
-                      </a:pPr>
-                      <a:r>
-                        <a:rPr lang="en-US" sz="800" b="1" dirty="0">
-                          <a:solidFill>
-                            <a:srgbClr val="333333"/>
-                          </a:solidFill>
-                          <a:latin typeface="Arial" pitchFamily="34" charset="0"/>
-                          <a:ea typeface="Arial" pitchFamily="34" charset="-122"/>
-                          <a:cs typeface="Arial" pitchFamily="34" charset="-120"/>
-                        </a:rPr>
-                        <a:t>0.43</a:t>
-                      </a:r>
-                      <a:endParaRPr lang="en-US" sz="800" dirty="0">
-                        <a:latin typeface="Arial" charset="0"/>
-                        <a:ea typeface="Arial" charset="0"/>
-                        <a:cs typeface="Arial" charset="0"/>
-                      </a:endParaRPr>
-                    </a:p>
-                  </a:txBody>
-                  <a:tcPr marL="91440" marR="91440" marT="45720" marB="45720">
-                    <a:lnL w="6350" cap="flat" cmpd="sng" algn="ctr">
-                      <a:solidFill>
-                        <a:srgbClr val="CCCCCC"/>
-                      </a:solidFill>
-                      <a:prstDash val="solid"/>
-                      <a:round/>
-                      <a:headEnd type="none" w="med" len="med"/>
-                      <a:tailEnd type="none" w="med" len="med"/>
-                    </a:lnL>
-                    <a:lnR w="6350" cap="flat" cmpd="sng" algn="ctr">
-                      <a:solidFill>
-                        <a:srgbClr val="CCCCCC"/>
-                      </a:solidFill>
-                      <a:prstDash val="solid"/>
-                      <a:round/>
-                      <a:headEnd type="none" w="med" len="med"/>
-                      <a:tailEnd type="none" w="med" len="med"/>
-                    </a:lnR>
-                    <a:lnT w="6350" cap="flat" cmpd="sng" algn="ctr">
-                      <a:solidFill>
-                        <a:srgbClr val="CCCCCC"/>
-                      </a:solidFill>
-                      <a:prstDash val="solid"/>
-                      <a:round/>
-                      <a:headEnd type="none" w="med" len="med"/>
-                      <a:tailEnd type="none" w="med" len="med"/>
-                    </a:lnT>
-                    <a:lnB w="6350" cap="flat" cmpd="sng" algn="ctr">
-                      <a:solidFill>
-                        <a:srgbClr val="CCCCCC"/>
-                      </a:solidFill>
-                      <a:prstDash val="solid"/>
-                      <a:round/>
-                      <a:headEnd type="none" w="med" len="med"/>
-                      <a:tailEnd type="none" w="med" len="med"/>
-                    </a:lnB>
-                    <a:solidFill>
-                      <a:srgbClr val="FFFFFF"/>
-                    </a:solidFill>
-                  </a:tcPr>
-                </a:tc>
-              </a:tr>
-              <a:tr h="246185">
-                <a:tc>
-                  <a:txBody>
-                    <a:bodyPr/>
-                    <a:lstStyle/>
-                    <a:p>
-                      <a:pPr algn="ctr" indent="0" marL="0">
-                        <a:buNone/>
-                      </a:pPr>
-                      <a:r>
-                        <a:rPr lang="en-US" sz="700" dirty="0">
-                          <a:solidFill>
-                            <a:srgbClr val="000000"/>
-                          </a:solidFill>
-                          <a:latin typeface="Arial" pitchFamily="34" charset="0"/>
-                          <a:ea typeface="Arial" pitchFamily="34" charset="-122"/>
-                          <a:cs typeface="Arial" pitchFamily="34" charset="-120"/>
-                        </a:rPr>
-                        <a:t>コンフォートイン六本木</a:t>
-                      </a:r>
-                      <a:endParaRPr lang="en-US" sz="700" dirty="0">
-                        <a:latin typeface="Arial" charset="0"/>
-                        <a:ea typeface="Arial" charset="0"/>
-                        <a:cs typeface="Arial" charset="0"/>
-                      </a:endParaRPr>
-                    </a:p>
-                  </a:txBody>
-                  <a:tcPr marL="91440" marR="91440" marT="45720" marB="45720">
-                    <a:lnL w="6350" cap="flat" cmpd="sng" algn="ctr">
-                      <a:solidFill>
-                        <a:srgbClr val="CCCCCC"/>
-                      </a:solidFill>
-                      <a:prstDash val="solid"/>
-                      <a:round/>
-                      <a:headEnd type="none" w="med" len="med"/>
-                      <a:tailEnd type="none" w="med" len="med"/>
-                    </a:lnL>
-                    <a:lnR w="6350" cap="flat" cmpd="sng" algn="ctr">
-                      <a:solidFill>
-                        <a:srgbClr val="CCCCCC"/>
-                      </a:solidFill>
-                      <a:prstDash val="solid"/>
-                      <a:round/>
-                      <a:headEnd type="none" w="med" len="med"/>
-                      <a:tailEnd type="none" w="med" len="med"/>
-                    </a:lnR>
-                    <a:lnT w="6350" cap="flat" cmpd="sng" algn="ctr">
-                      <a:solidFill>
-                        <a:srgbClr val="CCCCCC"/>
-                      </a:solidFill>
-                      <a:prstDash val="solid"/>
-                      <a:round/>
-                      <a:headEnd type="none" w="med" len="med"/>
-                      <a:tailEnd type="none" w="med" len="med"/>
-                    </a:lnT>
-                    <a:lnB w="6350" cap="flat" cmpd="sng" algn="ctr">
-                      <a:solidFill>
-                        <a:srgbClr val="CCCCCC"/>
-                      </a:solidFill>
-                      <a:prstDash val="solid"/>
-                      <a:round/>
-                      <a:headEnd type="none" w="med" len="med"/>
-                      <a:tailEnd type="none" w="med" len="med"/>
-                    </a:lnB>
-                    <a:solidFill>
-                      <a:srgbClr val="F5F7FA"/>
-                    </a:solidFill>
-                  </a:tcPr>
-                </a:tc>
-                <a:tc>
-                  <a:txBody>
-                    <a:bodyPr/>
-                    <a:lstStyle/>
-                    <a:p>
-                      <a:pPr algn="ctr" indent="0" marL="0">
-                        <a:buNone/>
-                      </a:pPr>
-                      <a:r>
-                        <a:rPr lang="en-US" sz="800" dirty="0">
-                          <a:solidFill>
-                            <a:srgbClr val="000000"/>
-                          </a:solidFill>
-                          <a:latin typeface="Arial" pitchFamily="34" charset="0"/>
-                          <a:ea typeface="Arial" pitchFamily="34" charset="-122"/>
-                          <a:cs typeface="Arial" pitchFamily="34" charset="-120"/>
-                        </a:rPr>
-                        <a:t>15</a:t>
-                      </a:r>
-                      <a:endParaRPr lang="en-US" sz="800" dirty="0">
-                        <a:latin typeface="Arial" charset="0"/>
-                        <a:ea typeface="Arial" charset="0"/>
-                        <a:cs typeface="Arial" charset="0"/>
-                      </a:endParaRPr>
-                    </a:p>
-                  </a:txBody>
-                  <a:tcPr marL="91440" marR="91440" marT="45720" marB="45720">
-                    <a:lnL w="6350" cap="flat" cmpd="sng" algn="ctr">
-                      <a:solidFill>
-                        <a:srgbClr val="CCCCCC"/>
-                      </a:solidFill>
-                      <a:prstDash val="solid"/>
-                      <a:round/>
-                      <a:headEnd type="none" w="med" len="med"/>
-                      <a:tailEnd type="none" w="med" len="med"/>
-                    </a:lnL>
-                    <a:lnR w="6350" cap="flat" cmpd="sng" algn="ctr">
-                      <a:solidFill>
-                        <a:srgbClr val="CCCCCC"/>
-                      </a:solidFill>
-                      <a:prstDash val="solid"/>
-                      <a:round/>
-                      <a:headEnd type="none" w="med" len="med"/>
-                      <a:tailEnd type="none" w="med" len="med"/>
-                    </a:lnR>
-                    <a:lnT w="6350" cap="flat" cmpd="sng" algn="ctr">
-                      <a:solidFill>
-                        <a:srgbClr val="CCCCCC"/>
-                      </a:solidFill>
-                      <a:prstDash val="solid"/>
-                      <a:round/>
-                      <a:headEnd type="none" w="med" len="med"/>
-                      <a:tailEnd type="none" w="med" len="med"/>
-                    </a:lnT>
-                    <a:lnB w="6350" cap="flat" cmpd="sng" algn="ctr">
-                      <a:solidFill>
-                        <a:srgbClr val="CCCCCC"/>
-                      </a:solidFill>
-                      <a:prstDash val="solid"/>
-                      <a:round/>
-                      <a:headEnd type="none" w="med" len="med"/>
-                      <a:tailEnd type="none" w="med" len="med"/>
-                    </a:lnB>
-                    <a:solidFill>
-                      <a:srgbClr val="F5F7FA"/>
-                    </a:solidFill>
-                  </a:tcPr>
-                </a:tc>
-                <a:tc>
-                  <a:txBody>
-                    <a:bodyPr/>
-                    <a:lstStyle/>
-                    <a:p>
-                      <a:pPr algn="ctr" indent="0" marL="0">
-                        <a:buNone/>
-                      </a:pPr>
-                      <a:r>
-                        <a:rPr lang="en-US" sz="800" dirty="0">
-                          <a:solidFill>
-                            <a:srgbClr val="000000"/>
-                          </a:solidFill>
-                          <a:latin typeface="Arial" pitchFamily="34" charset="0"/>
-                          <a:ea typeface="Arial" pitchFamily="34" charset="-122"/>
-                          <a:cs typeface="Arial" pitchFamily="34" charset="-120"/>
-                        </a:rPr>
-                        <a:t>15</a:t>
-                      </a:r>
-                      <a:endParaRPr lang="en-US" sz="800" dirty="0">
-                        <a:latin typeface="Arial" charset="0"/>
-                        <a:ea typeface="Arial" charset="0"/>
-                        <a:cs typeface="Arial" charset="0"/>
-                      </a:endParaRPr>
-                    </a:p>
-                  </a:txBody>
-                  <a:tcPr marL="91440" marR="91440" marT="45720" marB="45720">
-                    <a:lnL w="6350" cap="flat" cmpd="sng" algn="ctr">
-                      <a:solidFill>
-                        <a:srgbClr val="CCCCCC"/>
-                      </a:solidFill>
-                      <a:prstDash val="solid"/>
-                      <a:round/>
-                      <a:headEnd type="none" w="med" len="med"/>
-                      <a:tailEnd type="none" w="med" len="med"/>
-                    </a:lnL>
-                    <a:lnR w="6350" cap="flat" cmpd="sng" algn="ctr">
-                      <a:solidFill>
-                        <a:srgbClr val="CCCCCC"/>
-                      </a:solidFill>
-                      <a:prstDash val="solid"/>
-                      <a:round/>
-                      <a:headEnd type="none" w="med" len="med"/>
-                      <a:tailEnd type="none" w="med" len="med"/>
-                    </a:lnR>
-                    <a:lnT w="6350" cap="flat" cmpd="sng" algn="ctr">
-                      <a:solidFill>
-                        <a:srgbClr val="CCCCCC"/>
-                      </a:solidFill>
-                      <a:prstDash val="solid"/>
-                      <a:round/>
-                      <a:headEnd type="none" w="med" len="med"/>
-                      <a:tailEnd type="none" w="med" len="med"/>
-                    </a:lnT>
-                    <a:lnB w="6350" cap="flat" cmpd="sng" algn="ctr">
-                      <a:solidFill>
-                        <a:srgbClr val="CCCCCC"/>
-                      </a:solidFill>
-                      <a:prstDash val="solid"/>
-                      <a:round/>
-                      <a:headEnd type="none" w="med" len="med"/>
-                      <a:tailEnd type="none" w="med" len="med"/>
-                    </a:lnB>
-                    <a:solidFill>
-                      <a:srgbClr val="F5F7FA"/>
-                    </a:solidFill>
-                  </a:tcPr>
-                </a:tc>
-                <a:tc>
-                  <a:txBody>
-                    <a:bodyPr/>
-                    <a:lstStyle/>
-                    <a:p>
-                      <a:pPr algn="ctr" indent="0" marL="0">
-                        <a:buNone/>
-                      </a:pPr>
-                      <a:r>
-                        <a:rPr lang="en-US" sz="800" b="1" dirty="0">
-                          <a:solidFill>
-                            <a:srgbClr val="000000"/>
-                          </a:solidFill>
-                          <a:latin typeface="Arial" pitchFamily="34" charset="0"/>
-                          <a:ea typeface="Arial" pitchFamily="34" charset="-122"/>
-                          <a:cs typeface="Arial" pitchFamily="34" charset="-120"/>
-                        </a:rPr>
-                        <a:t>2</a:t>
-                      </a:r>
-                      <a:endParaRPr lang="en-US" sz="800" dirty="0">
-                        <a:latin typeface="Arial" charset="0"/>
-                        <a:ea typeface="Arial" charset="0"/>
-                        <a:cs typeface="Arial" charset="0"/>
-                      </a:endParaRPr>
-                    </a:p>
-                  </a:txBody>
-                  <a:tcPr marL="91440" marR="91440" marT="45720" marB="45720">
-                    <a:lnL w="6350" cap="flat" cmpd="sng" algn="ctr">
-                      <a:solidFill>
-                        <a:srgbClr val="CCCCCC"/>
-                      </a:solidFill>
-                      <a:prstDash val="solid"/>
-                      <a:round/>
-                      <a:headEnd type="none" w="med" len="med"/>
-                      <a:tailEnd type="none" w="med" len="med"/>
-                    </a:lnL>
-                    <a:lnR w="6350" cap="flat" cmpd="sng" algn="ctr">
-                      <a:solidFill>
-                        <a:srgbClr val="CCCCCC"/>
-                      </a:solidFill>
-                      <a:prstDash val="solid"/>
-                      <a:round/>
-                      <a:headEnd type="none" w="med" len="med"/>
-                      <a:tailEnd type="none" w="med" len="med"/>
-                    </a:lnR>
-                    <a:lnT w="6350" cap="flat" cmpd="sng" algn="ctr">
-                      <a:solidFill>
-                        <a:srgbClr val="CCCCCC"/>
-                      </a:solidFill>
-                      <a:prstDash val="solid"/>
-                      <a:round/>
-                      <a:headEnd type="none" w="med" len="med"/>
-                      <a:tailEnd type="none" w="med" len="med"/>
-                    </a:lnT>
-                    <a:lnB w="6350" cap="flat" cmpd="sng" algn="ctr">
-                      <a:solidFill>
-                        <a:srgbClr val="CCCCCC"/>
-                      </a:solidFill>
-                      <a:prstDash val="solid"/>
-                      <a:round/>
-                      <a:headEnd type="none" w="med" len="med"/>
-                      <a:tailEnd type="none" w="med" len="med"/>
-                    </a:lnB>
-                    <a:solidFill>
-                      <a:srgbClr val="F5F7FA"/>
-                    </a:solidFill>
-                  </a:tcPr>
-                </a:tc>
-                <a:tc>
-                  <a:txBody>
-                    <a:bodyPr/>
-                    <a:lstStyle/>
-                    <a:p>
-                      <a:pPr algn="ctr" indent="0" marL="0">
-                        <a:buNone/>
-                      </a:pPr>
-                      <a:r>
-                        <a:rPr lang="en-US" sz="800" b="1" dirty="0">
-                          <a:solidFill>
-                            <a:srgbClr val="333333"/>
-                          </a:solidFill>
-                          <a:latin typeface="Arial" pitchFamily="34" charset="0"/>
-                          <a:ea typeface="Arial" pitchFamily="34" charset="-122"/>
-                          <a:cs typeface="Arial" pitchFamily="34" charset="-120"/>
-                        </a:rPr>
-                        <a:t>0.13</a:t>
-                      </a:r>
-                      <a:endParaRPr lang="en-US" sz="800" dirty="0">
-                        <a:latin typeface="Arial" charset="0"/>
-                        <a:ea typeface="Arial" charset="0"/>
-                        <a:cs typeface="Arial" charset="0"/>
-                      </a:endParaRPr>
-                    </a:p>
-                  </a:txBody>
-                  <a:tcPr marL="91440" marR="91440" marT="45720" marB="45720">
-                    <a:lnL w="6350" cap="flat" cmpd="sng" algn="ctr">
-                      <a:solidFill>
-                        <a:srgbClr val="CCCCCC"/>
-                      </a:solidFill>
-                      <a:prstDash val="solid"/>
-                      <a:round/>
-                      <a:headEnd type="none" w="med" len="med"/>
-                      <a:tailEnd type="none" w="med" len="med"/>
-                    </a:lnL>
-                    <a:lnR w="6350" cap="flat" cmpd="sng" algn="ctr">
-                      <a:solidFill>
-                        <a:srgbClr val="CCCCCC"/>
-                      </a:solidFill>
-                      <a:prstDash val="solid"/>
-                      <a:round/>
-                      <a:headEnd type="none" w="med" len="med"/>
-                      <a:tailEnd type="none" w="med" len="med"/>
-                    </a:lnR>
-                    <a:lnT w="6350" cap="flat" cmpd="sng" algn="ctr">
-                      <a:solidFill>
-                        <a:srgbClr val="CCCCCC"/>
-                      </a:solidFill>
-                      <a:prstDash val="solid"/>
-                      <a:round/>
-                      <a:headEnd type="none" w="med" len="med"/>
-                      <a:tailEnd type="none" w="med" len="med"/>
-                    </a:lnT>
-                    <a:lnB w="6350" cap="flat" cmpd="sng" algn="ctr">
-                      <a:solidFill>
-                        <a:srgbClr val="CCCCCC"/>
-                      </a:solidFill>
-                      <a:prstDash val="solid"/>
-                      <a:round/>
-                      <a:headEnd type="none" w="med" len="med"/>
-                      <a:tailEnd type="none" w="med" len="med"/>
-                    </a:lnB>
-                    <a:solidFill>
-                      <a:srgbClr val="F5F7FA"/>
-                    </a:solidFill>
-                  </a:tcPr>
-                </a:tc>
-              </a:tr>
-              <a:tr h="246185">
-                <a:tc>
-                  <a:txBody>
-                    <a:bodyPr/>
-                    <a:lstStyle/>
-                    <a:p>
-                      <a:pPr algn="ctr" indent="0" marL="0">
-                        <a:buNone/>
-                      </a:pPr>
-                      <a:r>
-                        <a:rPr lang="en-US" sz="700" dirty="0">
-                          <a:solidFill>
-                            <a:srgbClr val="000000"/>
-                          </a:solidFill>
-                          <a:latin typeface="Arial" pitchFamily="34" charset="0"/>
-                          <a:ea typeface="Arial" pitchFamily="34" charset="-122"/>
-                          <a:cs typeface="Arial" pitchFamily="34" charset="-120"/>
-                        </a:rPr>
-                        <a:t>変なH.東京羽田</a:t>
-                      </a:r>
-                      <a:endParaRPr lang="en-US" sz="700" dirty="0">
-                        <a:latin typeface="Arial" charset="0"/>
-                        <a:ea typeface="Arial" charset="0"/>
-                        <a:cs typeface="Arial" charset="0"/>
-                      </a:endParaRPr>
-                    </a:p>
-                  </a:txBody>
-                  <a:tcPr marL="91440" marR="91440" marT="45720" marB="45720">
-                    <a:lnL w="6350" cap="flat" cmpd="sng" algn="ctr">
-                      <a:solidFill>
-                        <a:srgbClr val="CCCCCC"/>
-                      </a:solidFill>
-                      <a:prstDash val="solid"/>
-                      <a:round/>
-                      <a:headEnd type="none" w="med" len="med"/>
-                      <a:tailEnd type="none" w="med" len="med"/>
-                    </a:lnL>
-                    <a:lnR w="6350" cap="flat" cmpd="sng" algn="ctr">
-                      <a:solidFill>
-                        <a:srgbClr val="CCCCCC"/>
-                      </a:solidFill>
-                      <a:prstDash val="solid"/>
-                      <a:round/>
-                      <a:headEnd type="none" w="med" len="med"/>
-                      <a:tailEnd type="none" w="med" len="med"/>
-                    </a:lnR>
-                    <a:lnT w="6350" cap="flat" cmpd="sng" algn="ctr">
-                      <a:solidFill>
-                        <a:srgbClr val="CCCCCC"/>
-                      </a:solidFill>
-                      <a:prstDash val="solid"/>
-                      <a:round/>
-                      <a:headEnd type="none" w="med" len="med"/>
-                      <a:tailEnd type="none" w="med" len="med"/>
-                    </a:lnT>
-                    <a:lnB w="6350" cap="flat" cmpd="sng" algn="ctr">
-                      <a:solidFill>
-                        <a:srgbClr val="CCCCCC"/>
-                      </a:solidFill>
-                      <a:prstDash val="solid"/>
-                      <a:round/>
-                      <a:headEnd type="none" w="med" len="med"/>
-                      <a:tailEnd type="none" w="med" len="med"/>
-                    </a:lnB>
-                    <a:solidFill>
-                      <a:srgbClr val="FFFFFF"/>
-                    </a:solidFill>
-                  </a:tcPr>
-                </a:tc>
-                <a:tc>
-                  <a:txBody>
-                    <a:bodyPr/>
-                    <a:lstStyle/>
-                    <a:p>
-                      <a:pPr algn="ctr" indent="0" marL="0">
-                        <a:buNone/>
-                      </a:pPr>
-                      <a:r>
-                        <a:rPr lang="en-US" sz="800" dirty="0">
-                          <a:solidFill>
-                            <a:srgbClr val="000000"/>
-                          </a:solidFill>
-                          <a:latin typeface="Arial" pitchFamily="34" charset="0"/>
-                          <a:ea typeface="Arial" pitchFamily="34" charset="-122"/>
-                          <a:cs typeface="Arial" pitchFamily="34" charset="-120"/>
-                        </a:rPr>
-                        <a:t>35</a:t>
-                      </a:r>
-                      <a:endParaRPr lang="en-US" sz="800" dirty="0">
-                        <a:latin typeface="Arial" charset="0"/>
-                        <a:ea typeface="Arial" charset="0"/>
-                        <a:cs typeface="Arial" charset="0"/>
-                      </a:endParaRPr>
-                    </a:p>
-                  </a:txBody>
-                  <a:tcPr marL="91440" marR="91440" marT="45720" marB="45720">
-                    <a:lnL w="6350" cap="flat" cmpd="sng" algn="ctr">
-                      <a:solidFill>
-                        <a:srgbClr val="CCCCCC"/>
-                      </a:solidFill>
-                      <a:prstDash val="solid"/>
-                      <a:round/>
-                      <a:headEnd type="none" w="med" len="med"/>
-                      <a:tailEnd type="none" w="med" len="med"/>
-                    </a:lnL>
-                    <a:lnR w="6350" cap="flat" cmpd="sng" algn="ctr">
-                      <a:solidFill>
-                        <a:srgbClr val="CCCCCC"/>
-                      </a:solidFill>
-                      <a:prstDash val="solid"/>
-                      <a:round/>
-                      <a:headEnd type="none" w="med" len="med"/>
-                      <a:tailEnd type="none" w="med" len="med"/>
-                    </a:lnR>
-                    <a:lnT w="6350" cap="flat" cmpd="sng" algn="ctr">
-                      <a:solidFill>
-                        <a:srgbClr val="CCCCCC"/>
-                      </a:solidFill>
-                      <a:prstDash val="solid"/>
-                      <a:round/>
-                      <a:headEnd type="none" w="med" len="med"/>
-                      <a:tailEnd type="none" w="med" len="med"/>
-                    </a:lnT>
-                    <a:lnB w="6350" cap="flat" cmpd="sng" algn="ctr">
-                      <a:solidFill>
-                        <a:srgbClr val="CCCCCC"/>
-                      </a:solidFill>
-                      <a:prstDash val="solid"/>
-                      <a:round/>
-                      <a:headEnd type="none" w="med" len="med"/>
-                      <a:tailEnd type="none" w="med" len="med"/>
-                    </a:lnB>
-                    <a:solidFill>
-                      <a:srgbClr val="FFFFFF"/>
-                    </a:solidFill>
-                  </a:tcPr>
-                </a:tc>
-                <a:tc>
-                  <a:txBody>
-                    <a:bodyPr/>
-                    <a:lstStyle/>
-                    <a:p>
-                      <a:pPr algn="ctr" indent="0" marL="0">
-                        <a:buNone/>
-                      </a:pPr>
-                      <a:r>
-                        <a:rPr lang="en-US" sz="800" dirty="0">
-                          <a:solidFill>
-                            <a:srgbClr val="000000"/>
-                          </a:solidFill>
-                          <a:latin typeface="Arial" pitchFamily="34" charset="0"/>
-                          <a:ea typeface="Arial" pitchFamily="34" charset="-122"/>
-                          <a:cs typeface="Arial" pitchFamily="34" charset="-120"/>
-                        </a:rPr>
-                        <a:t>28</a:t>
-                      </a:r>
-                      <a:endParaRPr lang="en-US" sz="800" dirty="0">
-                        <a:latin typeface="Arial" charset="0"/>
-                        <a:ea typeface="Arial" charset="0"/>
-                        <a:cs typeface="Arial" charset="0"/>
-                      </a:endParaRPr>
-                    </a:p>
-                  </a:txBody>
-                  <a:tcPr marL="91440" marR="91440" marT="45720" marB="45720">
-                    <a:lnL w="6350" cap="flat" cmpd="sng" algn="ctr">
-                      <a:solidFill>
-                        <a:srgbClr val="CCCCCC"/>
-                      </a:solidFill>
-                      <a:prstDash val="solid"/>
-                      <a:round/>
-                      <a:headEnd type="none" w="med" len="med"/>
-                      <a:tailEnd type="none" w="med" len="med"/>
-                    </a:lnL>
-                    <a:lnR w="6350" cap="flat" cmpd="sng" algn="ctr">
-                      <a:solidFill>
-                        <a:srgbClr val="CCCCCC"/>
-                      </a:solidFill>
-                      <a:prstDash val="solid"/>
-                      <a:round/>
-                      <a:headEnd type="none" w="med" len="med"/>
-                      <a:tailEnd type="none" w="med" len="med"/>
-                    </a:lnR>
-                    <a:lnT w="6350" cap="flat" cmpd="sng" algn="ctr">
-                      <a:solidFill>
-                        <a:srgbClr val="CCCCCC"/>
-                      </a:solidFill>
-                      <a:prstDash val="solid"/>
-                      <a:round/>
-                      <a:headEnd type="none" w="med" len="med"/>
-                      <a:tailEnd type="none" w="med" len="med"/>
-                    </a:lnT>
-                    <a:lnB w="6350" cap="flat" cmpd="sng" algn="ctr">
-                      <a:solidFill>
-                        <a:srgbClr val="CCCCCC"/>
-                      </a:solidFill>
-                      <a:prstDash val="solid"/>
-                      <a:round/>
-                      <a:headEnd type="none" w="med" len="med"/>
-                      <a:tailEnd type="none" w="med" len="med"/>
-                    </a:lnB>
-                    <a:solidFill>
-                      <a:srgbClr val="FFFFFF"/>
-                    </a:solidFill>
-                  </a:tcPr>
-                </a:tc>
-                <a:tc>
-                  <a:txBody>
-                    <a:bodyPr/>
-                    <a:lstStyle/>
-                    <a:p>
-                      <a:pPr algn="ctr" indent="0" marL="0">
-                        <a:buNone/>
-                      </a:pPr>
-                      <a:r>
-                        <a:rPr lang="en-US" sz="800" b="1" dirty="0">
-                          <a:solidFill>
-                            <a:srgbClr val="000000"/>
-                          </a:solidFill>
-                          <a:latin typeface="Arial" pitchFamily="34" charset="0"/>
-                          <a:ea typeface="Arial" pitchFamily="34" charset="-122"/>
-                          <a:cs typeface="Arial" pitchFamily="34" charset="-120"/>
-                        </a:rPr>
-                        <a:t>1</a:t>
-                      </a:r>
-                      <a:endParaRPr lang="en-US" sz="800" dirty="0">
-                        <a:latin typeface="Arial" charset="0"/>
-                        <a:ea typeface="Arial" charset="0"/>
-                        <a:cs typeface="Arial" charset="0"/>
-                      </a:endParaRPr>
-                    </a:p>
-                  </a:txBody>
-                  <a:tcPr marL="91440" marR="91440" marT="45720" marB="45720">
-                    <a:lnL w="6350" cap="flat" cmpd="sng" algn="ctr">
-                      <a:solidFill>
-                        <a:srgbClr val="CCCCCC"/>
-                      </a:solidFill>
-                      <a:prstDash val="solid"/>
-                      <a:round/>
-                      <a:headEnd type="none" w="med" len="med"/>
-                      <a:tailEnd type="none" w="med" len="med"/>
-                    </a:lnL>
-                    <a:lnR w="6350" cap="flat" cmpd="sng" algn="ctr">
-                      <a:solidFill>
-                        <a:srgbClr val="CCCCCC"/>
-                      </a:solidFill>
-                      <a:prstDash val="solid"/>
-                      <a:round/>
-                      <a:headEnd type="none" w="med" len="med"/>
-                      <a:tailEnd type="none" w="med" len="med"/>
-                    </a:lnR>
-                    <a:lnT w="6350" cap="flat" cmpd="sng" algn="ctr">
-                      <a:solidFill>
-                        <a:srgbClr val="CCCCCC"/>
-                      </a:solidFill>
-                      <a:prstDash val="solid"/>
-                      <a:round/>
-                      <a:headEnd type="none" w="med" len="med"/>
-                      <a:tailEnd type="none" w="med" len="med"/>
-                    </a:lnT>
-                    <a:lnB w="6350" cap="flat" cmpd="sng" algn="ctr">
-                      <a:solidFill>
-                        <a:srgbClr val="CCCCCC"/>
-                      </a:solidFill>
-                      <a:prstDash val="solid"/>
-                      <a:round/>
-                      <a:headEnd type="none" w="med" len="med"/>
-                      <a:tailEnd type="none" w="med" len="med"/>
-                    </a:lnB>
-                    <a:solidFill>
-                      <a:srgbClr val="FFFFFF"/>
-                    </a:solidFill>
-                  </a:tcPr>
-                </a:tc>
-                <a:tc>
-                  <a:txBody>
-                    <a:bodyPr/>
-                    <a:lstStyle/>
-                    <a:p>
-                      <a:pPr algn="ctr" indent="0" marL="0">
-                        <a:buNone/>
-                      </a:pPr>
-                      <a:r>
-                        <a:rPr lang="en-US" sz="800" b="1" dirty="0">
-                          <a:solidFill>
-                            <a:srgbClr val="333333"/>
-                          </a:solidFill>
-                          <a:latin typeface="Arial" pitchFamily="34" charset="0"/>
-                          <a:ea typeface="Arial" pitchFamily="34" charset="-122"/>
-                          <a:cs typeface="Arial" pitchFamily="34" charset="-120"/>
-                        </a:rPr>
-                        <a:t>0.04</a:t>
+                        <a:t>0.28</a:t>
                       </a:r>
                       <a:endParaRPr lang="en-US" sz="800" dirty="0">
                         <a:latin typeface="Arial" charset="0"/>
@@ -7217,7 +7217,7 @@
                           <a:ea typeface="Arial" pitchFamily="34" charset="-122"/>
                           <a:cs typeface="Arial" pitchFamily="34" charset="-120"/>
                         </a:rPr>
-                        <a:t>35</a:t>
+                        <a:t>57</a:t>
                       </a:r>
                       <a:endParaRPr lang="en-US" sz="900" dirty="0">
                         <a:latin typeface="Arial" charset="0"/>
@@ -7285,7 +7285,7 @@
                           <a:ea typeface="Arial" pitchFamily="34" charset="-122"/>
                           <a:cs typeface="Arial" pitchFamily="34" charset="-120"/>
                         </a:rPr>
-                        <a:t>852</a:t>
+                        <a:t>1483</a:t>
                       </a:r>
                       <a:endParaRPr lang="en-US" sz="900" dirty="0">
                         <a:latin typeface="Arial" charset="0"/>
@@ -7353,7 +7353,7 @@
                           <a:ea typeface="Arial" pitchFamily="34" charset="-122"/>
                           <a:cs typeface="Arial" pitchFamily="34" charset="-120"/>
                         </a:rPr>
-                        <a:t>24.3</a:t>
+                        <a:t>26.0</a:t>
                       </a:r>
                       <a:endParaRPr lang="en-US" sz="900" dirty="0">
                         <a:latin typeface="Arial" charset="0"/>
@@ -7559,7 +7559,7 @@
                           <a:ea typeface="Arial" pitchFamily="34" charset="-122"/>
                           <a:cs typeface="Arial" pitchFamily="34" charset="-120"/>
                         </a:rPr>
-                        <a:t>36</a:t>
+                        <a:t>58</a:t>
                       </a:r>
                       <a:endParaRPr lang="en-US" sz="900" dirty="0">
                         <a:latin typeface="Arial" charset="0"/>
@@ -7627,7 +7627,7 @@
                           <a:ea typeface="Arial" pitchFamily="34" charset="-122"/>
                           <a:cs typeface="Arial" pitchFamily="34" charset="-120"/>
                         </a:rPr>
-                        <a:t>867</a:t>
+                        <a:t>1467</a:t>
                       </a:r>
                       <a:endParaRPr lang="en-US" sz="900" dirty="0">
                         <a:latin typeface="Arial" charset="0"/>
@@ -7695,7 +7695,7 @@
                           <a:ea typeface="Arial" pitchFamily="34" charset="-122"/>
                           <a:cs typeface="Arial" pitchFamily="34" charset="-120"/>
                         </a:rPr>
-                        <a:t>24.1</a:t>
+                        <a:t>25.3</a:t>
                       </a:r>
                       <a:endParaRPr lang="en-US" sz="900" dirty="0">
                         <a:latin typeface="Arial" charset="0"/>
@@ -7765,691 +7765,7 @@
                           <a:ea typeface="Arial" pitchFamily="34" charset="-122"/>
                           <a:cs typeface="Arial" pitchFamily="34" charset="-120"/>
                         </a:rPr>
-                        <a:t>スーザン</a:t>
-                      </a:r>
-                      <a:endParaRPr lang="en-US" sz="900" dirty="0">
-                        <a:latin typeface="Arial" charset="0"/>
-                        <a:ea typeface="Arial" charset="0"/>
-                        <a:cs typeface="Arial" charset="0"/>
-                      </a:endParaRPr>
-                    </a:p>
-                  </a:txBody>
-                  <a:tcPr marL="91440" marR="91440" marT="45720" marB="45720">
-                    <a:lnL w="6350" cap="flat" cmpd="sng" algn="ctr">
-                      <a:solidFill>
-                        <a:srgbClr val="CCCCCC"/>
-                      </a:solidFill>
-                      <a:prstDash val="solid"/>
-                      <a:round/>
-                      <a:headEnd type="none" w="med" len="med"/>
-                      <a:tailEnd type="none" w="med" len="med"/>
-                    </a:lnL>
-                    <a:lnR w="6350" cap="flat" cmpd="sng" algn="ctr">
-                      <a:solidFill>
-                        <a:srgbClr val="CCCCCC"/>
-                      </a:solidFill>
-                      <a:prstDash val="solid"/>
-                      <a:round/>
-                      <a:headEnd type="none" w="med" len="med"/>
-                      <a:tailEnd type="none" w="med" len="med"/>
-                    </a:lnR>
-                    <a:lnT w="6350" cap="flat" cmpd="sng" algn="ctr">
-                      <a:solidFill>
-                        <a:srgbClr val="CCCCCC"/>
-                      </a:solidFill>
-                      <a:prstDash val="solid"/>
-                      <a:round/>
-                      <a:headEnd type="none" w="med" len="med"/>
-                      <a:tailEnd type="none" w="med" len="med"/>
-                    </a:lnT>
-                    <a:lnB w="6350" cap="flat" cmpd="sng" algn="ctr">
-                      <a:solidFill>
-                        <a:srgbClr val="CCCCCC"/>
-                      </a:solidFill>
-                      <a:prstDash val="solid"/>
-                      <a:round/>
-                      <a:headEnd type="none" w="med" len="med"/>
-                      <a:tailEnd type="none" w="med" len="med"/>
-                    </a:lnB>
-                    <a:solidFill>
-                      <a:srgbClr val="F5F7FA"/>
-                    </a:solidFill>
-                  </a:tcPr>
-                </a:tc>
-                <a:tc>
-                  <a:txBody>
-                    <a:bodyPr/>
-                    <a:lstStyle/>
-                    <a:p>
-                      <a:pPr algn="ctr" indent="0" marL="0">
-                        <a:buNone/>
-                      </a:pPr>
-                      <a:r>
-                        <a:rPr lang="en-US" sz="800" dirty="0">
-                          <a:solidFill>
-                            <a:srgbClr val="000000"/>
-                          </a:solidFill>
-                          <a:latin typeface="Arial" pitchFamily="34" charset="0"/>
-                          <a:ea typeface="Arial" pitchFamily="34" charset="-122"/>
-                          <a:cs typeface="Arial" pitchFamily="34" charset="-120"/>
-                        </a:rPr>
-                        <a:t>リッチモンドH.東京目白</a:t>
-                      </a:r>
-                      <a:endParaRPr lang="en-US" sz="800" dirty="0">
-                        <a:latin typeface="Arial" charset="0"/>
-                        <a:ea typeface="Arial" charset="0"/>
-                        <a:cs typeface="Arial" charset="0"/>
-                      </a:endParaRPr>
-                    </a:p>
-                  </a:txBody>
-                  <a:tcPr marL="91440" marR="91440" marT="45720" marB="45720">
-                    <a:lnL w="6350" cap="flat" cmpd="sng" algn="ctr">
-                      <a:solidFill>
-                        <a:srgbClr val="CCCCCC"/>
-                      </a:solidFill>
-                      <a:prstDash val="solid"/>
-                      <a:round/>
-                      <a:headEnd type="none" w="med" len="med"/>
-                      <a:tailEnd type="none" w="med" len="med"/>
-                    </a:lnL>
-                    <a:lnR w="6350" cap="flat" cmpd="sng" algn="ctr">
-                      <a:solidFill>
-                        <a:srgbClr val="CCCCCC"/>
-                      </a:solidFill>
-                      <a:prstDash val="solid"/>
-                      <a:round/>
-                      <a:headEnd type="none" w="med" len="med"/>
-                      <a:tailEnd type="none" w="med" len="med"/>
-                    </a:lnR>
-                    <a:lnT w="6350" cap="flat" cmpd="sng" algn="ctr">
-                      <a:solidFill>
-                        <a:srgbClr val="CCCCCC"/>
-                      </a:solidFill>
-                      <a:prstDash val="solid"/>
-                      <a:round/>
-                      <a:headEnd type="none" w="med" len="med"/>
-                      <a:tailEnd type="none" w="med" len="med"/>
-                    </a:lnT>
-                    <a:lnB w="6350" cap="flat" cmpd="sng" algn="ctr">
-                      <a:solidFill>
-                        <a:srgbClr val="CCCCCC"/>
-                      </a:solidFill>
-                      <a:prstDash val="solid"/>
-                      <a:round/>
-                      <a:headEnd type="none" w="med" len="med"/>
-                      <a:tailEnd type="none" w="med" len="med"/>
-                    </a:lnB>
-                    <a:solidFill>
-                      <a:srgbClr val="F5F7FA"/>
-                    </a:solidFill>
-                  </a:tcPr>
-                </a:tc>
-                <a:tc>
-                  <a:txBody>
-                    <a:bodyPr/>
-                    <a:lstStyle/>
-                    <a:p>
-                      <a:pPr algn="ctr" indent="0" marL="0">
-                        <a:buNone/>
-                      </a:pPr>
-                      <a:r>
-                        <a:rPr lang="en-US" sz="900" dirty="0">
-                          <a:solidFill>
-                            <a:srgbClr val="000000"/>
-                          </a:solidFill>
-                          <a:latin typeface="Arial" pitchFamily="34" charset="0"/>
-                          <a:ea typeface="Arial" pitchFamily="34" charset="-122"/>
-                          <a:cs typeface="Arial" pitchFamily="34" charset="-120"/>
-                        </a:rPr>
-                        <a:t>35</a:t>
-                      </a:r>
-                      <a:endParaRPr lang="en-US" sz="900" dirty="0">
-                        <a:latin typeface="Arial" charset="0"/>
-                        <a:ea typeface="Arial" charset="0"/>
-                        <a:cs typeface="Arial" charset="0"/>
-                      </a:endParaRPr>
-                    </a:p>
-                  </a:txBody>
-                  <a:tcPr marL="91440" marR="91440" marT="45720" marB="45720">
-                    <a:lnL w="6350" cap="flat" cmpd="sng" algn="ctr">
-                      <a:solidFill>
-                        <a:srgbClr val="CCCCCC"/>
-                      </a:solidFill>
-                      <a:prstDash val="solid"/>
-                      <a:round/>
-                      <a:headEnd type="none" w="med" len="med"/>
-                      <a:tailEnd type="none" w="med" len="med"/>
-                    </a:lnL>
-                    <a:lnR w="6350" cap="flat" cmpd="sng" algn="ctr">
-                      <a:solidFill>
-                        <a:srgbClr val="CCCCCC"/>
-                      </a:solidFill>
-                      <a:prstDash val="solid"/>
-                      <a:round/>
-                      <a:headEnd type="none" w="med" len="med"/>
-                      <a:tailEnd type="none" w="med" len="med"/>
-                    </a:lnR>
-                    <a:lnT w="6350" cap="flat" cmpd="sng" algn="ctr">
-                      <a:solidFill>
-                        <a:srgbClr val="CCCCCC"/>
-                      </a:solidFill>
-                      <a:prstDash val="solid"/>
-                      <a:round/>
-                      <a:headEnd type="none" w="med" len="med"/>
-                      <a:tailEnd type="none" w="med" len="med"/>
-                    </a:lnT>
-                    <a:lnB w="6350" cap="flat" cmpd="sng" algn="ctr">
-                      <a:solidFill>
-                        <a:srgbClr val="CCCCCC"/>
-                      </a:solidFill>
-                      <a:prstDash val="solid"/>
-                      <a:round/>
-                      <a:headEnd type="none" w="med" len="med"/>
-                      <a:tailEnd type="none" w="med" len="med"/>
-                    </a:lnB>
-                    <a:solidFill>
-                      <a:srgbClr val="F5F7FA"/>
-                    </a:solidFill>
-                  </a:tcPr>
-                </a:tc>
-                <a:tc>
-                  <a:txBody>
-                    <a:bodyPr/>
-                    <a:lstStyle/>
-                    <a:p>
-                      <a:pPr algn="ctr" indent="0" marL="0">
-                        <a:buNone/>
-                      </a:pPr>
-                      <a:r>
-                        <a:rPr lang="en-US" sz="900" dirty="0">
-                          <a:solidFill>
-                            <a:srgbClr val="000000"/>
-                          </a:solidFill>
-                          <a:latin typeface="Arial" pitchFamily="34" charset="0"/>
-                          <a:ea typeface="Arial" pitchFamily="34" charset="-122"/>
-                          <a:cs typeface="Arial" pitchFamily="34" charset="-120"/>
-                        </a:rPr>
-                        <a:t>767</a:t>
-                      </a:r>
-                      <a:endParaRPr lang="en-US" sz="900" dirty="0">
-                        <a:latin typeface="Arial" charset="0"/>
-                        <a:ea typeface="Arial" charset="0"/>
-                        <a:cs typeface="Arial" charset="0"/>
-                      </a:endParaRPr>
-                    </a:p>
-                  </a:txBody>
-                  <a:tcPr marL="91440" marR="91440" marT="45720" marB="45720">
-                    <a:lnL w="6350" cap="flat" cmpd="sng" algn="ctr">
-                      <a:solidFill>
-                        <a:srgbClr val="CCCCCC"/>
-                      </a:solidFill>
-                      <a:prstDash val="solid"/>
-                      <a:round/>
-                      <a:headEnd type="none" w="med" len="med"/>
-                      <a:tailEnd type="none" w="med" len="med"/>
-                    </a:lnL>
-                    <a:lnR w="6350" cap="flat" cmpd="sng" algn="ctr">
-                      <a:solidFill>
-                        <a:srgbClr val="CCCCCC"/>
-                      </a:solidFill>
-                      <a:prstDash val="solid"/>
-                      <a:round/>
-                      <a:headEnd type="none" w="med" len="med"/>
-                      <a:tailEnd type="none" w="med" len="med"/>
-                    </a:lnR>
-                    <a:lnT w="6350" cap="flat" cmpd="sng" algn="ctr">
-                      <a:solidFill>
-                        <a:srgbClr val="CCCCCC"/>
-                      </a:solidFill>
-                      <a:prstDash val="solid"/>
-                      <a:round/>
-                      <a:headEnd type="none" w="med" len="med"/>
-                      <a:tailEnd type="none" w="med" len="med"/>
-                    </a:lnT>
-                    <a:lnB w="6350" cap="flat" cmpd="sng" algn="ctr">
-                      <a:solidFill>
-                        <a:srgbClr val="CCCCCC"/>
-                      </a:solidFill>
-                      <a:prstDash val="solid"/>
-                      <a:round/>
-                      <a:headEnd type="none" w="med" len="med"/>
-                      <a:tailEnd type="none" w="med" len="med"/>
-                    </a:lnB>
-                    <a:solidFill>
-                      <a:srgbClr val="F5F7FA"/>
-                    </a:solidFill>
-                  </a:tcPr>
-                </a:tc>
-                <a:tc>
-                  <a:txBody>
-                    <a:bodyPr/>
-                    <a:lstStyle/>
-                    <a:p>
-                      <a:pPr algn="ctr" indent="0" marL="0">
-                        <a:buNone/>
-                      </a:pPr>
-                      <a:r>
-                        <a:rPr lang="en-US" sz="900" b="1" dirty="0">
-                          <a:solidFill>
-                            <a:srgbClr val="00695C"/>
-                          </a:solidFill>
-                          <a:latin typeface="Arial" pitchFamily="34" charset="0"/>
-                          <a:ea typeface="Arial" pitchFamily="34" charset="-122"/>
-                          <a:cs typeface="Arial" pitchFamily="34" charset="-120"/>
-                        </a:rPr>
-                        <a:t>21.9</a:t>
-                      </a:r>
-                      <a:endParaRPr lang="en-US" sz="900" dirty="0">
-                        <a:latin typeface="Arial" charset="0"/>
-                        <a:ea typeface="Arial" charset="0"/>
-                        <a:cs typeface="Arial" charset="0"/>
-                      </a:endParaRPr>
-                    </a:p>
-                  </a:txBody>
-                  <a:tcPr marL="91440" marR="91440" marT="45720" marB="45720">
-                    <a:lnL w="6350" cap="flat" cmpd="sng" algn="ctr">
-                      <a:solidFill>
-                        <a:srgbClr val="CCCCCC"/>
-                      </a:solidFill>
-                      <a:prstDash val="solid"/>
-                      <a:round/>
-                      <a:headEnd type="none" w="med" len="med"/>
-                      <a:tailEnd type="none" w="med" len="med"/>
-                    </a:lnL>
-                    <a:lnR w="6350" cap="flat" cmpd="sng" algn="ctr">
-                      <a:solidFill>
-                        <a:srgbClr val="CCCCCC"/>
-                      </a:solidFill>
-                      <a:prstDash val="solid"/>
-                      <a:round/>
-                      <a:headEnd type="none" w="med" len="med"/>
-                      <a:tailEnd type="none" w="med" len="med"/>
-                    </a:lnR>
-                    <a:lnT w="6350" cap="flat" cmpd="sng" algn="ctr">
-                      <a:solidFill>
-                        <a:srgbClr val="CCCCCC"/>
-                      </a:solidFill>
-                      <a:prstDash val="solid"/>
-                      <a:round/>
-                      <a:headEnd type="none" w="med" len="med"/>
-                      <a:tailEnd type="none" w="med" len="med"/>
-                    </a:lnT>
-                    <a:lnB w="6350" cap="flat" cmpd="sng" algn="ctr">
-                      <a:solidFill>
-                        <a:srgbClr val="CCCCCC"/>
-                      </a:solidFill>
-                      <a:prstDash val="solid"/>
-                      <a:round/>
-                      <a:headEnd type="none" w="med" len="med"/>
-                      <a:tailEnd type="none" w="med" len="med"/>
-                    </a:lnB>
-                    <a:solidFill>
-                      <a:srgbClr val="F5F7FA"/>
-                    </a:solidFill>
-                  </a:tcPr>
-                </a:tc>
-              </a:tr>
-              <a:tr h="304800">
-                <a:tc>
-                  <a:txBody>
-                    <a:bodyPr/>
-                    <a:lstStyle/>
-                    <a:p>
-                      <a:pPr algn="ctr" indent="0" marL="0">
-                        <a:buNone/>
-                      </a:pPr>
-                      <a:r>
-                        <a:rPr lang="en-US" sz="900" dirty="0">
-                          <a:solidFill>
-                            <a:srgbClr val="000000"/>
-                          </a:solidFill>
-                          <a:latin typeface="Arial" pitchFamily="34" charset="0"/>
-                          <a:ea typeface="Arial" pitchFamily="34" charset="-122"/>
-                          <a:cs typeface="Arial" pitchFamily="34" charset="-120"/>
-                        </a:rPr>
-                        <a:t>グルン</a:t>
-                      </a:r>
-                      <a:endParaRPr lang="en-US" sz="900" dirty="0">
-                        <a:latin typeface="Arial" charset="0"/>
-                        <a:ea typeface="Arial" charset="0"/>
-                        <a:cs typeface="Arial" charset="0"/>
-                      </a:endParaRPr>
-                    </a:p>
-                  </a:txBody>
-                  <a:tcPr marL="91440" marR="91440" marT="45720" marB="45720">
-                    <a:lnL w="6350" cap="flat" cmpd="sng" algn="ctr">
-                      <a:solidFill>
-                        <a:srgbClr val="CCCCCC"/>
-                      </a:solidFill>
-                      <a:prstDash val="solid"/>
-                      <a:round/>
-                      <a:headEnd type="none" w="med" len="med"/>
-                      <a:tailEnd type="none" w="med" len="med"/>
-                    </a:lnL>
-                    <a:lnR w="6350" cap="flat" cmpd="sng" algn="ctr">
-                      <a:solidFill>
-                        <a:srgbClr val="CCCCCC"/>
-                      </a:solidFill>
-                      <a:prstDash val="solid"/>
-                      <a:round/>
-                      <a:headEnd type="none" w="med" len="med"/>
-                      <a:tailEnd type="none" w="med" len="med"/>
-                    </a:lnR>
-                    <a:lnT w="6350" cap="flat" cmpd="sng" algn="ctr">
-                      <a:solidFill>
-                        <a:srgbClr val="CCCCCC"/>
-                      </a:solidFill>
-                      <a:prstDash val="solid"/>
-                      <a:round/>
-                      <a:headEnd type="none" w="med" len="med"/>
-                      <a:tailEnd type="none" w="med" len="med"/>
-                    </a:lnT>
-                    <a:lnB w="6350" cap="flat" cmpd="sng" algn="ctr">
-                      <a:solidFill>
-                        <a:srgbClr val="CCCCCC"/>
-                      </a:solidFill>
-                      <a:prstDash val="solid"/>
-                      <a:round/>
-                      <a:headEnd type="none" w="med" len="med"/>
-                      <a:tailEnd type="none" w="med" len="med"/>
-                    </a:lnB>
-                    <a:solidFill>
-                      <a:srgbClr val="FFFFFF"/>
-                    </a:solidFill>
-                  </a:tcPr>
-                </a:tc>
-                <a:tc>
-                  <a:txBody>
-                    <a:bodyPr/>
-                    <a:lstStyle/>
-                    <a:p>
-                      <a:pPr algn="ctr" indent="0" marL="0">
-                        <a:buNone/>
-                      </a:pPr>
-                      <a:r>
-                        <a:rPr lang="en-US" sz="800" dirty="0">
-                          <a:solidFill>
-                            <a:srgbClr val="000000"/>
-                          </a:solidFill>
-                          <a:latin typeface="Arial" pitchFamily="34" charset="0"/>
-                          <a:ea typeface="Arial" pitchFamily="34" charset="-122"/>
-                          <a:cs typeface="Arial" pitchFamily="34" charset="-120"/>
-                        </a:rPr>
-                        <a:t>リッチモンドH.東京目白</a:t>
-                      </a:r>
-                      <a:endParaRPr lang="en-US" sz="800" dirty="0">
-                        <a:latin typeface="Arial" charset="0"/>
-                        <a:ea typeface="Arial" charset="0"/>
-                        <a:cs typeface="Arial" charset="0"/>
-                      </a:endParaRPr>
-                    </a:p>
-                  </a:txBody>
-                  <a:tcPr marL="91440" marR="91440" marT="45720" marB="45720">
-                    <a:lnL w="6350" cap="flat" cmpd="sng" algn="ctr">
-                      <a:solidFill>
-                        <a:srgbClr val="CCCCCC"/>
-                      </a:solidFill>
-                      <a:prstDash val="solid"/>
-                      <a:round/>
-                      <a:headEnd type="none" w="med" len="med"/>
-                      <a:tailEnd type="none" w="med" len="med"/>
-                    </a:lnL>
-                    <a:lnR w="6350" cap="flat" cmpd="sng" algn="ctr">
-                      <a:solidFill>
-                        <a:srgbClr val="CCCCCC"/>
-                      </a:solidFill>
-                      <a:prstDash val="solid"/>
-                      <a:round/>
-                      <a:headEnd type="none" w="med" len="med"/>
-                      <a:tailEnd type="none" w="med" len="med"/>
-                    </a:lnR>
-                    <a:lnT w="6350" cap="flat" cmpd="sng" algn="ctr">
-                      <a:solidFill>
-                        <a:srgbClr val="CCCCCC"/>
-                      </a:solidFill>
-                      <a:prstDash val="solid"/>
-                      <a:round/>
-                      <a:headEnd type="none" w="med" len="med"/>
-                      <a:tailEnd type="none" w="med" len="med"/>
-                    </a:lnT>
-                    <a:lnB w="6350" cap="flat" cmpd="sng" algn="ctr">
-                      <a:solidFill>
-                        <a:srgbClr val="CCCCCC"/>
-                      </a:solidFill>
-                      <a:prstDash val="solid"/>
-                      <a:round/>
-                      <a:headEnd type="none" w="med" len="med"/>
-                      <a:tailEnd type="none" w="med" len="med"/>
-                    </a:lnB>
-                    <a:solidFill>
-                      <a:srgbClr val="FFFFFF"/>
-                    </a:solidFill>
-                  </a:tcPr>
-                </a:tc>
-                <a:tc>
-                  <a:txBody>
-                    <a:bodyPr/>
-                    <a:lstStyle/>
-                    <a:p>
-                      <a:pPr algn="ctr" indent="0" marL="0">
-                        <a:buNone/>
-                      </a:pPr>
-                      <a:r>
-                        <a:rPr lang="en-US" sz="900" dirty="0">
-                          <a:solidFill>
-                            <a:srgbClr val="000000"/>
-                          </a:solidFill>
-                          <a:latin typeface="Arial" pitchFamily="34" charset="0"/>
-                          <a:ea typeface="Arial" pitchFamily="34" charset="-122"/>
-                          <a:cs typeface="Arial" pitchFamily="34" charset="-120"/>
-                        </a:rPr>
-                        <a:t>36</a:t>
-                      </a:r>
-                      <a:endParaRPr lang="en-US" sz="900" dirty="0">
-                        <a:latin typeface="Arial" charset="0"/>
-                        <a:ea typeface="Arial" charset="0"/>
-                        <a:cs typeface="Arial" charset="0"/>
-                      </a:endParaRPr>
-                    </a:p>
-                  </a:txBody>
-                  <a:tcPr marL="91440" marR="91440" marT="45720" marB="45720">
-                    <a:lnL w="6350" cap="flat" cmpd="sng" algn="ctr">
-                      <a:solidFill>
-                        <a:srgbClr val="CCCCCC"/>
-                      </a:solidFill>
-                      <a:prstDash val="solid"/>
-                      <a:round/>
-                      <a:headEnd type="none" w="med" len="med"/>
-                      <a:tailEnd type="none" w="med" len="med"/>
-                    </a:lnL>
-                    <a:lnR w="6350" cap="flat" cmpd="sng" algn="ctr">
-                      <a:solidFill>
-                        <a:srgbClr val="CCCCCC"/>
-                      </a:solidFill>
-                      <a:prstDash val="solid"/>
-                      <a:round/>
-                      <a:headEnd type="none" w="med" len="med"/>
-                      <a:tailEnd type="none" w="med" len="med"/>
-                    </a:lnR>
-                    <a:lnT w="6350" cap="flat" cmpd="sng" algn="ctr">
-                      <a:solidFill>
-                        <a:srgbClr val="CCCCCC"/>
-                      </a:solidFill>
-                      <a:prstDash val="solid"/>
-                      <a:round/>
-                      <a:headEnd type="none" w="med" len="med"/>
-                      <a:tailEnd type="none" w="med" len="med"/>
-                    </a:lnT>
-                    <a:lnB w="6350" cap="flat" cmpd="sng" algn="ctr">
-                      <a:solidFill>
-                        <a:srgbClr val="CCCCCC"/>
-                      </a:solidFill>
-                      <a:prstDash val="solid"/>
-                      <a:round/>
-                      <a:headEnd type="none" w="med" len="med"/>
-                      <a:tailEnd type="none" w="med" len="med"/>
-                    </a:lnB>
-                    <a:solidFill>
-                      <a:srgbClr val="FFFFFF"/>
-                    </a:solidFill>
-                  </a:tcPr>
-                </a:tc>
-                <a:tc>
-                  <a:txBody>
-                    <a:bodyPr/>
-                    <a:lstStyle/>
-                    <a:p>
-                      <a:pPr algn="ctr" indent="0" marL="0">
-                        <a:buNone/>
-                      </a:pPr>
-                      <a:r>
-                        <a:rPr lang="en-US" sz="900" dirty="0">
-                          <a:solidFill>
-                            <a:srgbClr val="000000"/>
-                          </a:solidFill>
-                          <a:latin typeface="Arial" pitchFamily="34" charset="0"/>
-                          <a:ea typeface="Arial" pitchFamily="34" charset="-122"/>
-                          <a:cs typeface="Arial" pitchFamily="34" charset="-120"/>
-                        </a:rPr>
-                        <a:t>787</a:t>
-                      </a:r>
-                      <a:endParaRPr lang="en-US" sz="900" dirty="0">
-                        <a:latin typeface="Arial" charset="0"/>
-                        <a:ea typeface="Arial" charset="0"/>
-                        <a:cs typeface="Arial" charset="0"/>
-                      </a:endParaRPr>
-                    </a:p>
-                  </a:txBody>
-                  <a:tcPr marL="91440" marR="91440" marT="45720" marB="45720">
-                    <a:lnL w="6350" cap="flat" cmpd="sng" algn="ctr">
-                      <a:solidFill>
-                        <a:srgbClr val="CCCCCC"/>
-                      </a:solidFill>
-                      <a:prstDash val="solid"/>
-                      <a:round/>
-                      <a:headEnd type="none" w="med" len="med"/>
-                      <a:tailEnd type="none" w="med" len="med"/>
-                    </a:lnL>
-                    <a:lnR w="6350" cap="flat" cmpd="sng" algn="ctr">
-                      <a:solidFill>
-                        <a:srgbClr val="CCCCCC"/>
-                      </a:solidFill>
-                      <a:prstDash val="solid"/>
-                      <a:round/>
-                      <a:headEnd type="none" w="med" len="med"/>
-                      <a:tailEnd type="none" w="med" len="med"/>
-                    </a:lnR>
-                    <a:lnT w="6350" cap="flat" cmpd="sng" algn="ctr">
-                      <a:solidFill>
-                        <a:srgbClr val="CCCCCC"/>
-                      </a:solidFill>
-                      <a:prstDash val="solid"/>
-                      <a:round/>
-                      <a:headEnd type="none" w="med" len="med"/>
-                      <a:tailEnd type="none" w="med" len="med"/>
-                    </a:lnT>
-                    <a:lnB w="6350" cap="flat" cmpd="sng" algn="ctr">
-                      <a:solidFill>
-                        <a:srgbClr val="CCCCCC"/>
-                      </a:solidFill>
-                      <a:prstDash val="solid"/>
-                      <a:round/>
-                      <a:headEnd type="none" w="med" len="med"/>
-                      <a:tailEnd type="none" w="med" len="med"/>
-                    </a:lnB>
-                    <a:solidFill>
-                      <a:srgbClr val="FFFFFF"/>
-                    </a:solidFill>
-                  </a:tcPr>
-                </a:tc>
-                <a:tc>
-                  <a:txBody>
-                    <a:bodyPr/>
-                    <a:lstStyle/>
-                    <a:p>
-                      <a:pPr algn="ctr" indent="0" marL="0">
-                        <a:buNone/>
-                      </a:pPr>
-                      <a:r>
-                        <a:rPr lang="en-US" sz="900" b="1" dirty="0">
-                          <a:solidFill>
-                            <a:srgbClr val="00695C"/>
-                          </a:solidFill>
-                          <a:latin typeface="Arial" pitchFamily="34" charset="0"/>
-                          <a:ea typeface="Arial" pitchFamily="34" charset="-122"/>
-                          <a:cs typeface="Arial" pitchFamily="34" charset="-120"/>
-                        </a:rPr>
-                        <a:t>21.9</a:t>
-                      </a:r>
-                      <a:endParaRPr lang="en-US" sz="900" dirty="0">
-                        <a:latin typeface="Arial" charset="0"/>
-                        <a:ea typeface="Arial" charset="0"/>
-                        <a:cs typeface="Arial" charset="0"/>
-                      </a:endParaRPr>
-                    </a:p>
-                  </a:txBody>
-                  <a:tcPr marL="91440" marR="91440" marT="45720" marB="45720">
-                    <a:lnL w="6350" cap="flat" cmpd="sng" algn="ctr">
-                      <a:solidFill>
-                        <a:srgbClr val="CCCCCC"/>
-                      </a:solidFill>
-                      <a:prstDash val="solid"/>
-                      <a:round/>
-                      <a:headEnd type="none" w="med" len="med"/>
-                      <a:tailEnd type="none" w="med" len="med"/>
-                    </a:lnL>
-                    <a:lnR w="6350" cap="flat" cmpd="sng" algn="ctr">
-                      <a:solidFill>
-                        <a:srgbClr val="CCCCCC"/>
-                      </a:solidFill>
-                      <a:prstDash val="solid"/>
-                      <a:round/>
-                      <a:headEnd type="none" w="med" len="med"/>
-                      <a:tailEnd type="none" w="med" len="med"/>
-                    </a:lnR>
-                    <a:lnT w="6350" cap="flat" cmpd="sng" algn="ctr">
-                      <a:solidFill>
-                        <a:srgbClr val="CCCCCC"/>
-                      </a:solidFill>
-                      <a:prstDash val="solid"/>
-                      <a:round/>
-                      <a:headEnd type="none" w="med" len="med"/>
-                      <a:tailEnd type="none" w="med" len="med"/>
-                    </a:lnT>
-                    <a:lnB w="6350" cap="flat" cmpd="sng" algn="ctr">
-                      <a:solidFill>
-                        <a:srgbClr val="CCCCCC"/>
-                      </a:solidFill>
-                      <a:prstDash val="solid"/>
-                      <a:round/>
-                      <a:headEnd type="none" w="med" len="med"/>
-                      <a:tailEnd type="none" w="med" len="med"/>
-                    </a:lnB>
-                    <a:solidFill>
-                      <a:srgbClr val="FFFFFF"/>
-                    </a:solidFill>
-                  </a:tcPr>
-                </a:tc>
-              </a:tr>
-              <a:tr h="304800">
-                <a:tc>
-                  <a:txBody>
-                    <a:bodyPr/>
-                    <a:lstStyle/>
-                    <a:p>
-                      <a:pPr algn="ctr" indent="0" marL="0">
-                        <a:buNone/>
-                      </a:pPr>
-                      <a:r>
-                        <a:rPr lang="en-US" sz="900" dirty="0">
-                          <a:solidFill>
-                            <a:srgbClr val="000000"/>
-                          </a:solidFill>
-                          <a:latin typeface="Arial" pitchFamily="34" charset="0"/>
-                          <a:ea typeface="Arial" pitchFamily="34" charset="-122"/>
-                          <a:cs typeface="Arial" pitchFamily="34" charset="-120"/>
-                        </a:rPr>
-                        <a:t>アルチャナ</a:t>
+                        <a:t>モハン</a:t>
                       </a:r>
                       <a:endParaRPr lang="en-US" sz="900" dirty="0">
                         <a:latin typeface="Arial" charset="0"/>
@@ -8585,7 +7901,7 @@
                           <a:ea typeface="Arial" pitchFamily="34" charset="-122"/>
                           <a:cs typeface="Arial" pitchFamily="34" charset="-120"/>
                         </a:rPr>
-                        <a:t>24</a:t>
+                        <a:t>28</a:t>
                       </a:r>
                       <a:endParaRPr lang="en-US" sz="900" dirty="0">
                         <a:latin typeface="Arial" charset="0"/>
@@ -8653,7 +7969,7 @@
                           <a:ea typeface="Arial" pitchFamily="34" charset="-122"/>
                           <a:cs typeface="Arial" pitchFamily="34" charset="-120"/>
                         </a:rPr>
-                        <a:t>515</a:t>
+                        <a:t>676</a:t>
                       </a:r>
                       <a:endParaRPr lang="en-US" sz="900" dirty="0">
                         <a:latin typeface="Arial" charset="0"/>
@@ -8721,7 +8037,691 @@
                           <a:ea typeface="Arial" pitchFamily="34" charset="-122"/>
                           <a:cs typeface="Arial" pitchFamily="34" charset="-120"/>
                         </a:rPr>
-                        <a:t>21.5</a:t>
+                        <a:t>24.1</a:t>
+                      </a:r>
+                      <a:endParaRPr lang="en-US" sz="900" dirty="0">
+                        <a:latin typeface="Arial" charset="0"/>
+                        <a:ea typeface="Arial" charset="0"/>
+                        <a:cs typeface="Arial" charset="0"/>
+                      </a:endParaRPr>
+                    </a:p>
+                  </a:txBody>
+                  <a:tcPr marL="91440" marR="91440" marT="45720" marB="45720">
+                    <a:lnL w="6350" cap="flat" cmpd="sng" algn="ctr">
+                      <a:solidFill>
+                        <a:srgbClr val="CCCCCC"/>
+                      </a:solidFill>
+                      <a:prstDash val="solid"/>
+                      <a:round/>
+                      <a:headEnd type="none" w="med" len="med"/>
+                      <a:tailEnd type="none" w="med" len="med"/>
+                    </a:lnL>
+                    <a:lnR w="6350" cap="flat" cmpd="sng" algn="ctr">
+                      <a:solidFill>
+                        <a:srgbClr val="CCCCCC"/>
+                      </a:solidFill>
+                      <a:prstDash val="solid"/>
+                      <a:round/>
+                      <a:headEnd type="none" w="med" len="med"/>
+                      <a:tailEnd type="none" w="med" len="med"/>
+                    </a:lnR>
+                    <a:lnT w="6350" cap="flat" cmpd="sng" algn="ctr">
+                      <a:solidFill>
+                        <a:srgbClr val="CCCCCC"/>
+                      </a:solidFill>
+                      <a:prstDash val="solid"/>
+                      <a:round/>
+                      <a:headEnd type="none" w="med" len="med"/>
+                      <a:tailEnd type="none" w="med" len="med"/>
+                    </a:lnT>
+                    <a:lnB w="6350" cap="flat" cmpd="sng" algn="ctr">
+                      <a:solidFill>
+                        <a:srgbClr val="CCCCCC"/>
+                      </a:solidFill>
+                      <a:prstDash val="solid"/>
+                      <a:round/>
+                      <a:headEnd type="none" w="med" len="med"/>
+                      <a:tailEnd type="none" w="med" len="med"/>
+                    </a:lnB>
+                    <a:solidFill>
+                      <a:srgbClr val="F5F7FA"/>
+                    </a:solidFill>
+                  </a:tcPr>
+                </a:tc>
+              </a:tr>
+              <a:tr h="304800">
+                <a:tc>
+                  <a:txBody>
+                    <a:bodyPr/>
+                    <a:lstStyle/>
+                    <a:p>
+                      <a:pPr algn="ctr" indent="0" marL="0">
+                        <a:buNone/>
+                      </a:pPr>
+                      <a:r>
+                        <a:rPr lang="en-US" sz="900" dirty="0">
+                          <a:solidFill>
+                            <a:srgbClr val="000000"/>
+                          </a:solidFill>
+                          <a:latin typeface="Arial" pitchFamily="34" charset="0"/>
+                          <a:ea typeface="Arial" pitchFamily="34" charset="-122"/>
+                          <a:cs typeface="Arial" pitchFamily="34" charset="-120"/>
+                        </a:rPr>
+                        <a:t>ブラトキ</a:t>
+                      </a:r>
+                      <a:endParaRPr lang="en-US" sz="900" dirty="0">
+                        <a:latin typeface="Arial" charset="0"/>
+                        <a:ea typeface="Arial" charset="0"/>
+                        <a:cs typeface="Arial" charset="0"/>
+                      </a:endParaRPr>
+                    </a:p>
+                  </a:txBody>
+                  <a:tcPr marL="91440" marR="91440" marT="45720" marB="45720">
+                    <a:lnL w="6350" cap="flat" cmpd="sng" algn="ctr">
+                      <a:solidFill>
+                        <a:srgbClr val="CCCCCC"/>
+                      </a:solidFill>
+                      <a:prstDash val="solid"/>
+                      <a:round/>
+                      <a:headEnd type="none" w="med" len="med"/>
+                      <a:tailEnd type="none" w="med" len="med"/>
+                    </a:lnL>
+                    <a:lnR w="6350" cap="flat" cmpd="sng" algn="ctr">
+                      <a:solidFill>
+                        <a:srgbClr val="CCCCCC"/>
+                      </a:solidFill>
+                      <a:prstDash val="solid"/>
+                      <a:round/>
+                      <a:headEnd type="none" w="med" len="med"/>
+                      <a:tailEnd type="none" w="med" len="med"/>
+                    </a:lnR>
+                    <a:lnT w="6350" cap="flat" cmpd="sng" algn="ctr">
+                      <a:solidFill>
+                        <a:srgbClr val="CCCCCC"/>
+                      </a:solidFill>
+                      <a:prstDash val="solid"/>
+                      <a:round/>
+                      <a:headEnd type="none" w="med" len="med"/>
+                      <a:tailEnd type="none" w="med" len="med"/>
+                    </a:lnT>
+                    <a:lnB w="6350" cap="flat" cmpd="sng" algn="ctr">
+                      <a:solidFill>
+                        <a:srgbClr val="CCCCCC"/>
+                      </a:solidFill>
+                      <a:prstDash val="solid"/>
+                      <a:round/>
+                      <a:headEnd type="none" w="med" len="med"/>
+                      <a:tailEnd type="none" w="med" len="med"/>
+                    </a:lnB>
+                    <a:solidFill>
+                      <a:srgbClr val="FFFFFF"/>
+                    </a:solidFill>
+                  </a:tcPr>
+                </a:tc>
+                <a:tc>
+                  <a:txBody>
+                    <a:bodyPr/>
+                    <a:lstStyle/>
+                    <a:p>
+                      <a:pPr algn="ctr" indent="0" marL="0">
+                        <a:buNone/>
+                      </a:pPr>
+                      <a:r>
+                        <a:rPr lang="en-US" sz="800" dirty="0">
+                          <a:solidFill>
+                            <a:srgbClr val="000000"/>
+                          </a:solidFill>
+                          <a:latin typeface="Arial" pitchFamily="34" charset="0"/>
+                          <a:ea typeface="Arial" pitchFamily="34" charset="-122"/>
+                          <a:cs typeface="Arial" pitchFamily="34" charset="-120"/>
+                        </a:rPr>
+                        <a:t>チサンH.浜松町</a:t>
+                      </a:r>
+                      <a:endParaRPr lang="en-US" sz="800" dirty="0">
+                        <a:latin typeface="Arial" charset="0"/>
+                        <a:ea typeface="Arial" charset="0"/>
+                        <a:cs typeface="Arial" charset="0"/>
+                      </a:endParaRPr>
+                    </a:p>
+                  </a:txBody>
+                  <a:tcPr marL="91440" marR="91440" marT="45720" marB="45720">
+                    <a:lnL w="6350" cap="flat" cmpd="sng" algn="ctr">
+                      <a:solidFill>
+                        <a:srgbClr val="CCCCCC"/>
+                      </a:solidFill>
+                      <a:prstDash val="solid"/>
+                      <a:round/>
+                      <a:headEnd type="none" w="med" len="med"/>
+                      <a:tailEnd type="none" w="med" len="med"/>
+                    </a:lnL>
+                    <a:lnR w="6350" cap="flat" cmpd="sng" algn="ctr">
+                      <a:solidFill>
+                        <a:srgbClr val="CCCCCC"/>
+                      </a:solidFill>
+                      <a:prstDash val="solid"/>
+                      <a:round/>
+                      <a:headEnd type="none" w="med" len="med"/>
+                      <a:tailEnd type="none" w="med" len="med"/>
+                    </a:lnR>
+                    <a:lnT w="6350" cap="flat" cmpd="sng" algn="ctr">
+                      <a:solidFill>
+                        <a:srgbClr val="CCCCCC"/>
+                      </a:solidFill>
+                      <a:prstDash val="solid"/>
+                      <a:round/>
+                      <a:headEnd type="none" w="med" len="med"/>
+                      <a:tailEnd type="none" w="med" len="med"/>
+                    </a:lnT>
+                    <a:lnB w="6350" cap="flat" cmpd="sng" algn="ctr">
+                      <a:solidFill>
+                        <a:srgbClr val="CCCCCC"/>
+                      </a:solidFill>
+                      <a:prstDash val="solid"/>
+                      <a:round/>
+                      <a:headEnd type="none" w="med" len="med"/>
+                      <a:tailEnd type="none" w="med" len="med"/>
+                    </a:lnB>
+                    <a:solidFill>
+                      <a:srgbClr val="FFFFFF"/>
+                    </a:solidFill>
+                  </a:tcPr>
+                </a:tc>
+                <a:tc>
+                  <a:txBody>
+                    <a:bodyPr/>
+                    <a:lstStyle/>
+                    <a:p>
+                      <a:pPr algn="ctr" indent="0" marL="0">
+                        <a:buNone/>
+                      </a:pPr>
+                      <a:r>
+                        <a:rPr lang="en-US" sz="900" dirty="0">
+                          <a:solidFill>
+                            <a:srgbClr val="000000"/>
+                          </a:solidFill>
+                          <a:latin typeface="Arial" pitchFamily="34" charset="0"/>
+                          <a:ea typeface="Arial" pitchFamily="34" charset="-122"/>
+                          <a:cs typeface="Arial" pitchFamily="34" charset="-120"/>
+                        </a:rPr>
+                        <a:t>56</a:t>
+                      </a:r>
+                      <a:endParaRPr lang="en-US" sz="900" dirty="0">
+                        <a:latin typeface="Arial" charset="0"/>
+                        <a:ea typeface="Arial" charset="0"/>
+                        <a:cs typeface="Arial" charset="0"/>
+                      </a:endParaRPr>
+                    </a:p>
+                  </a:txBody>
+                  <a:tcPr marL="91440" marR="91440" marT="45720" marB="45720">
+                    <a:lnL w="6350" cap="flat" cmpd="sng" algn="ctr">
+                      <a:solidFill>
+                        <a:srgbClr val="CCCCCC"/>
+                      </a:solidFill>
+                      <a:prstDash val="solid"/>
+                      <a:round/>
+                      <a:headEnd type="none" w="med" len="med"/>
+                      <a:tailEnd type="none" w="med" len="med"/>
+                    </a:lnL>
+                    <a:lnR w="6350" cap="flat" cmpd="sng" algn="ctr">
+                      <a:solidFill>
+                        <a:srgbClr val="CCCCCC"/>
+                      </a:solidFill>
+                      <a:prstDash val="solid"/>
+                      <a:round/>
+                      <a:headEnd type="none" w="med" len="med"/>
+                      <a:tailEnd type="none" w="med" len="med"/>
+                    </a:lnR>
+                    <a:lnT w="6350" cap="flat" cmpd="sng" algn="ctr">
+                      <a:solidFill>
+                        <a:srgbClr val="CCCCCC"/>
+                      </a:solidFill>
+                      <a:prstDash val="solid"/>
+                      <a:round/>
+                      <a:headEnd type="none" w="med" len="med"/>
+                      <a:tailEnd type="none" w="med" len="med"/>
+                    </a:lnT>
+                    <a:lnB w="6350" cap="flat" cmpd="sng" algn="ctr">
+                      <a:solidFill>
+                        <a:srgbClr val="CCCCCC"/>
+                      </a:solidFill>
+                      <a:prstDash val="solid"/>
+                      <a:round/>
+                      <a:headEnd type="none" w="med" len="med"/>
+                      <a:tailEnd type="none" w="med" len="med"/>
+                    </a:lnB>
+                    <a:solidFill>
+                      <a:srgbClr val="FFFFFF"/>
+                    </a:solidFill>
+                  </a:tcPr>
+                </a:tc>
+                <a:tc>
+                  <a:txBody>
+                    <a:bodyPr/>
+                    <a:lstStyle/>
+                    <a:p>
+                      <a:pPr algn="ctr" indent="0" marL="0">
+                        <a:buNone/>
+                      </a:pPr>
+                      <a:r>
+                        <a:rPr lang="en-US" sz="900" dirty="0">
+                          <a:solidFill>
+                            <a:srgbClr val="000000"/>
+                          </a:solidFill>
+                          <a:latin typeface="Arial" pitchFamily="34" charset="0"/>
+                          <a:ea typeface="Arial" pitchFamily="34" charset="-122"/>
+                          <a:cs typeface="Arial" pitchFamily="34" charset="-120"/>
+                        </a:rPr>
+                        <a:t>1273</a:t>
+                      </a:r>
+                      <a:endParaRPr lang="en-US" sz="900" dirty="0">
+                        <a:latin typeface="Arial" charset="0"/>
+                        <a:ea typeface="Arial" charset="0"/>
+                        <a:cs typeface="Arial" charset="0"/>
+                      </a:endParaRPr>
+                    </a:p>
+                  </a:txBody>
+                  <a:tcPr marL="91440" marR="91440" marT="45720" marB="45720">
+                    <a:lnL w="6350" cap="flat" cmpd="sng" algn="ctr">
+                      <a:solidFill>
+                        <a:srgbClr val="CCCCCC"/>
+                      </a:solidFill>
+                      <a:prstDash val="solid"/>
+                      <a:round/>
+                      <a:headEnd type="none" w="med" len="med"/>
+                      <a:tailEnd type="none" w="med" len="med"/>
+                    </a:lnL>
+                    <a:lnR w="6350" cap="flat" cmpd="sng" algn="ctr">
+                      <a:solidFill>
+                        <a:srgbClr val="CCCCCC"/>
+                      </a:solidFill>
+                      <a:prstDash val="solid"/>
+                      <a:round/>
+                      <a:headEnd type="none" w="med" len="med"/>
+                      <a:tailEnd type="none" w="med" len="med"/>
+                    </a:lnR>
+                    <a:lnT w="6350" cap="flat" cmpd="sng" algn="ctr">
+                      <a:solidFill>
+                        <a:srgbClr val="CCCCCC"/>
+                      </a:solidFill>
+                      <a:prstDash val="solid"/>
+                      <a:round/>
+                      <a:headEnd type="none" w="med" len="med"/>
+                      <a:tailEnd type="none" w="med" len="med"/>
+                    </a:lnT>
+                    <a:lnB w="6350" cap="flat" cmpd="sng" algn="ctr">
+                      <a:solidFill>
+                        <a:srgbClr val="CCCCCC"/>
+                      </a:solidFill>
+                      <a:prstDash val="solid"/>
+                      <a:round/>
+                      <a:headEnd type="none" w="med" len="med"/>
+                      <a:tailEnd type="none" w="med" len="med"/>
+                    </a:lnB>
+                    <a:solidFill>
+                      <a:srgbClr val="FFFFFF"/>
+                    </a:solidFill>
+                  </a:tcPr>
+                </a:tc>
+                <a:tc>
+                  <a:txBody>
+                    <a:bodyPr/>
+                    <a:lstStyle/>
+                    <a:p>
+                      <a:pPr algn="ctr" indent="0" marL="0">
+                        <a:buNone/>
+                      </a:pPr>
+                      <a:r>
+                        <a:rPr lang="en-US" sz="900" b="1" dirty="0">
+                          <a:solidFill>
+                            <a:srgbClr val="00695C"/>
+                          </a:solidFill>
+                          <a:latin typeface="Arial" pitchFamily="34" charset="0"/>
+                          <a:ea typeface="Arial" pitchFamily="34" charset="-122"/>
+                          <a:cs typeface="Arial" pitchFamily="34" charset="-120"/>
+                        </a:rPr>
+                        <a:t>22.7</a:t>
+                      </a:r>
+                      <a:endParaRPr lang="en-US" sz="900" dirty="0">
+                        <a:latin typeface="Arial" charset="0"/>
+                        <a:ea typeface="Arial" charset="0"/>
+                        <a:cs typeface="Arial" charset="0"/>
+                      </a:endParaRPr>
+                    </a:p>
+                  </a:txBody>
+                  <a:tcPr marL="91440" marR="91440" marT="45720" marB="45720">
+                    <a:lnL w="6350" cap="flat" cmpd="sng" algn="ctr">
+                      <a:solidFill>
+                        <a:srgbClr val="CCCCCC"/>
+                      </a:solidFill>
+                      <a:prstDash val="solid"/>
+                      <a:round/>
+                      <a:headEnd type="none" w="med" len="med"/>
+                      <a:tailEnd type="none" w="med" len="med"/>
+                    </a:lnL>
+                    <a:lnR w="6350" cap="flat" cmpd="sng" algn="ctr">
+                      <a:solidFill>
+                        <a:srgbClr val="CCCCCC"/>
+                      </a:solidFill>
+                      <a:prstDash val="solid"/>
+                      <a:round/>
+                      <a:headEnd type="none" w="med" len="med"/>
+                      <a:tailEnd type="none" w="med" len="med"/>
+                    </a:lnR>
+                    <a:lnT w="6350" cap="flat" cmpd="sng" algn="ctr">
+                      <a:solidFill>
+                        <a:srgbClr val="CCCCCC"/>
+                      </a:solidFill>
+                      <a:prstDash val="solid"/>
+                      <a:round/>
+                      <a:headEnd type="none" w="med" len="med"/>
+                      <a:tailEnd type="none" w="med" len="med"/>
+                    </a:lnT>
+                    <a:lnB w="6350" cap="flat" cmpd="sng" algn="ctr">
+                      <a:solidFill>
+                        <a:srgbClr val="CCCCCC"/>
+                      </a:solidFill>
+                      <a:prstDash val="solid"/>
+                      <a:round/>
+                      <a:headEnd type="none" w="med" len="med"/>
+                      <a:tailEnd type="none" w="med" len="med"/>
+                    </a:lnB>
+                    <a:solidFill>
+                      <a:srgbClr val="FFFFFF"/>
+                    </a:solidFill>
+                  </a:tcPr>
+                </a:tc>
+              </a:tr>
+              <a:tr h="304800">
+                <a:tc>
+                  <a:txBody>
+                    <a:bodyPr/>
+                    <a:lstStyle/>
+                    <a:p>
+                      <a:pPr algn="ctr" indent="0" marL="0">
+                        <a:buNone/>
+                      </a:pPr>
+                      <a:r>
+                        <a:rPr lang="en-US" sz="900" dirty="0">
+                          <a:solidFill>
+                            <a:srgbClr val="000000"/>
+                          </a:solidFill>
+                          <a:latin typeface="Arial" pitchFamily="34" charset="0"/>
+                          <a:ea typeface="Arial" pitchFamily="34" charset="-122"/>
+                          <a:cs typeface="Arial" pitchFamily="34" charset="-120"/>
+                        </a:rPr>
+                        <a:t>コイララ</a:t>
+                      </a:r>
+                      <a:endParaRPr lang="en-US" sz="900" dirty="0">
+                        <a:latin typeface="Arial" charset="0"/>
+                        <a:ea typeface="Arial" charset="0"/>
+                        <a:cs typeface="Arial" charset="0"/>
+                      </a:endParaRPr>
+                    </a:p>
+                  </a:txBody>
+                  <a:tcPr marL="91440" marR="91440" marT="45720" marB="45720">
+                    <a:lnL w="6350" cap="flat" cmpd="sng" algn="ctr">
+                      <a:solidFill>
+                        <a:srgbClr val="CCCCCC"/>
+                      </a:solidFill>
+                      <a:prstDash val="solid"/>
+                      <a:round/>
+                      <a:headEnd type="none" w="med" len="med"/>
+                      <a:tailEnd type="none" w="med" len="med"/>
+                    </a:lnL>
+                    <a:lnR w="6350" cap="flat" cmpd="sng" algn="ctr">
+                      <a:solidFill>
+                        <a:srgbClr val="CCCCCC"/>
+                      </a:solidFill>
+                      <a:prstDash val="solid"/>
+                      <a:round/>
+                      <a:headEnd type="none" w="med" len="med"/>
+                      <a:tailEnd type="none" w="med" len="med"/>
+                    </a:lnR>
+                    <a:lnT w="6350" cap="flat" cmpd="sng" algn="ctr">
+                      <a:solidFill>
+                        <a:srgbClr val="CCCCCC"/>
+                      </a:solidFill>
+                      <a:prstDash val="solid"/>
+                      <a:round/>
+                      <a:headEnd type="none" w="med" len="med"/>
+                      <a:tailEnd type="none" w="med" len="med"/>
+                    </a:lnT>
+                    <a:lnB w="6350" cap="flat" cmpd="sng" algn="ctr">
+                      <a:solidFill>
+                        <a:srgbClr val="CCCCCC"/>
+                      </a:solidFill>
+                      <a:prstDash val="solid"/>
+                      <a:round/>
+                      <a:headEnd type="none" w="med" len="med"/>
+                      <a:tailEnd type="none" w="med" len="med"/>
+                    </a:lnB>
+                    <a:solidFill>
+                      <a:srgbClr val="F5F7FA"/>
+                    </a:solidFill>
+                  </a:tcPr>
+                </a:tc>
+                <a:tc>
+                  <a:txBody>
+                    <a:bodyPr/>
+                    <a:lstStyle/>
+                    <a:p>
+                      <a:pPr algn="ctr" indent="0" marL="0">
+                        <a:buNone/>
+                      </a:pPr>
+                      <a:r>
+                        <a:rPr lang="en-US" sz="800" dirty="0">
+                          <a:solidFill>
+                            <a:srgbClr val="000000"/>
+                          </a:solidFill>
+                          <a:latin typeface="Arial" pitchFamily="34" charset="0"/>
+                          <a:ea typeface="Arial" pitchFamily="34" charset="-122"/>
+                          <a:cs typeface="Arial" pitchFamily="34" charset="-120"/>
+                        </a:rPr>
+                        <a:t>チサンH.浜松町</a:t>
+                      </a:r>
+                      <a:endParaRPr lang="en-US" sz="800" dirty="0">
+                        <a:latin typeface="Arial" charset="0"/>
+                        <a:ea typeface="Arial" charset="0"/>
+                        <a:cs typeface="Arial" charset="0"/>
+                      </a:endParaRPr>
+                    </a:p>
+                  </a:txBody>
+                  <a:tcPr marL="91440" marR="91440" marT="45720" marB="45720">
+                    <a:lnL w="6350" cap="flat" cmpd="sng" algn="ctr">
+                      <a:solidFill>
+                        <a:srgbClr val="CCCCCC"/>
+                      </a:solidFill>
+                      <a:prstDash val="solid"/>
+                      <a:round/>
+                      <a:headEnd type="none" w="med" len="med"/>
+                      <a:tailEnd type="none" w="med" len="med"/>
+                    </a:lnL>
+                    <a:lnR w="6350" cap="flat" cmpd="sng" algn="ctr">
+                      <a:solidFill>
+                        <a:srgbClr val="CCCCCC"/>
+                      </a:solidFill>
+                      <a:prstDash val="solid"/>
+                      <a:round/>
+                      <a:headEnd type="none" w="med" len="med"/>
+                      <a:tailEnd type="none" w="med" len="med"/>
+                    </a:lnR>
+                    <a:lnT w="6350" cap="flat" cmpd="sng" algn="ctr">
+                      <a:solidFill>
+                        <a:srgbClr val="CCCCCC"/>
+                      </a:solidFill>
+                      <a:prstDash val="solid"/>
+                      <a:round/>
+                      <a:headEnd type="none" w="med" len="med"/>
+                      <a:tailEnd type="none" w="med" len="med"/>
+                    </a:lnT>
+                    <a:lnB w="6350" cap="flat" cmpd="sng" algn="ctr">
+                      <a:solidFill>
+                        <a:srgbClr val="CCCCCC"/>
+                      </a:solidFill>
+                      <a:prstDash val="solid"/>
+                      <a:round/>
+                      <a:headEnd type="none" w="med" len="med"/>
+                      <a:tailEnd type="none" w="med" len="med"/>
+                    </a:lnB>
+                    <a:solidFill>
+                      <a:srgbClr val="F5F7FA"/>
+                    </a:solidFill>
+                  </a:tcPr>
+                </a:tc>
+                <a:tc>
+                  <a:txBody>
+                    <a:bodyPr/>
+                    <a:lstStyle/>
+                    <a:p>
+                      <a:pPr algn="ctr" indent="0" marL="0">
+                        <a:buNone/>
+                      </a:pPr>
+                      <a:r>
+                        <a:rPr lang="en-US" sz="900" dirty="0">
+                          <a:solidFill>
+                            <a:srgbClr val="000000"/>
+                          </a:solidFill>
+                          <a:latin typeface="Arial" pitchFamily="34" charset="0"/>
+                          <a:ea typeface="Arial" pitchFamily="34" charset="-122"/>
+                          <a:cs typeface="Arial" pitchFamily="34" charset="-120"/>
+                        </a:rPr>
+                        <a:t>55</a:t>
+                      </a:r>
+                      <a:endParaRPr lang="en-US" sz="900" dirty="0">
+                        <a:latin typeface="Arial" charset="0"/>
+                        <a:ea typeface="Arial" charset="0"/>
+                        <a:cs typeface="Arial" charset="0"/>
+                      </a:endParaRPr>
+                    </a:p>
+                  </a:txBody>
+                  <a:tcPr marL="91440" marR="91440" marT="45720" marB="45720">
+                    <a:lnL w="6350" cap="flat" cmpd="sng" algn="ctr">
+                      <a:solidFill>
+                        <a:srgbClr val="CCCCCC"/>
+                      </a:solidFill>
+                      <a:prstDash val="solid"/>
+                      <a:round/>
+                      <a:headEnd type="none" w="med" len="med"/>
+                      <a:tailEnd type="none" w="med" len="med"/>
+                    </a:lnL>
+                    <a:lnR w="6350" cap="flat" cmpd="sng" algn="ctr">
+                      <a:solidFill>
+                        <a:srgbClr val="CCCCCC"/>
+                      </a:solidFill>
+                      <a:prstDash val="solid"/>
+                      <a:round/>
+                      <a:headEnd type="none" w="med" len="med"/>
+                      <a:tailEnd type="none" w="med" len="med"/>
+                    </a:lnR>
+                    <a:lnT w="6350" cap="flat" cmpd="sng" algn="ctr">
+                      <a:solidFill>
+                        <a:srgbClr val="CCCCCC"/>
+                      </a:solidFill>
+                      <a:prstDash val="solid"/>
+                      <a:round/>
+                      <a:headEnd type="none" w="med" len="med"/>
+                      <a:tailEnd type="none" w="med" len="med"/>
+                    </a:lnT>
+                    <a:lnB w="6350" cap="flat" cmpd="sng" algn="ctr">
+                      <a:solidFill>
+                        <a:srgbClr val="CCCCCC"/>
+                      </a:solidFill>
+                      <a:prstDash val="solid"/>
+                      <a:round/>
+                      <a:headEnd type="none" w="med" len="med"/>
+                      <a:tailEnd type="none" w="med" len="med"/>
+                    </a:lnB>
+                    <a:solidFill>
+                      <a:srgbClr val="F5F7FA"/>
+                    </a:solidFill>
+                  </a:tcPr>
+                </a:tc>
+                <a:tc>
+                  <a:txBody>
+                    <a:bodyPr/>
+                    <a:lstStyle/>
+                    <a:p>
+                      <a:pPr algn="ctr" indent="0" marL="0">
+                        <a:buNone/>
+                      </a:pPr>
+                      <a:r>
+                        <a:rPr lang="en-US" sz="900" dirty="0">
+                          <a:solidFill>
+                            <a:srgbClr val="000000"/>
+                          </a:solidFill>
+                          <a:latin typeface="Arial" pitchFamily="34" charset="0"/>
+                          <a:ea typeface="Arial" pitchFamily="34" charset="-122"/>
+                          <a:cs typeface="Arial" pitchFamily="34" charset="-120"/>
+                        </a:rPr>
+                        <a:t>1233</a:t>
+                      </a:r>
+                      <a:endParaRPr lang="en-US" sz="900" dirty="0">
+                        <a:latin typeface="Arial" charset="0"/>
+                        <a:ea typeface="Arial" charset="0"/>
+                        <a:cs typeface="Arial" charset="0"/>
+                      </a:endParaRPr>
+                    </a:p>
+                  </a:txBody>
+                  <a:tcPr marL="91440" marR="91440" marT="45720" marB="45720">
+                    <a:lnL w="6350" cap="flat" cmpd="sng" algn="ctr">
+                      <a:solidFill>
+                        <a:srgbClr val="CCCCCC"/>
+                      </a:solidFill>
+                      <a:prstDash val="solid"/>
+                      <a:round/>
+                      <a:headEnd type="none" w="med" len="med"/>
+                      <a:tailEnd type="none" w="med" len="med"/>
+                    </a:lnL>
+                    <a:lnR w="6350" cap="flat" cmpd="sng" algn="ctr">
+                      <a:solidFill>
+                        <a:srgbClr val="CCCCCC"/>
+                      </a:solidFill>
+                      <a:prstDash val="solid"/>
+                      <a:round/>
+                      <a:headEnd type="none" w="med" len="med"/>
+                      <a:tailEnd type="none" w="med" len="med"/>
+                    </a:lnR>
+                    <a:lnT w="6350" cap="flat" cmpd="sng" algn="ctr">
+                      <a:solidFill>
+                        <a:srgbClr val="CCCCCC"/>
+                      </a:solidFill>
+                      <a:prstDash val="solid"/>
+                      <a:round/>
+                      <a:headEnd type="none" w="med" len="med"/>
+                      <a:tailEnd type="none" w="med" len="med"/>
+                    </a:lnT>
+                    <a:lnB w="6350" cap="flat" cmpd="sng" algn="ctr">
+                      <a:solidFill>
+                        <a:srgbClr val="CCCCCC"/>
+                      </a:solidFill>
+                      <a:prstDash val="solid"/>
+                      <a:round/>
+                      <a:headEnd type="none" w="med" len="med"/>
+                      <a:tailEnd type="none" w="med" len="med"/>
+                    </a:lnB>
+                    <a:solidFill>
+                      <a:srgbClr val="F5F7FA"/>
+                    </a:solidFill>
+                  </a:tcPr>
+                </a:tc>
+                <a:tc>
+                  <a:txBody>
+                    <a:bodyPr/>
+                    <a:lstStyle/>
+                    <a:p>
+                      <a:pPr algn="ctr" indent="0" marL="0">
+                        <a:buNone/>
+                      </a:pPr>
+                      <a:r>
+                        <a:rPr lang="en-US" sz="900" b="1" dirty="0">
+                          <a:solidFill>
+                            <a:srgbClr val="00695C"/>
+                          </a:solidFill>
+                          <a:latin typeface="Arial" pitchFamily="34" charset="0"/>
+                          <a:ea typeface="Arial" pitchFamily="34" charset="-122"/>
+                          <a:cs typeface="Arial" pitchFamily="34" charset="-120"/>
+                        </a:rPr>
+                        <a:t>22.4</a:t>
                       </a:r>
                       <a:endParaRPr lang="en-US" sz="900" dirty="0">
                         <a:latin typeface="Arial" charset="0"/>
@@ -8871,7 +8871,7 @@
                 <a:ea typeface="Arial" pitchFamily="34" charset="-122"/>
                 <a:cs typeface="Arial" pitchFamily="34" charset="-120"/>
               </a:rPr>
-              <a:t>10.2室/日</a:t>
+              <a:t>11.1室/日</a:t>
             </a:r>
             <a:endParaRPr lang="en-US" sz="1800" dirty="0"/>
           </a:p>
@@ -8971,7 +8971,7 @@
                 <a:ea typeface="Arial" pitchFamily="34" charset="-122"/>
                 <a:cs typeface="Arial" pitchFamily="34" charset="-120"/>
               </a:rPr>
-              <a:t>10.1室/日</a:t>
+              <a:t>12.2室/日</a:t>
             </a:r>
             <a:endParaRPr lang="en-US" sz="1800" dirty="0"/>
           </a:p>
@@ -9071,7 +9071,7 @@
                 <a:ea typeface="Arial" pitchFamily="34" charset="-122"/>
                 <a:cs typeface="Arial" pitchFamily="34" charset="-120"/>
               </a:rPr>
-              <a:t>24.3室/日</a:t>
+              <a:t>26.0室/日</a:t>
             </a:r>
             <a:endParaRPr lang="en-US" sz="1800" dirty="0"/>
           </a:p>
